--- a/files/teaching-resources/concordiacollege-busn-301/busn-301-lecture-note/busn301-ch21.pptx
+++ b/files/teaching-resources/concordiacollege-busn-301/busn-301-lecture-note/busn301-ch21.pptx
@@ -5,7 +5,7 @@
     <p:sldMasterId id="2147483648" r:id="rId1"/>
   </p:sldMasterIdLst>
   <p:notesMasterIdLst>
-    <p:notesMasterId r:id="rId28"/>
+    <p:notesMasterId r:id="rId29"/>
   </p:notesMasterIdLst>
   <p:sldIdLst>
     <p:sldId id="256" r:id="rId2"/>
@@ -30,10 +30,11 @@
     <p:sldId id="741" r:id="rId21"/>
     <p:sldId id="738" r:id="rId22"/>
     <p:sldId id="739" r:id="rId23"/>
-    <p:sldId id="599" r:id="rId24"/>
-    <p:sldId id="647" r:id="rId25"/>
-    <p:sldId id="742" r:id="rId26"/>
-    <p:sldId id="422" r:id="rId27"/>
+    <p:sldId id="743" r:id="rId24"/>
+    <p:sldId id="599" r:id="rId25"/>
+    <p:sldId id="647" r:id="rId26"/>
+    <p:sldId id="742" r:id="rId27"/>
+    <p:sldId id="422" r:id="rId28"/>
   </p:sldIdLst>
   <p:sldSz cx="12188825" cy="6858000"/>
   <p:notesSz cx="6858000" cy="9144000"/>
@@ -233,7 +234,7 @@
           <a:p>
             <a:fld id="{2D359EC7-19C7-4638-A61A-0E2B59861576}" type="datetimeFigureOut">
               <a:rPr lang="en-US" smtClean="0"/>
-              <a:t>2/26/2026</a:t>
+              <a:t>3/18/2026</a:t>
             </a:fld>
             <a:endParaRPr lang="en-US"/>
           </a:p>
@@ -679,7 +680,7 @@
           <a:p>
             <a:fld id="{7968114D-31B9-4B78-9ACC-70FB90027BFD}" type="datetime1">
               <a:rPr lang="en-US" smtClean="0"/>
-              <a:t>2/26/2026</a:t>
+              <a:t>3/18/2026</a:t>
             </a:fld>
             <a:endParaRPr lang="en-US"/>
           </a:p>
@@ -850,7 +851,7 @@
           <a:p>
             <a:fld id="{873F4A91-75B0-4800-B4E2-20956DB94300}" type="datetime1">
               <a:rPr lang="en-US" smtClean="0"/>
-              <a:t>2/26/2026</a:t>
+              <a:t>3/18/2026</a:t>
             </a:fld>
             <a:endParaRPr lang="en-US"/>
           </a:p>
@@ -1031,7 +1032,7 @@
           <a:p>
             <a:fld id="{0F651350-1A97-42BE-B68B-7AD85E4EDCBF}" type="datetime1">
               <a:rPr lang="en-US" smtClean="0"/>
-              <a:t>2/26/2026</a:t>
+              <a:t>3/18/2026</a:t>
             </a:fld>
             <a:endParaRPr lang="en-US"/>
           </a:p>
@@ -1202,7 +1203,7 @@
           <a:p>
             <a:fld id="{CE41F65B-C187-4F2E-97E4-866F44D3FEC5}" type="datetime1">
               <a:rPr lang="en-US" smtClean="0"/>
-              <a:t>2/26/2026</a:t>
+              <a:t>3/18/2026</a:t>
             </a:fld>
             <a:endParaRPr lang="en-US"/>
           </a:p>
@@ -1450,7 +1451,7 @@
           <a:p>
             <a:fld id="{5B30CE8C-B3D2-4FED-8171-A22B1E84AA49}" type="datetime1">
               <a:rPr lang="en-US" smtClean="0"/>
-              <a:t>2/26/2026</a:t>
+              <a:t>3/18/2026</a:t>
             </a:fld>
             <a:endParaRPr lang="en-US"/>
           </a:p>
@@ -1738,7 +1739,7 @@
           <a:p>
             <a:fld id="{18787D79-C197-49E5-840E-62EF773E40EB}" type="datetime1">
               <a:rPr lang="en-US" smtClean="0"/>
-              <a:t>2/26/2026</a:t>
+              <a:t>3/18/2026</a:t>
             </a:fld>
             <a:endParaRPr lang="en-US"/>
           </a:p>
@@ -2160,7 +2161,7 @@
           <a:p>
             <a:fld id="{6AB4C717-ACD6-42B4-B4D2-A00897526083}" type="datetime1">
               <a:rPr lang="en-US" smtClean="0"/>
-              <a:t>2/26/2026</a:t>
+              <a:t>3/18/2026</a:t>
             </a:fld>
             <a:endParaRPr lang="en-US"/>
           </a:p>
@@ -2280,7 +2281,7 @@
           <a:p>
             <a:fld id="{35F0F010-C38E-44B3-A11D-B9CE0300A741}" type="datetime1">
               <a:rPr lang="en-US" smtClean="0"/>
-              <a:t>2/26/2026</a:t>
+              <a:t>3/18/2026</a:t>
             </a:fld>
             <a:endParaRPr lang="en-US"/>
           </a:p>
@@ -2378,7 +2379,7 @@
           <a:p>
             <a:fld id="{0E2442EE-45D9-4220-A88F-EE689B9875C3}" type="datetime1">
               <a:rPr lang="en-US" smtClean="0"/>
-              <a:t>2/26/2026</a:t>
+              <a:t>3/18/2026</a:t>
             </a:fld>
             <a:endParaRPr lang="en-US"/>
           </a:p>
@@ -2656,7 +2657,7 @@
           <a:p>
             <a:fld id="{D5FA1C2B-1683-45DB-88D6-369C6CB6AB24}" type="datetime1">
               <a:rPr lang="en-US" smtClean="0"/>
-              <a:t>2/26/2026</a:t>
+              <a:t>3/18/2026</a:t>
             </a:fld>
             <a:endParaRPr lang="en-US"/>
           </a:p>
@@ -2911,7 +2912,7 @@
           <a:p>
             <a:fld id="{DFFB611B-DC9D-42DB-B865-14DB93E316AF}" type="datetime1">
               <a:rPr lang="en-US" smtClean="0"/>
-              <a:t>2/26/2026</a:t>
+              <a:t>3/18/2026</a:t>
             </a:fld>
             <a:endParaRPr lang="en-US"/>
           </a:p>
@@ -3125,7 +3126,7 @@
           <a:p>
             <a:fld id="{A3B8D4B9-4EE2-4C3D-B367-BE7622E78789}" type="datetime1">
               <a:rPr lang="en-US" smtClean="0"/>
-              <a:t>2/26/2026</a:t>
+              <a:t>3/18/2026</a:t>
             </a:fld>
             <a:endParaRPr lang="en-US"/>
           </a:p>
@@ -8505,8 +8506,8 @@
           <a:chExt cx="0" cy="0"/>
         </a:xfrm>
       </p:grpSpPr>
-      <mc:AlternateContent xmlns:mc="http://schemas.openxmlformats.org/markup-compatibility/2006" xmlns:a14="http://schemas.microsoft.com/office/drawing/2010/main">
-        <mc:Choice Requires="a14">
+      <mc:AlternateContent xmlns:mc="http://schemas.openxmlformats.org/markup-compatibility/2006">
+        <mc:Choice xmlns:a14="http://schemas.microsoft.com/office/drawing/2010/main" Requires="a14">
           <p:sp>
             <p:nvSpPr>
               <p:cNvPr id="3" name="Content Placeholder 2">
@@ -8531,7 +8532,7 @@
             </p:spPr>
             <p:txBody>
               <a:bodyPr>
-                <a:normAutofit/>
+                <a:normAutofit lnSpcReduction="10000"/>
               </a:bodyPr>
               <a:lstStyle/>
               <a:p>
@@ -8596,7 +8597,7 @@
                       <m:func>
                         <m:funcPr>
                           <m:ctrlPr>
-                            <a:rPr lang="en-US" altLang="zh-TW" sz="2000" i="1">
+                            <a:rPr lang="en-US" altLang="zh-TW" sz="2400" i="1">
                               <a:latin typeface="Cambria Math" panose="02040503050406030204" pitchFamily="18" charset="0"/>
                             </a:rPr>
                           </m:ctrlPr>
@@ -8605,7 +8606,7 @@
                           <m:limLow>
                             <m:limLowPr>
                               <m:ctrlPr>
-                                <a:rPr lang="en-US" altLang="zh-TW" sz="2000" i="1">
+                                <a:rPr lang="en-US" altLang="zh-TW" sz="2400" i="1">
                                   <a:latin typeface="Cambria Math" panose="02040503050406030204" pitchFamily="18" charset="0"/>
                                 </a:rPr>
                               </m:ctrlPr>
@@ -8615,7 +8616,7 @@
                                 <m:rPr>
                                   <m:sty m:val="p"/>
                                 </m:rPr>
-                                <a:rPr lang="en-US" altLang="zh-TW" sz="2000">
+                                <a:rPr lang="en-US" altLang="zh-TW" sz="2400">
                                   <a:latin typeface="Cambria Math" panose="02040503050406030204" pitchFamily="18" charset="0"/>
                                 </a:rPr>
                                 <m:t>min</m:t>
@@ -8625,14 +8626,14 @@
                               <m:sSub>
                                 <m:sSubPr>
                                   <m:ctrlPr>
-                                    <a:rPr lang="en-US" altLang="zh-TW" sz="2000" i="1">
+                                    <a:rPr lang="en-US" altLang="zh-TW" sz="2400" i="1">
                                       <a:latin typeface="Cambria Math" panose="02040503050406030204" pitchFamily="18" charset="0"/>
                                     </a:rPr>
                                   </m:ctrlPr>
                                 </m:sSubPr>
                                 <m:e>
                                   <m:r>
-                                    <a:rPr lang="en-US" altLang="zh-TW" sz="2000" i="1">
+                                    <a:rPr lang="en-US" altLang="zh-TW" sz="2400" i="1">
                                       <a:latin typeface="Cambria Math" panose="02040503050406030204" pitchFamily="18" charset="0"/>
                                     </a:rPr>
                                     <m:t>𝑥</m:t>
@@ -8640,7 +8641,7 @@
                                 </m:e>
                                 <m:sub>
                                   <m:r>
-                                    <a:rPr lang="en-US" altLang="zh-TW" sz="2000" i="1">
+                                    <a:rPr lang="en-US" altLang="zh-TW" sz="2400" i="1">
                                       <a:latin typeface="Cambria Math" panose="02040503050406030204" pitchFamily="18" charset="0"/>
                                     </a:rPr>
                                     <m:t>1</m:t>
@@ -8648,7 +8649,7 @@
                                 </m:sub>
                               </m:sSub>
                               <m:r>
-                                <a:rPr lang="en-US" altLang="zh-TW" sz="2000" i="1">
+                                <a:rPr lang="en-US" altLang="zh-TW" sz="2400" i="1">
                                   <a:latin typeface="Cambria Math" panose="02040503050406030204" pitchFamily="18" charset="0"/>
                                 </a:rPr>
                                 <m:t>,</m:t>
@@ -8656,14 +8657,14 @@
                               <m:sSub>
                                 <m:sSubPr>
                                   <m:ctrlPr>
-                                    <a:rPr lang="en-US" altLang="zh-TW" sz="2000" i="1">
+                                    <a:rPr lang="en-US" altLang="zh-TW" sz="2400" i="1">
                                       <a:latin typeface="Cambria Math" panose="02040503050406030204" pitchFamily="18" charset="0"/>
                                     </a:rPr>
                                   </m:ctrlPr>
                                 </m:sSubPr>
                                 <m:e>
                                   <m:r>
-                                    <a:rPr lang="en-US" altLang="zh-TW" sz="2000" i="1">
+                                    <a:rPr lang="en-US" altLang="zh-TW" sz="2400" i="1">
                                       <a:latin typeface="Cambria Math" panose="02040503050406030204" pitchFamily="18" charset="0"/>
                                     </a:rPr>
                                     <m:t>𝑥</m:t>
@@ -8671,7 +8672,7 @@
                                 </m:e>
                                 <m:sub>
                                   <m:r>
-                                    <a:rPr lang="en-US" altLang="zh-TW" sz="2000" i="1">
+                                    <a:rPr lang="en-US" altLang="zh-TW" sz="2400" i="1">
                                       <a:latin typeface="Cambria Math" panose="02040503050406030204" pitchFamily="18" charset="0"/>
                                     </a:rPr>
                                     <m:t>2</m:t>
@@ -8685,20 +8686,20 @@
                           <m:sSub>
                             <m:sSubPr>
                               <m:ctrlPr>
-                                <a:rPr lang="en-US" altLang="zh-TW" sz="2000" i="1">
+                                <a:rPr lang="en-US" altLang="zh-TW" sz="2400" i="1">
                                   <a:latin typeface="Cambria Math" panose="02040503050406030204" pitchFamily="18" charset="0"/>
                                 </a:rPr>
                               </m:ctrlPr>
                             </m:sSubPr>
                             <m:e>
                               <m:r>
-                                <a:rPr lang="en-US" altLang="zh-TW" sz="2000" i="1">
+                                <a:rPr lang="en-US" altLang="zh-TW" sz="2400" i="1">
                                   <a:latin typeface="Cambria Math" panose="02040503050406030204" pitchFamily="18" charset="0"/>
                                 </a:rPr>
                                 <m:t> </m:t>
                               </m:r>
                               <m:r>
-                                <a:rPr lang="en-US" altLang="zh-TW" sz="2000" i="1">
+                                <a:rPr lang="en-US" altLang="zh-TW" sz="2400" i="1">
                                   <a:latin typeface="Cambria Math" panose="02040503050406030204" pitchFamily="18" charset="0"/>
                                 </a:rPr>
                                 <m:t>𝜔</m:t>
@@ -8706,7 +8707,7 @@
                             </m:e>
                             <m:sub>
                               <m:r>
-                                <a:rPr lang="en-US" altLang="zh-TW" sz="2000" i="1">
+                                <a:rPr lang="en-US" altLang="zh-TW" sz="2400" i="1">
                                   <a:latin typeface="Cambria Math" panose="02040503050406030204" pitchFamily="18" charset="0"/>
                                 </a:rPr>
                                 <m:t>1</m:t>
@@ -8716,14 +8717,14 @@
                           <m:sSub>
                             <m:sSubPr>
                               <m:ctrlPr>
-                                <a:rPr lang="en-US" altLang="zh-TW" sz="2000" i="1">
+                                <a:rPr lang="en-US" altLang="zh-TW" sz="2400" i="1">
                                   <a:latin typeface="Cambria Math" panose="02040503050406030204" pitchFamily="18" charset="0"/>
                                 </a:rPr>
                               </m:ctrlPr>
                             </m:sSubPr>
                             <m:e>
                               <m:r>
-                                <a:rPr lang="en-US" altLang="zh-TW" sz="2000" i="1">
+                                <a:rPr lang="en-US" altLang="zh-TW" sz="2400" i="1">
                                   <a:latin typeface="Cambria Math" panose="02040503050406030204" pitchFamily="18" charset="0"/>
                                 </a:rPr>
                                 <m:t>𝑥</m:t>
@@ -8731,7 +8732,7 @@
                             </m:e>
                             <m:sub>
                               <m:r>
-                                <a:rPr lang="en-US" altLang="zh-TW" sz="2000" i="1">
+                                <a:rPr lang="en-US" altLang="zh-TW" sz="2400" i="1">
                                   <a:latin typeface="Cambria Math" panose="02040503050406030204" pitchFamily="18" charset="0"/>
                                 </a:rPr>
                                 <m:t>1</m:t>
@@ -8739,7 +8740,7 @@
                             </m:sub>
                           </m:sSub>
                           <m:r>
-                            <a:rPr lang="en-US" altLang="zh-TW" sz="2000" i="1">
+                            <a:rPr lang="en-US" altLang="zh-TW" sz="2400" i="1">
                               <a:latin typeface="Cambria Math" panose="02040503050406030204" pitchFamily="18" charset="0"/>
                             </a:rPr>
                             <m:t>+</m:t>
@@ -8747,14 +8748,14 @@
                           <m:sSub>
                             <m:sSubPr>
                               <m:ctrlPr>
-                                <a:rPr lang="en-US" altLang="zh-TW" sz="2000" i="1">
+                                <a:rPr lang="en-US" altLang="zh-TW" sz="2400" i="1">
                                   <a:latin typeface="Cambria Math" panose="02040503050406030204" pitchFamily="18" charset="0"/>
                                 </a:rPr>
                               </m:ctrlPr>
                             </m:sSubPr>
                             <m:e>
                               <m:r>
-                                <a:rPr lang="en-US" altLang="zh-TW" sz="2000" i="1">
+                                <a:rPr lang="en-US" altLang="zh-TW" sz="2400" i="1">
                                   <a:latin typeface="Cambria Math" panose="02040503050406030204" pitchFamily="18" charset="0"/>
                                 </a:rPr>
                                 <m:t>𝜔</m:t>
@@ -8762,7 +8763,7 @@
                             </m:e>
                             <m:sub>
                               <m:r>
-                                <a:rPr lang="en-US" altLang="zh-TW" sz="2000" i="1">
+                                <a:rPr lang="en-US" altLang="zh-TW" sz="2400" i="1">
                                   <a:latin typeface="Cambria Math" panose="02040503050406030204" pitchFamily="18" charset="0"/>
                                 </a:rPr>
                                 <m:t>2</m:t>
@@ -8772,14 +8773,14 @@
                           <m:sSub>
                             <m:sSubPr>
                               <m:ctrlPr>
-                                <a:rPr lang="en-US" altLang="zh-TW" sz="2000" i="1">
+                                <a:rPr lang="en-US" altLang="zh-TW" sz="2400" i="1">
                                   <a:latin typeface="Cambria Math" panose="02040503050406030204" pitchFamily="18" charset="0"/>
                                 </a:rPr>
                               </m:ctrlPr>
                             </m:sSubPr>
                             <m:e>
                               <m:r>
-                                <a:rPr lang="en-US" altLang="zh-TW" sz="2000" i="1">
+                                <a:rPr lang="en-US" altLang="zh-TW" sz="2400" i="1">
                                   <a:latin typeface="Cambria Math" panose="02040503050406030204" pitchFamily="18" charset="0"/>
                                 </a:rPr>
                                 <m:t>𝑥</m:t>
@@ -8787,7 +8788,7 @@
                             </m:e>
                             <m:sub>
                               <m:r>
-                                <a:rPr lang="en-US" altLang="zh-TW" sz="2000" i="1">
+                                <a:rPr lang="en-US" altLang="zh-TW" sz="2400" i="1">
                                   <a:latin typeface="Cambria Math" panose="02040503050406030204" pitchFamily="18" charset="0"/>
                                 </a:rPr>
                                 <m:t>2</m:t>
@@ -8797,37 +8798,37 @@
                         </m:e>
                       </m:func>
                       <m:r>
-                        <a:rPr lang="en-US" altLang="zh-TW" sz="2000" i="1">
+                        <a:rPr lang="en-US" altLang="zh-TW" sz="2400" i="1">
                           <a:latin typeface="Cambria Math" panose="02040503050406030204" pitchFamily="18" charset="0"/>
                         </a:rPr>
                         <m:t>,   </m:t>
                       </m:r>
                       <m:r>
-                        <a:rPr lang="en-US" altLang="zh-TW" sz="2000" i="1">
+                        <a:rPr lang="en-US" altLang="zh-TW" sz="2400" i="1">
                           <a:latin typeface="Cambria Math" panose="02040503050406030204" pitchFamily="18" charset="0"/>
                         </a:rPr>
                         <m:t>𝑠</m:t>
                       </m:r>
                       <m:r>
-                        <a:rPr lang="en-US" altLang="zh-TW" sz="2000" i="1">
+                        <a:rPr lang="en-US" altLang="zh-TW" sz="2400" i="1">
                           <a:latin typeface="Cambria Math" panose="02040503050406030204" pitchFamily="18" charset="0"/>
                         </a:rPr>
                         <m:t>.</m:t>
                       </m:r>
                       <m:r>
-                        <a:rPr lang="en-US" altLang="zh-TW" sz="2000" i="1">
+                        <a:rPr lang="en-US" altLang="zh-TW" sz="2400" i="1">
                           <a:latin typeface="Cambria Math" panose="02040503050406030204" pitchFamily="18" charset="0"/>
                         </a:rPr>
                         <m:t>𝑡</m:t>
                       </m:r>
                       <m:r>
-                        <a:rPr lang="en-US" altLang="zh-TW" sz="2000" i="1">
+                        <a:rPr lang="en-US" altLang="zh-TW" sz="2400" i="1">
                           <a:latin typeface="Cambria Math" panose="02040503050406030204" pitchFamily="18" charset="0"/>
                         </a:rPr>
                         <m:t>.     </m:t>
                       </m:r>
                       <m:r>
-                        <a:rPr lang="en-US" altLang="zh-TW" sz="2000" i="1">
+                        <a:rPr lang="en-US" altLang="zh-TW" sz="2400" i="1">
                           <a:latin typeface="Cambria Math" panose="02040503050406030204" pitchFamily="18" charset="0"/>
                         </a:rPr>
                         <m:t>𝑓</m:t>
@@ -8835,7 +8836,7 @@
                       <m:d>
                         <m:dPr>
                           <m:ctrlPr>
-                            <a:rPr lang="en-US" altLang="zh-TW" sz="2000" i="1">
+                            <a:rPr lang="en-US" altLang="zh-TW" sz="2400" i="1">
                               <a:latin typeface="Cambria Math" panose="02040503050406030204" pitchFamily="18" charset="0"/>
                             </a:rPr>
                           </m:ctrlPr>
@@ -8844,14 +8845,14 @@
                           <m:sSub>
                             <m:sSubPr>
                               <m:ctrlPr>
-                                <a:rPr lang="en-US" altLang="zh-TW" sz="2000" i="1">
+                                <a:rPr lang="en-US" altLang="zh-TW" sz="2400" i="1">
                                   <a:latin typeface="Cambria Math" panose="02040503050406030204" pitchFamily="18" charset="0"/>
                                 </a:rPr>
                               </m:ctrlPr>
                             </m:sSubPr>
                             <m:e>
                               <m:r>
-                                <a:rPr lang="en-US" altLang="zh-TW" sz="2000" i="1">
+                                <a:rPr lang="en-US" altLang="zh-TW" sz="2400" i="1">
                                   <a:latin typeface="Cambria Math" panose="02040503050406030204" pitchFamily="18" charset="0"/>
                                 </a:rPr>
                                 <m:t>𝑥</m:t>
@@ -8859,7 +8860,7 @@
                             </m:e>
                             <m:sub>
                               <m:r>
-                                <a:rPr lang="en-US" altLang="zh-TW" sz="2000" i="1">
+                                <a:rPr lang="en-US" altLang="zh-TW" sz="2400" i="1">
                                   <a:latin typeface="Cambria Math" panose="02040503050406030204" pitchFamily="18" charset="0"/>
                                 </a:rPr>
                                 <m:t>1</m:t>
@@ -8867,7 +8868,7 @@
                             </m:sub>
                           </m:sSub>
                           <m:r>
-                            <a:rPr lang="en-US" altLang="zh-TW" sz="2000" i="1">
+                            <a:rPr lang="en-US" altLang="zh-TW" sz="2400" i="1">
                               <a:latin typeface="Cambria Math" panose="02040503050406030204" pitchFamily="18" charset="0"/>
                             </a:rPr>
                             <m:t>,</m:t>
@@ -8875,14 +8876,14 @@
                           <m:sSub>
                             <m:sSubPr>
                               <m:ctrlPr>
-                                <a:rPr lang="en-US" altLang="zh-TW" sz="2000" i="1">
+                                <a:rPr lang="en-US" altLang="zh-TW" sz="2400" i="1">
                                   <a:latin typeface="Cambria Math" panose="02040503050406030204" pitchFamily="18" charset="0"/>
                                 </a:rPr>
                               </m:ctrlPr>
                             </m:sSubPr>
                             <m:e>
                               <m:r>
-                                <a:rPr lang="en-US" altLang="zh-TW" sz="2000" i="1">
+                                <a:rPr lang="en-US" altLang="zh-TW" sz="2400" i="1">
                                   <a:latin typeface="Cambria Math" panose="02040503050406030204" pitchFamily="18" charset="0"/>
                                 </a:rPr>
                                 <m:t>𝑥</m:t>
@@ -8890,7 +8891,7 @@
                             </m:e>
                             <m:sub>
                               <m:r>
-                                <a:rPr lang="en-US" altLang="zh-TW" sz="2000" i="1">
+                                <a:rPr lang="en-US" altLang="zh-TW" sz="2400" i="1">
                                   <a:latin typeface="Cambria Math" panose="02040503050406030204" pitchFamily="18" charset="0"/>
                                 </a:rPr>
                                 <m:t>2</m:t>
@@ -8900,7 +8901,7 @@
                         </m:e>
                       </m:d>
                       <m:r>
-                        <a:rPr lang="en-US" altLang="zh-TW" sz="2000" i="1">
+                        <a:rPr lang="en-US" altLang="zh-TW" sz="2400" i="1">
                           <a:latin typeface="Cambria Math" panose="02040503050406030204" pitchFamily="18" charset="0"/>
                         </a:rPr>
                         <m:t>=</m:t>
@@ -8909,14 +8910,14 @@
                         <m:accPr>
                           <m:chr m:val="̅"/>
                           <m:ctrlPr>
-                            <a:rPr lang="en-US" altLang="zh-TW" sz="2000" i="1">
+                            <a:rPr lang="en-US" altLang="zh-TW" sz="2400" i="1">
                               <a:latin typeface="Cambria Math" panose="02040503050406030204" pitchFamily="18" charset="0"/>
                             </a:rPr>
                           </m:ctrlPr>
                         </m:accPr>
                         <m:e>
                           <m:r>
-                            <a:rPr lang="en-US" altLang="zh-TW" sz="2000" i="1">
+                            <a:rPr lang="en-US" altLang="zh-TW" sz="2400" i="1">
                               <a:latin typeface="Cambria Math" panose="02040503050406030204" pitchFamily="18" charset="0"/>
                             </a:rPr>
                             <m:t>𝑦</m:t>
@@ -8926,7 +8927,7 @@
                     </m:oMath>
                   </m:oMathPara>
                 </a14:m>
-                <a:endParaRPr lang="en-US" altLang="zh-TW" sz="1100" dirty="0"/>
+                <a:endParaRPr lang="en-US" altLang="zh-TW" sz="1200" dirty="0"/>
               </a:p>
               <a:p>
                 <a:pPr>
@@ -9013,7 +9014,7 @@
                     </m:oMathParaPr>
                     <m:oMath xmlns:m="http://schemas.openxmlformats.org/officeDocument/2006/math">
                       <m:r>
-                        <a:rPr lang="en-US" altLang="zh-TW" sz="2000" i="1" smtClean="0">
+                        <a:rPr lang="en-US" altLang="zh-TW" sz="2400" i="1" smtClean="0">
                           <a:latin typeface="Cambria Math" panose="02040503050406030204" pitchFamily="18" charset="0"/>
                           <a:ea typeface="Cambria Math" panose="02040503050406030204" pitchFamily="18" charset="0"/>
                         </a:rPr>
@@ -9022,7 +9023,7 @@
                       <m:d>
                         <m:dPr>
                           <m:ctrlPr>
-                            <a:rPr lang="en-US" altLang="zh-TW" sz="2000" b="0" i="1" smtClean="0">
+                            <a:rPr lang="en-US" altLang="zh-TW" sz="2400" b="0" i="1" smtClean="0">
                               <a:latin typeface="Cambria Math" panose="02040503050406030204" pitchFamily="18" charset="0"/>
                               <a:ea typeface="Cambria Math" panose="02040503050406030204" pitchFamily="18" charset="0"/>
                             </a:rPr>
@@ -9032,7 +9033,7 @@
                           <m:sSub>
                             <m:sSubPr>
                               <m:ctrlPr>
-                                <a:rPr lang="en-US" altLang="zh-TW" sz="2000" b="0" i="1" smtClean="0">
+                                <a:rPr lang="en-US" altLang="zh-TW" sz="2400" b="0" i="1" smtClean="0">
                                   <a:latin typeface="Cambria Math" panose="02040503050406030204" pitchFamily="18" charset="0"/>
                                   <a:ea typeface="Cambria Math" panose="02040503050406030204" pitchFamily="18" charset="0"/>
                                 </a:rPr>
@@ -9040,7 +9041,7 @@
                             </m:sSubPr>
                             <m:e>
                               <m:r>
-                                <a:rPr lang="en-US" altLang="zh-TW" sz="2000" b="0" i="1" smtClean="0">
+                                <a:rPr lang="en-US" altLang="zh-TW" sz="2400" b="0" i="1" smtClean="0">
                                   <a:latin typeface="Cambria Math" panose="02040503050406030204" pitchFamily="18" charset="0"/>
                                   <a:ea typeface="Cambria Math" panose="02040503050406030204" pitchFamily="18" charset="0"/>
                                 </a:rPr>
@@ -9049,7 +9050,7 @@
                             </m:e>
                             <m:sub>
                               <m:r>
-                                <a:rPr lang="en-US" altLang="zh-TW" sz="2000" b="0" i="1" smtClean="0">
+                                <a:rPr lang="en-US" altLang="zh-TW" sz="2400" b="0" i="1" smtClean="0">
                                   <a:latin typeface="Cambria Math" panose="02040503050406030204" pitchFamily="18" charset="0"/>
                                   <a:ea typeface="Cambria Math" panose="02040503050406030204" pitchFamily="18" charset="0"/>
                                 </a:rPr>
@@ -9058,7 +9059,7 @@
                             </m:sub>
                           </m:sSub>
                           <m:r>
-                            <a:rPr lang="en-US" altLang="zh-TW" sz="2000" b="0" i="1" smtClean="0">
+                            <a:rPr lang="en-US" altLang="zh-TW" sz="2400" b="0" i="1" smtClean="0">
                               <a:latin typeface="Cambria Math" panose="02040503050406030204" pitchFamily="18" charset="0"/>
                               <a:ea typeface="Cambria Math" panose="02040503050406030204" pitchFamily="18" charset="0"/>
                             </a:rPr>
@@ -9067,7 +9068,7 @@
                           <m:sSub>
                             <m:sSubPr>
                               <m:ctrlPr>
-                                <a:rPr lang="en-US" altLang="zh-TW" sz="2000" b="0" i="1" smtClean="0">
+                                <a:rPr lang="en-US" altLang="zh-TW" sz="2400" b="0" i="1" smtClean="0">
                                   <a:latin typeface="Cambria Math" panose="02040503050406030204" pitchFamily="18" charset="0"/>
                                   <a:ea typeface="Cambria Math" panose="02040503050406030204" pitchFamily="18" charset="0"/>
                                 </a:rPr>
@@ -9075,7 +9076,7 @@
                             </m:sSubPr>
                             <m:e>
                               <m:r>
-                                <a:rPr lang="en-US" altLang="zh-TW" sz="2000" b="0" i="1" smtClean="0">
+                                <a:rPr lang="en-US" altLang="zh-TW" sz="2400" b="0" i="1" smtClean="0">
                                   <a:latin typeface="Cambria Math" panose="02040503050406030204" pitchFamily="18" charset="0"/>
                                   <a:ea typeface="Cambria Math" panose="02040503050406030204" pitchFamily="18" charset="0"/>
                                 </a:rPr>
@@ -9084,7 +9085,7 @@
                             </m:e>
                             <m:sub>
                               <m:r>
-                                <a:rPr lang="en-US" altLang="zh-TW" sz="2000" b="0" i="1" smtClean="0">
+                                <a:rPr lang="en-US" altLang="zh-TW" sz="2400" b="0" i="1" smtClean="0">
                                   <a:latin typeface="Cambria Math" panose="02040503050406030204" pitchFamily="18" charset="0"/>
                                   <a:ea typeface="Cambria Math" panose="02040503050406030204" pitchFamily="18" charset="0"/>
                                 </a:rPr>
@@ -9093,14 +9094,14 @@
                             </m:sub>
                           </m:sSub>
                           <m:r>
-                            <a:rPr lang="en-US" altLang="zh-TW" sz="2000" b="0" i="1" smtClean="0">
+                            <a:rPr lang="en-US" altLang="zh-TW" sz="2400" b="0" i="1" smtClean="0">
                               <a:latin typeface="Cambria Math" panose="02040503050406030204" pitchFamily="18" charset="0"/>
                               <a:ea typeface="Cambria Math" panose="02040503050406030204" pitchFamily="18" charset="0"/>
                             </a:rPr>
                             <m:t>,</m:t>
                           </m:r>
                           <m:r>
-                            <a:rPr lang="en-US" altLang="zh-TW" sz="2000" b="0" i="1" smtClean="0">
+                            <a:rPr lang="en-US" altLang="zh-TW" sz="2400" b="0" i="1" smtClean="0">
                               <a:latin typeface="Cambria Math" panose="02040503050406030204" pitchFamily="18" charset="0"/>
                               <a:ea typeface="Cambria Math" panose="02040503050406030204" pitchFamily="18" charset="0"/>
                             </a:rPr>
@@ -9109,7 +9110,7 @@
                         </m:e>
                       </m:d>
                       <m:r>
-                        <a:rPr lang="en-US" altLang="zh-TW" sz="2000" b="0" i="1" smtClean="0">
+                        <a:rPr lang="en-US" altLang="zh-TW" sz="2400" b="0" i="1" smtClean="0">
                           <a:latin typeface="Cambria Math" panose="02040503050406030204" pitchFamily="18" charset="0"/>
                           <a:ea typeface="Cambria Math" panose="02040503050406030204" pitchFamily="18" charset="0"/>
                         </a:rPr>
@@ -9118,14 +9119,14 @@
                       <m:sSub>
                         <m:sSubPr>
                           <m:ctrlPr>
-                            <a:rPr lang="en-US" altLang="zh-TW" sz="2000" i="1">
+                            <a:rPr lang="en-US" altLang="zh-TW" sz="2400" i="1">
                               <a:latin typeface="Cambria Math" panose="02040503050406030204" pitchFamily="18" charset="0"/>
                             </a:rPr>
                           </m:ctrlPr>
                         </m:sSubPr>
                         <m:e>
                           <m:r>
-                            <a:rPr lang="en-US" altLang="zh-TW" sz="2000" i="1">
+                            <a:rPr lang="en-US" altLang="zh-TW" sz="2400" i="1">
                               <a:latin typeface="Cambria Math" panose="02040503050406030204" pitchFamily="18" charset="0"/>
                             </a:rPr>
                             <m:t>𝜔</m:t>
@@ -9133,7 +9134,7 @@
                         </m:e>
                         <m:sub>
                           <m:r>
-                            <a:rPr lang="en-US" altLang="zh-TW" sz="2000" i="1">
+                            <a:rPr lang="en-US" altLang="zh-TW" sz="2400" i="1">
                               <a:latin typeface="Cambria Math" panose="02040503050406030204" pitchFamily="18" charset="0"/>
                             </a:rPr>
                             <m:t>1</m:t>
@@ -9143,14 +9144,14 @@
                       <m:sSub>
                         <m:sSubPr>
                           <m:ctrlPr>
-                            <a:rPr lang="en-US" altLang="zh-TW" sz="2000" i="1">
+                            <a:rPr lang="en-US" altLang="zh-TW" sz="2400" i="1">
                               <a:latin typeface="Cambria Math" panose="02040503050406030204" pitchFamily="18" charset="0"/>
                             </a:rPr>
                           </m:ctrlPr>
                         </m:sSubPr>
                         <m:e>
                           <m:r>
-                            <a:rPr lang="en-US" altLang="zh-TW" sz="2000" i="1">
+                            <a:rPr lang="en-US" altLang="zh-TW" sz="2400" i="1">
                               <a:latin typeface="Cambria Math" panose="02040503050406030204" pitchFamily="18" charset="0"/>
                             </a:rPr>
                             <m:t>𝑥</m:t>
@@ -9158,7 +9159,7 @@
                         </m:e>
                         <m:sub>
                           <m:r>
-                            <a:rPr lang="en-US" altLang="zh-TW" sz="2000" i="1">
+                            <a:rPr lang="en-US" altLang="zh-TW" sz="2400" i="1">
                               <a:latin typeface="Cambria Math" panose="02040503050406030204" pitchFamily="18" charset="0"/>
                             </a:rPr>
                             <m:t>1</m:t>
@@ -9166,7 +9167,7 @@
                         </m:sub>
                       </m:sSub>
                       <m:r>
-                        <a:rPr lang="en-US" altLang="zh-TW" sz="2000" i="1">
+                        <a:rPr lang="en-US" altLang="zh-TW" sz="2400" i="1">
                           <a:latin typeface="Cambria Math" panose="02040503050406030204" pitchFamily="18" charset="0"/>
                         </a:rPr>
                         <m:t>+</m:t>
@@ -9174,14 +9175,14 @@
                       <m:sSub>
                         <m:sSubPr>
                           <m:ctrlPr>
-                            <a:rPr lang="en-US" altLang="zh-TW" sz="2000" i="1">
+                            <a:rPr lang="en-US" altLang="zh-TW" sz="2400" i="1">
                               <a:latin typeface="Cambria Math" panose="02040503050406030204" pitchFamily="18" charset="0"/>
                             </a:rPr>
                           </m:ctrlPr>
                         </m:sSubPr>
                         <m:e>
                           <m:r>
-                            <a:rPr lang="en-US" altLang="zh-TW" sz="2000" i="1">
+                            <a:rPr lang="en-US" altLang="zh-TW" sz="2400" i="1">
                               <a:latin typeface="Cambria Math" panose="02040503050406030204" pitchFamily="18" charset="0"/>
                             </a:rPr>
                             <m:t>𝜔</m:t>
@@ -9189,7 +9190,7 @@
                         </m:e>
                         <m:sub>
                           <m:r>
-                            <a:rPr lang="en-US" altLang="zh-TW" sz="2000" i="1">
+                            <a:rPr lang="en-US" altLang="zh-TW" sz="2400" i="1">
                               <a:latin typeface="Cambria Math" panose="02040503050406030204" pitchFamily="18" charset="0"/>
                             </a:rPr>
                             <m:t>2</m:t>
@@ -9199,14 +9200,14 @@
                       <m:sSub>
                         <m:sSubPr>
                           <m:ctrlPr>
-                            <a:rPr lang="en-US" altLang="zh-TW" sz="2000" i="1">
+                            <a:rPr lang="en-US" altLang="zh-TW" sz="2400" i="1">
                               <a:latin typeface="Cambria Math" panose="02040503050406030204" pitchFamily="18" charset="0"/>
                             </a:rPr>
                           </m:ctrlPr>
                         </m:sSubPr>
                         <m:e>
                           <m:r>
-                            <a:rPr lang="en-US" altLang="zh-TW" sz="2000" i="1">
+                            <a:rPr lang="en-US" altLang="zh-TW" sz="2400" i="1">
                               <a:latin typeface="Cambria Math" panose="02040503050406030204" pitchFamily="18" charset="0"/>
                             </a:rPr>
                             <m:t>𝑥</m:t>
@@ -9214,7 +9215,7 @@
                         </m:e>
                         <m:sub>
                           <m:r>
-                            <a:rPr lang="en-US" altLang="zh-TW" sz="2000" i="1">
+                            <a:rPr lang="en-US" altLang="zh-TW" sz="2400" i="1">
                               <a:latin typeface="Cambria Math" panose="02040503050406030204" pitchFamily="18" charset="0"/>
                             </a:rPr>
                             <m:t>2</m:t>
@@ -9222,13 +9223,13 @@
                         </m:sub>
                       </m:sSub>
                       <m:r>
-                        <a:rPr lang="en-US" altLang="zh-TW" sz="2000" b="0" i="1" smtClean="0">
+                        <a:rPr lang="en-US" altLang="zh-TW" sz="2400" b="0" i="1" smtClean="0">
                           <a:latin typeface="Cambria Math" panose="02040503050406030204" pitchFamily="18" charset="0"/>
                         </a:rPr>
                         <m:t>+</m:t>
                       </m:r>
                       <m:r>
-                        <a:rPr lang="en-US" altLang="zh-TW" sz="2000" b="0" i="1" smtClean="0">
+                        <a:rPr lang="en-US" altLang="zh-TW" sz="2400" b="0" i="1" smtClean="0">
                           <a:latin typeface="Cambria Math" panose="02040503050406030204" pitchFamily="18" charset="0"/>
                         </a:rPr>
                         <m:t>𝜆</m:t>
@@ -9236,7 +9237,7 @@
                       <m:d>
                         <m:dPr>
                           <m:ctrlPr>
-                            <a:rPr lang="en-US" altLang="zh-TW" sz="2000" b="0" i="1" smtClean="0">
+                            <a:rPr lang="en-US" altLang="zh-TW" sz="2400" b="0" i="1" smtClean="0">
                               <a:latin typeface="Cambria Math" panose="02040503050406030204" pitchFamily="18" charset="0"/>
                             </a:rPr>
                           </m:ctrlPr>
@@ -9246,14 +9247,14 @@
                             <m:accPr>
                               <m:chr m:val="̅"/>
                               <m:ctrlPr>
-                                <a:rPr lang="en-US" altLang="zh-TW" sz="2000" i="1">
+                                <a:rPr lang="en-US" altLang="zh-TW" sz="2400" i="1">
                                   <a:latin typeface="Cambria Math" panose="02040503050406030204" pitchFamily="18" charset="0"/>
                                 </a:rPr>
                               </m:ctrlPr>
                             </m:accPr>
                             <m:e>
                               <m:r>
-                                <a:rPr lang="en-US" altLang="zh-TW" sz="2000" i="1">
+                                <a:rPr lang="en-US" altLang="zh-TW" sz="2400" i="1">
                                   <a:latin typeface="Cambria Math" panose="02040503050406030204" pitchFamily="18" charset="0"/>
                                 </a:rPr>
                                 <m:t>𝑦</m:t>
@@ -9261,13 +9262,13 @@
                             </m:e>
                           </m:acc>
                           <m:r>
-                            <a:rPr lang="en-US" altLang="zh-TW" sz="2000" b="0" i="1" smtClean="0">
+                            <a:rPr lang="en-US" altLang="zh-TW" sz="2400" b="0" i="1" smtClean="0">
                               <a:latin typeface="Cambria Math" panose="02040503050406030204" pitchFamily="18" charset="0"/>
                             </a:rPr>
                             <m:t>−</m:t>
                           </m:r>
                           <m:r>
-                            <a:rPr lang="en-US" altLang="zh-TW" sz="2000" i="1">
+                            <a:rPr lang="en-US" altLang="zh-TW" sz="2400" i="1">
                               <a:latin typeface="Cambria Math" panose="02040503050406030204" pitchFamily="18" charset="0"/>
                             </a:rPr>
                             <m:t>𝑓</m:t>
@@ -9275,7 +9276,7 @@
                           <m:d>
                             <m:dPr>
                               <m:ctrlPr>
-                                <a:rPr lang="en-US" altLang="zh-TW" sz="2000" i="1">
+                                <a:rPr lang="en-US" altLang="zh-TW" sz="2400" i="1">
                                   <a:latin typeface="Cambria Math" panose="02040503050406030204" pitchFamily="18" charset="0"/>
                                 </a:rPr>
                               </m:ctrlPr>
@@ -9284,14 +9285,14 @@
                               <m:sSub>
                                 <m:sSubPr>
                                   <m:ctrlPr>
-                                    <a:rPr lang="en-US" altLang="zh-TW" sz="2000" i="1">
+                                    <a:rPr lang="en-US" altLang="zh-TW" sz="2400" i="1">
                                       <a:latin typeface="Cambria Math" panose="02040503050406030204" pitchFamily="18" charset="0"/>
                                     </a:rPr>
                                   </m:ctrlPr>
                                 </m:sSubPr>
                                 <m:e>
                                   <m:r>
-                                    <a:rPr lang="en-US" altLang="zh-TW" sz="2000" i="1">
+                                    <a:rPr lang="en-US" altLang="zh-TW" sz="2400" i="1">
                                       <a:latin typeface="Cambria Math" panose="02040503050406030204" pitchFamily="18" charset="0"/>
                                     </a:rPr>
                                     <m:t>𝑥</m:t>
@@ -9299,7 +9300,7 @@
                                 </m:e>
                                 <m:sub>
                                   <m:r>
-                                    <a:rPr lang="en-US" altLang="zh-TW" sz="2000" i="1">
+                                    <a:rPr lang="en-US" altLang="zh-TW" sz="2400" i="1">
                                       <a:latin typeface="Cambria Math" panose="02040503050406030204" pitchFamily="18" charset="0"/>
                                     </a:rPr>
                                     <m:t>1</m:t>
@@ -9307,7 +9308,7 @@
                                 </m:sub>
                               </m:sSub>
                               <m:r>
-                                <a:rPr lang="en-US" altLang="zh-TW" sz="2000" i="1">
+                                <a:rPr lang="en-US" altLang="zh-TW" sz="2400" i="1">
                                   <a:latin typeface="Cambria Math" panose="02040503050406030204" pitchFamily="18" charset="0"/>
                                 </a:rPr>
                                 <m:t>,</m:t>
@@ -9315,14 +9316,14 @@
                               <m:sSub>
                                 <m:sSubPr>
                                   <m:ctrlPr>
-                                    <a:rPr lang="en-US" altLang="zh-TW" sz="2000" i="1">
+                                    <a:rPr lang="en-US" altLang="zh-TW" sz="2400" i="1">
                                       <a:latin typeface="Cambria Math" panose="02040503050406030204" pitchFamily="18" charset="0"/>
                                     </a:rPr>
                                   </m:ctrlPr>
                                 </m:sSubPr>
                                 <m:e>
                                   <m:r>
-                                    <a:rPr lang="en-US" altLang="zh-TW" sz="2000" i="1">
+                                    <a:rPr lang="en-US" altLang="zh-TW" sz="2400" i="1">
                                       <a:latin typeface="Cambria Math" panose="02040503050406030204" pitchFamily="18" charset="0"/>
                                     </a:rPr>
                                     <m:t>𝑥</m:t>
@@ -9330,7 +9331,7 @@
                                 </m:e>
                                 <m:sub>
                                   <m:r>
-                                    <a:rPr lang="en-US" altLang="zh-TW" sz="2000" i="1">
+                                    <a:rPr lang="en-US" altLang="zh-TW" sz="2400" i="1">
                                       <a:latin typeface="Cambria Math" panose="02040503050406030204" pitchFamily="18" charset="0"/>
                                     </a:rPr>
                                     <m:t>2</m:t>
@@ -9344,7 +9345,7 @@
                     </m:oMath>
                   </m:oMathPara>
                 </a14:m>
-                <a:endParaRPr lang="en-US" altLang="zh-TW" sz="2000" dirty="0"/>
+                <a:endParaRPr lang="en-US" altLang="zh-TW" sz="2400" dirty="0"/>
               </a:p>
               <a:p>
                 <a:pPr>
@@ -10189,7 +10190,7 @@
             </p:txBody>
           </p:sp>
         </mc:Choice>
-        <mc:Fallback xmlns="">
+        <mc:Fallback>
           <p:sp>
             <p:nvSpPr>
               <p:cNvPr id="3" name="Content Placeholder 2">
@@ -10214,7 +10215,7 @@
               <a:blipFill>
                 <a:blip r:embed="rId2"/>
                 <a:stretch>
-                  <a:fillRect l="-698" t="-1324"/>
+                  <a:fillRect l="-698" t="-1925"/>
                 </a:stretch>
               </a:blipFill>
             </p:spPr>
@@ -12470,8 +12471,8 @@
           <a:chExt cx="0" cy="0"/>
         </a:xfrm>
       </p:grpSpPr>
-      <mc:AlternateContent xmlns:mc="http://schemas.openxmlformats.org/markup-compatibility/2006">
-        <mc:Choice xmlns:a14="http://schemas.microsoft.com/office/drawing/2010/main" Requires="a14">
+      <mc:AlternateContent xmlns:mc="http://schemas.openxmlformats.org/markup-compatibility/2006" xmlns:a14="http://schemas.microsoft.com/office/drawing/2010/main">
+        <mc:Choice Requires="a14">
           <p:sp>
             <p:nvSpPr>
               <p:cNvPr id="3" name="Content Placeholder 2">
@@ -13010,7 +13011,7 @@
             </p:txBody>
           </p:sp>
         </mc:Choice>
-        <mc:Fallback>
+        <mc:Fallback xmlns="">
           <p:sp>
             <p:nvSpPr>
               <p:cNvPr id="3" name="Content Placeholder 2">
@@ -17357,7 +17358,7 @@
                   <a:schemeClr val="bg1"/>
                 </a:solidFill>
               </a:rPr>
-              <a:t>  CMP: An Example</a:t>
+              <a:t>  Numerical Example: Cost Minimization</a:t>
             </a:r>
           </a:p>
         </p:txBody>
@@ -19444,8 +19445,8 @@
           <a:chExt cx="0" cy="0"/>
         </a:xfrm>
       </p:grpSpPr>
-      <mc:AlternateContent xmlns:mc="http://schemas.openxmlformats.org/markup-compatibility/2006">
-        <mc:Choice xmlns:a14="http://schemas.microsoft.com/office/drawing/2010/main" Requires="a14">
+      <mc:AlternateContent xmlns:mc="http://schemas.openxmlformats.org/markup-compatibility/2006" xmlns:a14="http://schemas.microsoft.com/office/drawing/2010/main">
+        <mc:Choice Requires="a14">
           <p:sp>
             <p:nvSpPr>
               <p:cNvPr id="3" name="Content Placeholder 2">
@@ -21067,7 +21068,7 @@
             </p:txBody>
           </p:sp>
         </mc:Choice>
-        <mc:Fallback>
+        <mc:Fallback xmlns="">
           <p:sp>
             <p:nvSpPr>
               <p:cNvPr id="3" name="Content Placeholder 2">
@@ -21200,7 +21201,7 @@
                   <a:schemeClr val="bg1"/>
                 </a:solidFill>
               </a:rPr>
-              <a:t>  CMP: An Example</a:t>
+              <a:t>  Numerical Example: Cost Minimization</a:t>
             </a:r>
           </a:p>
         </p:txBody>
@@ -24710,6 +24711,2086 @@
 <file path=ppt/slides/slide23.xml><?xml version="1.0" encoding="utf-8"?>
 <p:sld xmlns:a="http://schemas.openxmlformats.org/drawingml/2006/main" xmlns:r="http://schemas.openxmlformats.org/officeDocument/2006/relationships" xmlns:p="http://schemas.openxmlformats.org/presentationml/2006/main">
   <p:cSld>
+    <p:spTree>
+      <p:nvGrpSpPr>
+        <p:cNvPr id="1" name="">
+          <a:extLst>
+            <a:ext uri="{FF2B5EF4-FFF2-40B4-BE49-F238E27FC236}">
+              <a16:creationId xmlns:a16="http://schemas.microsoft.com/office/drawing/2014/main" id="{8C682FBD-541A-2AE1-227E-BF663C5E403D}"/>
+            </a:ext>
+          </a:extLst>
+        </p:cNvPr>
+        <p:cNvGrpSpPr/>
+        <p:nvPr/>
+      </p:nvGrpSpPr>
+      <p:grpSpPr>
+        <a:xfrm>
+          <a:off x="0" y="0"/>
+          <a:ext cx="0" cy="0"/>
+          <a:chOff x="0" y="0"/>
+          <a:chExt cx="0" cy="0"/>
+        </a:xfrm>
+      </p:grpSpPr>
+      <mc:AlternateContent xmlns:mc="http://schemas.openxmlformats.org/markup-compatibility/2006">
+        <mc:Choice xmlns:a14="http://schemas.microsoft.com/office/drawing/2010/main" Requires="a14">
+          <p:sp>
+            <p:nvSpPr>
+              <p:cNvPr id="3" name="Content Placeholder 2">
+                <a:extLst>
+                  <a:ext uri="{FF2B5EF4-FFF2-40B4-BE49-F238E27FC236}">
+                    <a16:creationId xmlns:a16="http://schemas.microsoft.com/office/drawing/2014/main" id="{064B63EA-ABC2-71CF-426D-ED35E4027CEE}"/>
+                  </a:ext>
+                </a:extLst>
+              </p:cNvPr>
+              <p:cNvSpPr>
+                <a:spLocks noGrp="1"/>
+              </p:cNvSpPr>
+              <p:nvPr>
+                <p:ph idx="1"/>
+              </p:nvPr>
+            </p:nvSpPr>
+            <p:spPr>
+              <a:xfrm>
+                <a:off x="457199" y="1300900"/>
+                <a:ext cx="11353801" cy="5063324"/>
+              </a:xfrm>
+            </p:spPr>
+            <p:txBody>
+              <a:bodyPr>
+                <a:normAutofit/>
+              </a:bodyPr>
+              <a:lstStyle/>
+              <a:p>
+                <a:pPr>
+                  <a:lnSpc>
+                    <a:spcPct val="105000"/>
+                  </a:lnSpc>
+                  <a:spcBef>
+                    <a:spcPts val="1000"/>
+                  </a:spcBef>
+                  <a:defRPr sz="2000">
+                    <a:solidFill>
+                      <a:srgbClr val="000000"/>
+                    </a:solidFill>
+                    <a:latin typeface="Garamond"/>
+                  </a:defRPr>
+                </a:pPr>
+                <a:r>
+                  <a:rPr lang="en-US" altLang="zh-TW" sz="2400" dirty="0"/>
+                  <a:t>Consider the following CMP:</a:t>
+                </a:r>
+              </a:p>
+              <a:p>
+                <a:pPr marL="0" indent="0" algn="ctr">
+                  <a:lnSpc>
+                    <a:spcPct val="95000"/>
+                  </a:lnSpc>
+                  <a:spcBef>
+                    <a:spcPts val="1000"/>
+                  </a:spcBef>
+                  <a:buNone/>
+                  <a:defRPr sz="2000">
+                    <a:solidFill>
+                      <a:srgbClr val="000000"/>
+                    </a:solidFill>
+                    <a:latin typeface="Garamond"/>
+                  </a:defRPr>
+                </a:pPr>
+                <a:r>
+                  <a:rPr lang="en-US" altLang="zh-TW" sz="2000" dirty="0">
+                    <a:ea typeface="Cambria Math" panose="02040503050406030204" pitchFamily="18" charset="0"/>
+                  </a:rPr>
+                  <a:t> </a:t>
+                </a:r>
+                <a14:m>
+                  <m:oMath xmlns:m="http://schemas.openxmlformats.org/officeDocument/2006/math">
+                    <m:func>
+                      <m:funcPr>
+                        <m:ctrlPr>
+                          <a:rPr lang="en-US" altLang="zh-TW" sz="2000" i="1">
+                            <a:latin typeface="Cambria Math" panose="02040503050406030204" pitchFamily="18" charset="0"/>
+                          </a:rPr>
+                        </m:ctrlPr>
+                      </m:funcPr>
+                      <m:fName>
+                        <m:limLow>
+                          <m:limLowPr>
+                            <m:ctrlPr>
+                              <a:rPr lang="en-US" altLang="zh-TW" sz="2000" i="1">
+                                <a:latin typeface="Cambria Math" panose="02040503050406030204" pitchFamily="18" charset="0"/>
+                              </a:rPr>
+                            </m:ctrlPr>
+                          </m:limLowPr>
+                          <m:e>
+                            <m:r>
+                              <m:rPr>
+                                <m:sty m:val="p"/>
+                              </m:rPr>
+                              <a:rPr lang="en-US" altLang="zh-TW" sz="2000">
+                                <a:latin typeface="Cambria Math" panose="02040503050406030204" pitchFamily="18" charset="0"/>
+                              </a:rPr>
+                              <m:t>min</m:t>
+                            </m:r>
+                          </m:e>
+                          <m:lim>
+                            <m:sSub>
+                              <m:sSubPr>
+                                <m:ctrlPr>
+                                  <a:rPr lang="en-US" altLang="zh-TW" sz="2000" i="1">
+                                    <a:latin typeface="Cambria Math" panose="02040503050406030204" pitchFamily="18" charset="0"/>
+                                  </a:rPr>
+                                </m:ctrlPr>
+                              </m:sSubPr>
+                              <m:e>
+                                <m:r>
+                                  <a:rPr lang="en-US" altLang="zh-TW" sz="2000" i="1">
+                                    <a:latin typeface="Cambria Math" panose="02040503050406030204" pitchFamily="18" charset="0"/>
+                                  </a:rPr>
+                                  <m:t>𝑥</m:t>
+                                </m:r>
+                              </m:e>
+                              <m:sub>
+                                <m:r>
+                                  <a:rPr lang="en-US" altLang="zh-TW" sz="2000" i="1">
+                                    <a:latin typeface="Cambria Math" panose="02040503050406030204" pitchFamily="18" charset="0"/>
+                                  </a:rPr>
+                                  <m:t>1</m:t>
+                                </m:r>
+                              </m:sub>
+                            </m:sSub>
+                            <m:r>
+                              <a:rPr lang="en-US" altLang="zh-TW" sz="2000" i="1" smtClean="0">
+                                <a:latin typeface="Cambria Math" panose="02040503050406030204" pitchFamily="18" charset="0"/>
+                              </a:rPr>
+                              <m:t> </m:t>
+                            </m:r>
+                          </m:lim>
+                        </m:limLow>
+                      </m:fName>
+                      <m:e>
+                        <m:sSub>
+                          <m:sSubPr>
+                            <m:ctrlPr>
+                              <a:rPr lang="en-US" altLang="zh-TW" sz="2000" i="1">
+                                <a:latin typeface="Cambria Math" panose="02040503050406030204" pitchFamily="18" charset="0"/>
+                              </a:rPr>
+                            </m:ctrlPr>
+                          </m:sSubPr>
+                          <m:e>
+                            <m:r>
+                              <a:rPr lang="en-US" altLang="zh-TW" sz="2000" i="1">
+                                <a:latin typeface="Cambria Math" panose="02040503050406030204" pitchFamily="18" charset="0"/>
+                              </a:rPr>
+                              <m:t> </m:t>
+                            </m:r>
+                            <m:r>
+                              <a:rPr lang="en-US" altLang="zh-TW" sz="2000" i="1">
+                                <a:latin typeface="Cambria Math" panose="02040503050406030204" pitchFamily="18" charset="0"/>
+                              </a:rPr>
+                              <m:t>𝜔</m:t>
+                            </m:r>
+                          </m:e>
+                          <m:sub>
+                            <m:r>
+                              <a:rPr lang="en-US" altLang="zh-TW" sz="2000" i="1">
+                                <a:latin typeface="Cambria Math" panose="02040503050406030204" pitchFamily="18" charset="0"/>
+                              </a:rPr>
+                              <m:t>1</m:t>
+                            </m:r>
+                          </m:sub>
+                        </m:sSub>
+                        <m:sSub>
+                          <m:sSubPr>
+                            <m:ctrlPr>
+                              <a:rPr lang="en-US" altLang="zh-TW" sz="2000" i="1">
+                                <a:latin typeface="Cambria Math" panose="02040503050406030204" pitchFamily="18" charset="0"/>
+                              </a:rPr>
+                            </m:ctrlPr>
+                          </m:sSubPr>
+                          <m:e>
+                            <m:r>
+                              <a:rPr lang="en-US" altLang="zh-TW" sz="2000" i="1">
+                                <a:latin typeface="Cambria Math" panose="02040503050406030204" pitchFamily="18" charset="0"/>
+                              </a:rPr>
+                              <m:t>𝑥</m:t>
+                            </m:r>
+                          </m:e>
+                          <m:sub>
+                            <m:r>
+                              <a:rPr lang="en-US" altLang="zh-TW" sz="2000" i="1">
+                                <a:latin typeface="Cambria Math" panose="02040503050406030204" pitchFamily="18" charset="0"/>
+                              </a:rPr>
+                              <m:t>1</m:t>
+                            </m:r>
+                          </m:sub>
+                        </m:sSub>
+                        <m:r>
+                          <a:rPr lang="en-US" altLang="zh-TW" sz="2000" i="1">
+                            <a:latin typeface="Cambria Math" panose="02040503050406030204" pitchFamily="18" charset="0"/>
+                          </a:rPr>
+                          <m:t>+</m:t>
+                        </m:r>
+                        <m:sSub>
+                          <m:sSubPr>
+                            <m:ctrlPr>
+                              <a:rPr lang="en-US" altLang="zh-TW" sz="2000" i="1">
+                                <a:latin typeface="Cambria Math" panose="02040503050406030204" pitchFamily="18" charset="0"/>
+                              </a:rPr>
+                            </m:ctrlPr>
+                          </m:sSubPr>
+                          <m:e>
+                            <m:r>
+                              <a:rPr lang="en-US" altLang="zh-TW" sz="2000" i="1">
+                                <a:latin typeface="Cambria Math" panose="02040503050406030204" pitchFamily="18" charset="0"/>
+                              </a:rPr>
+                              <m:t>𝜔</m:t>
+                            </m:r>
+                          </m:e>
+                          <m:sub>
+                            <m:r>
+                              <a:rPr lang="en-US" altLang="zh-TW" sz="2000" i="1">
+                                <a:latin typeface="Cambria Math" panose="02040503050406030204" pitchFamily="18" charset="0"/>
+                              </a:rPr>
+                              <m:t>2</m:t>
+                            </m:r>
+                          </m:sub>
+                        </m:sSub>
+                        <m:sSub>
+                          <m:sSubPr>
+                            <m:ctrlPr>
+                              <a:rPr lang="en-US" altLang="zh-TW" sz="2000" b="0" i="1" smtClean="0">
+                                <a:latin typeface="Cambria Math" panose="02040503050406030204" pitchFamily="18" charset="0"/>
+                              </a:rPr>
+                            </m:ctrlPr>
+                          </m:sSubPr>
+                          <m:e>
+                            <m:acc>
+                              <m:accPr>
+                                <m:chr m:val="̅"/>
+                                <m:ctrlPr>
+                                  <a:rPr lang="en-US" altLang="zh-TW" sz="2000" i="1" smtClean="0">
+                                    <a:latin typeface="Cambria Math" panose="02040503050406030204" pitchFamily="18" charset="0"/>
+                                  </a:rPr>
+                                </m:ctrlPr>
+                              </m:accPr>
+                              <m:e>
+                                <m:r>
+                                  <a:rPr lang="en-US" altLang="zh-TW" sz="2000" b="0" i="1" smtClean="0">
+                                    <a:latin typeface="Cambria Math" panose="02040503050406030204" pitchFamily="18" charset="0"/>
+                                  </a:rPr>
+                                  <m:t>𝑥</m:t>
+                                </m:r>
+                              </m:e>
+                            </m:acc>
+                          </m:e>
+                          <m:sub>
+                            <m:r>
+                              <a:rPr lang="en-US" altLang="zh-TW" sz="2000" b="0" i="1" smtClean="0">
+                                <a:latin typeface="Cambria Math" panose="02040503050406030204" pitchFamily="18" charset="0"/>
+                              </a:rPr>
+                              <m:t>2</m:t>
+                            </m:r>
+                          </m:sub>
+                        </m:sSub>
+                      </m:e>
+                    </m:func>
+                    <m:r>
+                      <a:rPr lang="en-US" altLang="zh-TW" sz="2000" i="1">
+                        <a:latin typeface="Cambria Math" panose="02040503050406030204" pitchFamily="18" charset="0"/>
+                      </a:rPr>
+                      <m:t>,   </m:t>
+                    </m:r>
+                    <m:r>
+                      <a:rPr lang="en-US" altLang="zh-TW" sz="2000" i="1">
+                        <a:latin typeface="Cambria Math" panose="02040503050406030204" pitchFamily="18" charset="0"/>
+                      </a:rPr>
+                      <m:t>𝑠</m:t>
+                    </m:r>
+                    <m:r>
+                      <a:rPr lang="en-US" altLang="zh-TW" sz="2000" i="1">
+                        <a:latin typeface="Cambria Math" panose="02040503050406030204" pitchFamily="18" charset="0"/>
+                      </a:rPr>
+                      <m:t>.</m:t>
+                    </m:r>
+                    <m:r>
+                      <a:rPr lang="en-US" altLang="zh-TW" sz="2000" i="1">
+                        <a:latin typeface="Cambria Math" panose="02040503050406030204" pitchFamily="18" charset="0"/>
+                      </a:rPr>
+                      <m:t>𝑡</m:t>
+                    </m:r>
+                    <m:r>
+                      <a:rPr lang="en-US" altLang="zh-TW" sz="2000" i="1">
+                        <a:latin typeface="Cambria Math" panose="02040503050406030204" pitchFamily="18" charset="0"/>
+                      </a:rPr>
+                      <m:t>.     </m:t>
+                    </m:r>
+                    <m:sSubSup>
+                      <m:sSubSupPr>
+                        <m:ctrlPr>
+                          <a:rPr lang="en-US" altLang="zh-TW" sz="2000" b="0" i="1" smtClean="0">
+                            <a:latin typeface="Cambria Math" panose="02040503050406030204" pitchFamily="18" charset="0"/>
+                          </a:rPr>
+                        </m:ctrlPr>
+                      </m:sSubSupPr>
+                      <m:e>
+                        <m:r>
+                          <a:rPr lang="en-US" altLang="zh-TW" sz="2000" b="0" i="1" smtClean="0">
+                            <a:latin typeface="Cambria Math" panose="02040503050406030204" pitchFamily="18" charset="0"/>
+                          </a:rPr>
+                          <m:t>𝑥</m:t>
+                        </m:r>
+                      </m:e>
+                      <m:sub>
+                        <m:r>
+                          <a:rPr lang="en-US" altLang="zh-TW" sz="2000" b="0" i="1" smtClean="0">
+                            <a:latin typeface="Cambria Math" panose="02040503050406030204" pitchFamily="18" charset="0"/>
+                          </a:rPr>
+                          <m:t>1</m:t>
+                        </m:r>
+                      </m:sub>
+                      <m:sup>
+                        <m:f>
+                          <m:fPr>
+                            <m:type m:val="skw"/>
+                            <m:ctrlPr>
+                              <a:rPr lang="en-US" altLang="zh-TW" sz="2000" b="0" i="1" smtClean="0">
+                                <a:latin typeface="Cambria Math" panose="02040503050406030204" pitchFamily="18" charset="0"/>
+                              </a:rPr>
+                            </m:ctrlPr>
+                          </m:fPr>
+                          <m:num>
+                            <m:r>
+                              <a:rPr lang="en-US" altLang="zh-TW" sz="2000" b="0" i="1" smtClean="0">
+                                <a:latin typeface="Cambria Math" panose="02040503050406030204" pitchFamily="18" charset="0"/>
+                              </a:rPr>
+                              <m:t>1</m:t>
+                            </m:r>
+                          </m:num>
+                          <m:den>
+                            <m:r>
+                              <a:rPr lang="en-US" altLang="zh-TW" sz="2000" b="0" i="1" smtClean="0">
+                                <a:latin typeface="Cambria Math" panose="02040503050406030204" pitchFamily="18" charset="0"/>
+                              </a:rPr>
+                              <m:t>3</m:t>
+                            </m:r>
+                          </m:den>
+                        </m:f>
+                      </m:sup>
+                    </m:sSubSup>
+                    <m:sSubSup>
+                      <m:sSubSupPr>
+                        <m:ctrlPr>
+                          <a:rPr lang="en-US" altLang="zh-TW" sz="2000" i="1">
+                            <a:latin typeface="Cambria Math" panose="02040503050406030204" pitchFamily="18" charset="0"/>
+                          </a:rPr>
+                        </m:ctrlPr>
+                      </m:sSubSupPr>
+                      <m:e>
+                        <m:acc>
+                          <m:accPr>
+                            <m:chr m:val="̅"/>
+                            <m:ctrlPr>
+                              <a:rPr lang="en-US" altLang="zh-TW" sz="2000" i="1" smtClean="0">
+                                <a:latin typeface="Cambria Math" panose="02040503050406030204" pitchFamily="18" charset="0"/>
+                              </a:rPr>
+                            </m:ctrlPr>
+                          </m:accPr>
+                          <m:e>
+                            <m:r>
+                              <a:rPr lang="en-US" altLang="zh-TW" sz="2000" b="0" i="1" smtClean="0">
+                                <a:latin typeface="Cambria Math" panose="02040503050406030204" pitchFamily="18" charset="0"/>
+                              </a:rPr>
+                              <m:t>𝑥</m:t>
+                            </m:r>
+                          </m:e>
+                        </m:acc>
+                      </m:e>
+                      <m:sub>
+                        <m:r>
+                          <a:rPr lang="en-US" altLang="zh-TW" sz="2000" b="0" i="1" smtClean="0">
+                            <a:latin typeface="Cambria Math" panose="02040503050406030204" pitchFamily="18" charset="0"/>
+                          </a:rPr>
+                          <m:t>2</m:t>
+                        </m:r>
+                      </m:sub>
+                      <m:sup>
+                        <m:f>
+                          <m:fPr>
+                            <m:type m:val="skw"/>
+                            <m:ctrlPr>
+                              <a:rPr lang="en-US" altLang="zh-TW" sz="2000" i="1">
+                                <a:latin typeface="Cambria Math" panose="02040503050406030204" pitchFamily="18" charset="0"/>
+                              </a:rPr>
+                            </m:ctrlPr>
+                          </m:fPr>
+                          <m:num>
+                            <m:r>
+                              <a:rPr lang="en-US" altLang="zh-TW" sz="2000" b="0" i="1" smtClean="0">
+                                <a:latin typeface="Cambria Math" panose="02040503050406030204" pitchFamily="18" charset="0"/>
+                              </a:rPr>
+                              <m:t>2</m:t>
+                            </m:r>
+                          </m:num>
+                          <m:den>
+                            <m:r>
+                              <a:rPr lang="en-US" altLang="zh-TW" sz="2000" b="0" i="1" smtClean="0">
+                                <a:latin typeface="Cambria Math" panose="02040503050406030204" pitchFamily="18" charset="0"/>
+                              </a:rPr>
+                              <m:t>3</m:t>
+                            </m:r>
+                          </m:den>
+                        </m:f>
+                      </m:sup>
+                    </m:sSubSup>
+                    <m:r>
+                      <a:rPr lang="en-US" altLang="zh-TW" sz="2000" i="1">
+                        <a:latin typeface="Cambria Math" panose="02040503050406030204" pitchFamily="18" charset="0"/>
+                      </a:rPr>
+                      <m:t>=</m:t>
+                    </m:r>
+                    <m:acc>
+                      <m:accPr>
+                        <m:chr m:val="̅"/>
+                        <m:ctrlPr>
+                          <a:rPr lang="en-US" altLang="zh-TW" sz="2000" i="1">
+                            <a:latin typeface="Cambria Math" panose="02040503050406030204" pitchFamily="18" charset="0"/>
+                          </a:rPr>
+                        </m:ctrlPr>
+                      </m:accPr>
+                      <m:e>
+                        <m:r>
+                          <a:rPr lang="en-US" altLang="zh-TW" sz="2000" i="1">
+                            <a:latin typeface="Cambria Math" panose="02040503050406030204" pitchFamily="18" charset="0"/>
+                          </a:rPr>
+                          <m:t>𝑦</m:t>
+                        </m:r>
+                      </m:e>
+                    </m:acc>
+                  </m:oMath>
+                </a14:m>
+                <a:endParaRPr lang="en-US" altLang="zh-TW" sz="2000" dirty="0"/>
+              </a:p>
+              <a:p>
+                <a:pPr>
+                  <a:lnSpc>
+                    <a:spcPct val="95000"/>
+                  </a:lnSpc>
+                  <a:spcBef>
+                    <a:spcPts val="1000"/>
+                  </a:spcBef>
+                  <a:defRPr sz="2000">
+                    <a:solidFill>
+                      <a:srgbClr val="000000"/>
+                    </a:solidFill>
+                    <a:latin typeface="Garamond"/>
+                  </a:defRPr>
+                </a:pPr>
+                <a:endParaRPr lang="en-US" altLang="zh-TW" sz="600" dirty="0"/>
+              </a:p>
+              <a:p>
+                <a:pPr>
+                  <a:lnSpc>
+                    <a:spcPct val="105000"/>
+                  </a:lnSpc>
+                  <a:spcBef>
+                    <a:spcPts val="1000"/>
+                  </a:spcBef>
+                  <a:defRPr sz="2000">
+                    <a:solidFill>
+                      <a:srgbClr val="000000"/>
+                    </a:solidFill>
+                    <a:latin typeface="Garamond"/>
+                  </a:defRPr>
+                </a:pPr>
+                <a:r>
+                  <a:rPr lang="en-US" altLang="zh-TW" sz="2400" dirty="0"/>
+                  <a:t>The production constraint solely dictates the conditional factor demand of input 1:</a:t>
+                </a:r>
+              </a:p>
+              <a:p>
+                <a:pPr>
+                  <a:lnSpc>
+                    <a:spcPct val="105000"/>
+                  </a:lnSpc>
+                  <a:spcBef>
+                    <a:spcPts val="1000"/>
+                  </a:spcBef>
+                  <a:defRPr sz="2000">
+                    <a:solidFill>
+                      <a:srgbClr val="000000"/>
+                    </a:solidFill>
+                    <a:latin typeface="Garamond"/>
+                  </a:defRPr>
+                </a:pPr>
+                <a:endParaRPr lang="en-US" altLang="zh-TW" sz="500" dirty="0"/>
+              </a:p>
+              <a:p>
+                <a:pPr marL="0" indent="0">
+                  <a:lnSpc>
+                    <a:spcPct val="105000"/>
+                  </a:lnSpc>
+                  <a:spcBef>
+                    <a:spcPts val="1000"/>
+                  </a:spcBef>
+                  <a:buNone/>
+                  <a:defRPr sz="2000">
+                    <a:solidFill>
+                      <a:srgbClr val="000000"/>
+                    </a:solidFill>
+                    <a:latin typeface="Garamond"/>
+                  </a:defRPr>
+                </a:pPr>
+                <a14:m>
+                  <m:oMathPara xmlns:m="http://schemas.openxmlformats.org/officeDocument/2006/math">
+                    <m:oMathParaPr>
+                      <m:jc m:val="centerGroup"/>
+                    </m:oMathParaPr>
+                    <m:oMath xmlns:m="http://schemas.openxmlformats.org/officeDocument/2006/math">
+                      <m:sSubSup>
+                        <m:sSubSupPr>
+                          <m:ctrlPr>
+                            <a:rPr lang="en-US" altLang="zh-TW" sz="2000" i="1">
+                              <a:latin typeface="Cambria Math" panose="02040503050406030204" pitchFamily="18" charset="0"/>
+                            </a:rPr>
+                          </m:ctrlPr>
+                        </m:sSubSupPr>
+                        <m:e>
+                          <m:r>
+                            <a:rPr lang="en-US" altLang="zh-TW" sz="2000" i="1">
+                              <a:latin typeface="Cambria Math" panose="02040503050406030204" pitchFamily="18" charset="0"/>
+                            </a:rPr>
+                            <m:t>𝑥</m:t>
+                          </m:r>
+                        </m:e>
+                        <m:sub>
+                          <m:r>
+                            <a:rPr lang="en-US" altLang="zh-TW" sz="2000" i="1">
+                              <a:latin typeface="Cambria Math" panose="02040503050406030204" pitchFamily="18" charset="0"/>
+                            </a:rPr>
+                            <m:t>1</m:t>
+                          </m:r>
+                        </m:sub>
+                        <m:sup>
+                          <m:f>
+                            <m:fPr>
+                              <m:type m:val="skw"/>
+                              <m:ctrlPr>
+                                <a:rPr lang="en-US" altLang="zh-TW" sz="2000" i="1">
+                                  <a:latin typeface="Cambria Math" panose="02040503050406030204" pitchFamily="18" charset="0"/>
+                                </a:rPr>
+                              </m:ctrlPr>
+                            </m:fPr>
+                            <m:num>
+                              <m:r>
+                                <a:rPr lang="en-US" altLang="zh-TW" sz="2000" i="1">
+                                  <a:latin typeface="Cambria Math" panose="02040503050406030204" pitchFamily="18" charset="0"/>
+                                </a:rPr>
+                                <m:t>1</m:t>
+                              </m:r>
+                            </m:num>
+                            <m:den>
+                              <m:r>
+                                <a:rPr lang="en-US" altLang="zh-TW" sz="2000" i="1">
+                                  <a:latin typeface="Cambria Math" panose="02040503050406030204" pitchFamily="18" charset="0"/>
+                                </a:rPr>
+                                <m:t>3</m:t>
+                              </m:r>
+                            </m:den>
+                          </m:f>
+                        </m:sup>
+                      </m:sSubSup>
+                      <m:sSubSup>
+                        <m:sSubSupPr>
+                          <m:ctrlPr>
+                            <a:rPr lang="en-US" altLang="zh-TW" sz="2000" i="1" smtClean="0">
+                              <a:latin typeface="Cambria Math" panose="02040503050406030204" pitchFamily="18" charset="0"/>
+                            </a:rPr>
+                          </m:ctrlPr>
+                        </m:sSubSupPr>
+                        <m:e>
+                          <m:acc>
+                            <m:accPr>
+                              <m:chr m:val="̅"/>
+                              <m:ctrlPr>
+                                <a:rPr lang="en-US" altLang="zh-TW" sz="2000" i="1">
+                                  <a:latin typeface="Cambria Math" panose="02040503050406030204" pitchFamily="18" charset="0"/>
+                                </a:rPr>
+                              </m:ctrlPr>
+                            </m:accPr>
+                            <m:e>
+                              <m:r>
+                                <a:rPr lang="en-US" altLang="zh-TW" sz="2000" i="1">
+                                  <a:latin typeface="Cambria Math" panose="02040503050406030204" pitchFamily="18" charset="0"/>
+                                </a:rPr>
+                                <m:t>𝑥</m:t>
+                              </m:r>
+                            </m:e>
+                          </m:acc>
+                        </m:e>
+                        <m:sub>
+                          <m:r>
+                            <a:rPr lang="en-US" altLang="zh-TW" sz="2000" i="1">
+                              <a:latin typeface="Cambria Math" panose="02040503050406030204" pitchFamily="18" charset="0"/>
+                            </a:rPr>
+                            <m:t>2</m:t>
+                          </m:r>
+                        </m:sub>
+                        <m:sup>
+                          <m:f>
+                            <m:fPr>
+                              <m:type m:val="skw"/>
+                              <m:ctrlPr>
+                                <a:rPr lang="en-US" altLang="zh-TW" sz="2000" i="1">
+                                  <a:latin typeface="Cambria Math" panose="02040503050406030204" pitchFamily="18" charset="0"/>
+                                </a:rPr>
+                              </m:ctrlPr>
+                            </m:fPr>
+                            <m:num>
+                              <m:r>
+                                <a:rPr lang="en-US" altLang="zh-TW" sz="2000" i="1">
+                                  <a:latin typeface="Cambria Math" panose="02040503050406030204" pitchFamily="18" charset="0"/>
+                                </a:rPr>
+                                <m:t>2</m:t>
+                              </m:r>
+                            </m:num>
+                            <m:den>
+                              <m:r>
+                                <a:rPr lang="en-US" altLang="zh-TW" sz="2000" i="1">
+                                  <a:latin typeface="Cambria Math" panose="02040503050406030204" pitchFamily="18" charset="0"/>
+                                </a:rPr>
+                                <m:t>3</m:t>
+                              </m:r>
+                            </m:den>
+                          </m:f>
+                        </m:sup>
+                      </m:sSubSup>
+                      <m:r>
+                        <a:rPr lang="en-US" altLang="zh-TW" sz="2000" i="1">
+                          <a:latin typeface="Cambria Math" panose="02040503050406030204" pitchFamily="18" charset="0"/>
+                        </a:rPr>
+                        <m:t>=</m:t>
+                      </m:r>
+                      <m:acc>
+                        <m:accPr>
+                          <m:chr m:val="̅"/>
+                          <m:ctrlPr>
+                            <a:rPr lang="en-US" altLang="zh-TW" sz="2000" i="1">
+                              <a:latin typeface="Cambria Math" panose="02040503050406030204" pitchFamily="18" charset="0"/>
+                            </a:rPr>
+                          </m:ctrlPr>
+                        </m:accPr>
+                        <m:e>
+                          <m:r>
+                            <a:rPr lang="en-US" altLang="zh-TW" sz="2000" i="1">
+                              <a:latin typeface="Cambria Math" panose="02040503050406030204" pitchFamily="18" charset="0"/>
+                            </a:rPr>
+                            <m:t>𝑦</m:t>
+                          </m:r>
+                        </m:e>
+                      </m:acc>
+                      <m:r>
+                        <a:rPr lang="en-US" altLang="zh-TW" sz="2000" b="0" i="1" smtClean="0">
+                          <a:latin typeface="Cambria Math" panose="02040503050406030204" pitchFamily="18" charset="0"/>
+                        </a:rPr>
+                        <m:t>   </m:t>
+                      </m:r>
+                      <m:r>
+                        <a:rPr lang="en-US" altLang="zh-TW" sz="2000" b="0" i="1" smtClean="0">
+                          <a:latin typeface="Cambria Math" panose="02040503050406030204" pitchFamily="18" charset="0"/>
+                          <a:ea typeface="Cambria Math" panose="02040503050406030204" pitchFamily="18" charset="0"/>
+                        </a:rPr>
+                        <m:t>⟹  </m:t>
+                      </m:r>
+                      <m:sSubSup>
+                        <m:sSubSupPr>
+                          <m:ctrlPr>
+                            <a:rPr lang="en-US" altLang="zh-TW" sz="2000" i="1">
+                              <a:latin typeface="Cambria Math" panose="02040503050406030204" pitchFamily="18" charset="0"/>
+                            </a:rPr>
+                          </m:ctrlPr>
+                        </m:sSubSupPr>
+                        <m:e>
+                          <m:r>
+                            <a:rPr lang="en-US" altLang="zh-TW" sz="2000" i="1">
+                              <a:latin typeface="Cambria Math" panose="02040503050406030204" pitchFamily="18" charset="0"/>
+                            </a:rPr>
+                            <m:t>𝑥</m:t>
+                          </m:r>
+                        </m:e>
+                        <m:sub>
+                          <m:r>
+                            <a:rPr lang="en-US" altLang="zh-TW" sz="2000" i="1">
+                              <a:latin typeface="Cambria Math" panose="02040503050406030204" pitchFamily="18" charset="0"/>
+                            </a:rPr>
+                            <m:t>1</m:t>
+                          </m:r>
+                        </m:sub>
+                        <m:sup>
+                          <m:f>
+                            <m:fPr>
+                              <m:type m:val="skw"/>
+                              <m:ctrlPr>
+                                <a:rPr lang="en-US" altLang="zh-TW" sz="2000" i="1">
+                                  <a:latin typeface="Cambria Math" panose="02040503050406030204" pitchFamily="18" charset="0"/>
+                                </a:rPr>
+                              </m:ctrlPr>
+                            </m:fPr>
+                            <m:num>
+                              <m:r>
+                                <a:rPr lang="en-US" altLang="zh-TW" sz="2000" i="1">
+                                  <a:latin typeface="Cambria Math" panose="02040503050406030204" pitchFamily="18" charset="0"/>
+                                </a:rPr>
+                                <m:t>1</m:t>
+                              </m:r>
+                            </m:num>
+                            <m:den>
+                              <m:r>
+                                <a:rPr lang="en-US" altLang="zh-TW" sz="2000" i="1">
+                                  <a:latin typeface="Cambria Math" panose="02040503050406030204" pitchFamily="18" charset="0"/>
+                                </a:rPr>
+                                <m:t>3</m:t>
+                              </m:r>
+                            </m:den>
+                          </m:f>
+                        </m:sup>
+                      </m:sSubSup>
+                      <m:r>
+                        <a:rPr lang="en-US" altLang="zh-TW" sz="2000" b="0" i="1" smtClean="0">
+                          <a:latin typeface="Cambria Math" panose="02040503050406030204" pitchFamily="18" charset="0"/>
+                        </a:rPr>
+                        <m:t>=</m:t>
+                      </m:r>
+                      <m:f>
+                        <m:fPr>
+                          <m:ctrlPr>
+                            <a:rPr lang="en-US" altLang="zh-TW" sz="2000" b="0" i="1" smtClean="0">
+                              <a:latin typeface="Cambria Math" panose="02040503050406030204" pitchFamily="18" charset="0"/>
+                            </a:rPr>
+                          </m:ctrlPr>
+                        </m:fPr>
+                        <m:num>
+                          <m:acc>
+                            <m:accPr>
+                              <m:chr m:val="̅"/>
+                              <m:ctrlPr>
+                                <a:rPr lang="en-US" altLang="zh-TW" sz="2000" i="1">
+                                  <a:latin typeface="Cambria Math" panose="02040503050406030204" pitchFamily="18" charset="0"/>
+                                </a:rPr>
+                              </m:ctrlPr>
+                            </m:accPr>
+                            <m:e>
+                              <m:r>
+                                <a:rPr lang="en-US" altLang="zh-TW" sz="2000" i="1">
+                                  <a:latin typeface="Cambria Math" panose="02040503050406030204" pitchFamily="18" charset="0"/>
+                                </a:rPr>
+                                <m:t>𝑦</m:t>
+                              </m:r>
+                            </m:e>
+                          </m:acc>
+                        </m:num>
+                        <m:den>
+                          <m:sSubSup>
+                            <m:sSubSupPr>
+                              <m:ctrlPr>
+                                <a:rPr lang="en-US" altLang="zh-TW" sz="2000" i="1">
+                                  <a:latin typeface="Cambria Math" panose="02040503050406030204" pitchFamily="18" charset="0"/>
+                                </a:rPr>
+                              </m:ctrlPr>
+                            </m:sSubSupPr>
+                            <m:e>
+                              <m:acc>
+                                <m:accPr>
+                                  <m:chr m:val="̅"/>
+                                  <m:ctrlPr>
+                                    <a:rPr lang="en-US" altLang="zh-TW" sz="2000" i="1">
+                                      <a:latin typeface="Cambria Math" panose="02040503050406030204" pitchFamily="18" charset="0"/>
+                                    </a:rPr>
+                                  </m:ctrlPr>
+                                </m:accPr>
+                                <m:e>
+                                  <m:r>
+                                    <a:rPr lang="en-US" altLang="zh-TW" sz="2000" i="1">
+                                      <a:latin typeface="Cambria Math" panose="02040503050406030204" pitchFamily="18" charset="0"/>
+                                    </a:rPr>
+                                    <m:t>𝑥</m:t>
+                                  </m:r>
+                                </m:e>
+                              </m:acc>
+                            </m:e>
+                            <m:sub>
+                              <m:r>
+                                <a:rPr lang="en-US" altLang="zh-TW" sz="2000" i="1">
+                                  <a:latin typeface="Cambria Math" panose="02040503050406030204" pitchFamily="18" charset="0"/>
+                                </a:rPr>
+                                <m:t>2</m:t>
+                              </m:r>
+                            </m:sub>
+                            <m:sup>
+                              <m:f>
+                                <m:fPr>
+                                  <m:type m:val="skw"/>
+                                  <m:ctrlPr>
+                                    <a:rPr lang="en-US" altLang="zh-TW" sz="2000" i="1">
+                                      <a:latin typeface="Cambria Math" panose="02040503050406030204" pitchFamily="18" charset="0"/>
+                                    </a:rPr>
+                                  </m:ctrlPr>
+                                </m:fPr>
+                                <m:num>
+                                  <m:r>
+                                    <a:rPr lang="en-US" altLang="zh-TW" sz="2000" i="1">
+                                      <a:latin typeface="Cambria Math" panose="02040503050406030204" pitchFamily="18" charset="0"/>
+                                    </a:rPr>
+                                    <m:t>2</m:t>
+                                  </m:r>
+                                </m:num>
+                                <m:den>
+                                  <m:r>
+                                    <a:rPr lang="en-US" altLang="zh-TW" sz="2000" i="1">
+                                      <a:latin typeface="Cambria Math" panose="02040503050406030204" pitchFamily="18" charset="0"/>
+                                    </a:rPr>
+                                    <m:t>3</m:t>
+                                  </m:r>
+                                </m:den>
+                              </m:f>
+                            </m:sup>
+                          </m:sSubSup>
+                        </m:den>
+                      </m:f>
+                      <m:r>
+                        <a:rPr lang="en-US" altLang="zh-TW" sz="2000" b="0" i="1" smtClean="0">
+                          <a:latin typeface="Cambria Math" panose="02040503050406030204" pitchFamily="18" charset="0"/>
+                        </a:rPr>
+                        <m:t>   </m:t>
+                      </m:r>
+                      <m:r>
+                        <a:rPr lang="en-US" altLang="zh-TW" sz="2000" i="1">
+                          <a:latin typeface="Cambria Math" panose="02040503050406030204" pitchFamily="18" charset="0"/>
+                          <a:ea typeface="Cambria Math" panose="02040503050406030204" pitchFamily="18" charset="0"/>
+                        </a:rPr>
+                        <m:t>⟹</m:t>
+                      </m:r>
+                      <m:r>
+                        <a:rPr lang="en-US" altLang="zh-TW" sz="2000" b="0" i="1" smtClean="0">
+                          <a:latin typeface="Cambria Math" panose="02040503050406030204" pitchFamily="18" charset="0"/>
+                          <a:ea typeface="Cambria Math" panose="02040503050406030204" pitchFamily="18" charset="0"/>
+                        </a:rPr>
+                        <m:t>   </m:t>
+                      </m:r>
+                      <m:sSub>
+                        <m:sSubPr>
+                          <m:ctrlPr>
+                            <a:rPr lang="en-US" altLang="zh-TW" sz="2000" b="0" i="1" smtClean="0">
+                              <a:latin typeface="Cambria Math" panose="02040503050406030204" pitchFamily="18" charset="0"/>
+                              <a:ea typeface="Cambria Math" panose="02040503050406030204" pitchFamily="18" charset="0"/>
+                            </a:rPr>
+                          </m:ctrlPr>
+                        </m:sSubPr>
+                        <m:e>
+                          <m:r>
+                            <a:rPr lang="en-US" altLang="zh-TW" sz="2000" b="0" i="1" smtClean="0">
+                              <a:latin typeface="Cambria Math" panose="02040503050406030204" pitchFamily="18" charset="0"/>
+                              <a:ea typeface="Cambria Math" panose="02040503050406030204" pitchFamily="18" charset="0"/>
+                            </a:rPr>
+                            <m:t>𝑥</m:t>
+                          </m:r>
+                        </m:e>
+                        <m:sub>
+                          <m:r>
+                            <a:rPr lang="en-US" altLang="zh-TW" sz="2000" b="0" i="1" smtClean="0">
+                              <a:latin typeface="Cambria Math" panose="02040503050406030204" pitchFamily="18" charset="0"/>
+                              <a:ea typeface="Cambria Math" panose="02040503050406030204" pitchFamily="18" charset="0"/>
+                            </a:rPr>
+                            <m:t>1</m:t>
+                          </m:r>
+                        </m:sub>
+                      </m:sSub>
+                      <m:r>
+                        <a:rPr lang="en-US" altLang="zh-TW" sz="2000" b="0" i="1" smtClean="0">
+                          <a:latin typeface="Cambria Math" panose="02040503050406030204" pitchFamily="18" charset="0"/>
+                          <a:ea typeface="Cambria Math" panose="02040503050406030204" pitchFamily="18" charset="0"/>
+                        </a:rPr>
+                        <m:t>=</m:t>
+                      </m:r>
+                      <m:f>
+                        <m:fPr>
+                          <m:ctrlPr>
+                            <a:rPr lang="en-US" altLang="zh-TW" sz="2000" b="0" i="1" smtClean="0">
+                              <a:latin typeface="Cambria Math" panose="02040503050406030204" pitchFamily="18" charset="0"/>
+                              <a:ea typeface="Cambria Math" panose="02040503050406030204" pitchFamily="18" charset="0"/>
+                            </a:rPr>
+                          </m:ctrlPr>
+                        </m:fPr>
+                        <m:num>
+                          <m:sSup>
+                            <m:sSupPr>
+                              <m:ctrlPr>
+                                <a:rPr lang="en-US" altLang="zh-TW" sz="2000" b="0" i="1" smtClean="0">
+                                  <a:latin typeface="Cambria Math" panose="02040503050406030204" pitchFamily="18" charset="0"/>
+                                </a:rPr>
+                              </m:ctrlPr>
+                            </m:sSupPr>
+                            <m:e>
+                              <m:acc>
+                                <m:accPr>
+                                  <m:chr m:val="̅"/>
+                                  <m:ctrlPr>
+                                    <a:rPr lang="en-US" altLang="zh-TW" sz="2000" i="1">
+                                      <a:latin typeface="Cambria Math" panose="02040503050406030204" pitchFamily="18" charset="0"/>
+                                    </a:rPr>
+                                  </m:ctrlPr>
+                                </m:accPr>
+                                <m:e>
+                                  <m:r>
+                                    <a:rPr lang="en-US" altLang="zh-TW" sz="2000" i="1">
+                                      <a:latin typeface="Cambria Math" panose="02040503050406030204" pitchFamily="18" charset="0"/>
+                                    </a:rPr>
+                                    <m:t>𝑦</m:t>
+                                  </m:r>
+                                </m:e>
+                              </m:acc>
+                            </m:e>
+                            <m:sup>
+                              <m:r>
+                                <a:rPr lang="en-US" altLang="zh-TW" sz="2000" b="0" i="1" smtClean="0">
+                                  <a:latin typeface="Cambria Math" panose="02040503050406030204" pitchFamily="18" charset="0"/>
+                                </a:rPr>
+                                <m:t>3</m:t>
+                              </m:r>
+                            </m:sup>
+                          </m:sSup>
+                        </m:num>
+                        <m:den>
+                          <m:sSubSup>
+                            <m:sSubSupPr>
+                              <m:ctrlPr>
+                                <a:rPr lang="en-US" altLang="zh-TW" sz="2000" b="0" i="1" smtClean="0">
+                                  <a:latin typeface="Cambria Math" panose="02040503050406030204" pitchFamily="18" charset="0"/>
+                                  <a:ea typeface="Cambria Math" panose="02040503050406030204" pitchFamily="18" charset="0"/>
+                                </a:rPr>
+                              </m:ctrlPr>
+                            </m:sSubSupPr>
+                            <m:e>
+                              <m:acc>
+                                <m:accPr>
+                                  <m:chr m:val="̅"/>
+                                  <m:ctrlPr>
+                                    <a:rPr lang="en-US" altLang="zh-TW" sz="2000" b="0" i="1" smtClean="0">
+                                      <a:latin typeface="Cambria Math" panose="02040503050406030204" pitchFamily="18" charset="0"/>
+                                      <a:ea typeface="Cambria Math" panose="02040503050406030204" pitchFamily="18" charset="0"/>
+                                    </a:rPr>
+                                  </m:ctrlPr>
+                                </m:accPr>
+                                <m:e>
+                                  <m:r>
+                                    <a:rPr lang="en-US" altLang="zh-TW" sz="2000" b="0" i="1" smtClean="0">
+                                      <a:latin typeface="Cambria Math" panose="02040503050406030204" pitchFamily="18" charset="0"/>
+                                      <a:ea typeface="Cambria Math" panose="02040503050406030204" pitchFamily="18" charset="0"/>
+                                    </a:rPr>
+                                    <m:t>𝑥</m:t>
+                                  </m:r>
+                                </m:e>
+                              </m:acc>
+                            </m:e>
+                            <m:sub>
+                              <m:r>
+                                <a:rPr lang="en-US" altLang="zh-TW" sz="2000" b="0" i="1" smtClean="0">
+                                  <a:latin typeface="Cambria Math" panose="02040503050406030204" pitchFamily="18" charset="0"/>
+                                </a:rPr>
+                                <m:t>2</m:t>
+                              </m:r>
+                            </m:sub>
+                            <m:sup>
+                              <m:r>
+                                <a:rPr lang="en-US" altLang="zh-TW" sz="2000" b="0" i="1" smtClean="0">
+                                  <a:latin typeface="Cambria Math" panose="02040503050406030204" pitchFamily="18" charset="0"/>
+                                </a:rPr>
+                                <m:t>2</m:t>
+                              </m:r>
+                            </m:sup>
+                          </m:sSubSup>
+                        </m:den>
+                      </m:f>
+                    </m:oMath>
+                  </m:oMathPara>
+                </a14:m>
+                <a:endParaRPr lang="en-US" altLang="zh-TW" sz="2000" dirty="0"/>
+              </a:p>
+              <a:p>
+                <a:pPr marL="0" indent="0">
+                  <a:lnSpc>
+                    <a:spcPct val="105000"/>
+                  </a:lnSpc>
+                  <a:spcBef>
+                    <a:spcPts val="1000"/>
+                  </a:spcBef>
+                  <a:buNone/>
+                  <a:defRPr sz="2000">
+                    <a:solidFill>
+                      <a:srgbClr val="000000"/>
+                    </a:solidFill>
+                    <a:latin typeface="Garamond"/>
+                  </a:defRPr>
+                </a:pPr>
+                <a:endParaRPr lang="en-US" altLang="zh-TW" sz="500" dirty="0"/>
+              </a:p>
+              <a:p>
+                <a:pPr>
+                  <a:lnSpc>
+                    <a:spcPct val="105000"/>
+                  </a:lnSpc>
+                  <a:spcBef>
+                    <a:spcPts val="1000"/>
+                  </a:spcBef>
+                  <a:defRPr sz="2000">
+                    <a:solidFill>
+                      <a:srgbClr val="000000"/>
+                    </a:solidFill>
+                    <a:latin typeface="Garamond"/>
+                  </a:defRPr>
+                </a:pPr>
+                <a:r>
+                  <a:rPr lang="en-US" altLang="zh-TW" sz="2400" dirty="0"/>
+                  <a:t>The short run cost function is then:</a:t>
+                </a:r>
+              </a:p>
+              <a:p>
+                <a:pPr marL="0" indent="0">
+                  <a:lnSpc>
+                    <a:spcPct val="105000"/>
+                  </a:lnSpc>
+                  <a:spcBef>
+                    <a:spcPts val="1000"/>
+                  </a:spcBef>
+                  <a:buNone/>
+                  <a:defRPr sz="2000">
+                    <a:solidFill>
+                      <a:srgbClr val="000000"/>
+                    </a:solidFill>
+                    <a:latin typeface="Garamond"/>
+                  </a:defRPr>
+                </a:pPr>
+                <a14:m>
+                  <m:oMathPara xmlns:m="http://schemas.openxmlformats.org/officeDocument/2006/math">
+                    <m:oMathParaPr>
+                      <m:jc m:val="centerGroup"/>
+                    </m:oMathParaPr>
+                    <m:oMath xmlns:m="http://schemas.openxmlformats.org/officeDocument/2006/math">
+                      <m:sSup>
+                        <m:sSupPr>
+                          <m:ctrlPr>
+                            <a:rPr lang="en-US" altLang="zh-TW" sz="2400" b="0" i="1" smtClean="0">
+                              <a:latin typeface="Cambria Math" panose="02040503050406030204" pitchFamily="18" charset="0"/>
+                            </a:rPr>
+                          </m:ctrlPr>
+                        </m:sSupPr>
+                        <m:e>
+                          <m:r>
+                            <a:rPr lang="en-US" altLang="zh-TW" sz="2400" b="0" i="1" smtClean="0">
+                              <a:latin typeface="Cambria Math" panose="02040503050406030204" pitchFamily="18" charset="0"/>
+                            </a:rPr>
+                            <m:t>𝑐</m:t>
+                          </m:r>
+                        </m:e>
+                        <m:sup>
+                          <m:r>
+                            <a:rPr lang="en-US" altLang="zh-TW" sz="2400" b="0" i="1" smtClean="0">
+                              <a:latin typeface="Cambria Math" panose="02040503050406030204" pitchFamily="18" charset="0"/>
+                            </a:rPr>
+                            <m:t>𝑆𝑅</m:t>
+                          </m:r>
+                        </m:sup>
+                      </m:sSup>
+                      <m:r>
+                        <a:rPr lang="en-US" altLang="zh-TW" sz="2400" b="0" i="1" smtClean="0">
+                          <a:latin typeface="Cambria Math" panose="02040503050406030204" pitchFamily="18" charset="0"/>
+                        </a:rPr>
+                        <m:t>(</m:t>
+                      </m:r>
+                      <m:sSub>
+                        <m:sSubPr>
+                          <m:ctrlPr>
+                            <a:rPr lang="en-US" altLang="zh-TW" sz="2400" b="0" i="1" smtClean="0">
+                              <a:latin typeface="Cambria Math" panose="02040503050406030204" pitchFamily="18" charset="0"/>
+                            </a:rPr>
+                          </m:ctrlPr>
+                        </m:sSubPr>
+                        <m:e>
+                          <m:r>
+                            <a:rPr lang="en-US" altLang="zh-TW" sz="2400" b="0" i="1" smtClean="0">
+                              <a:latin typeface="Cambria Math" panose="02040503050406030204" pitchFamily="18" charset="0"/>
+                            </a:rPr>
+                            <m:t>𝜔</m:t>
+                          </m:r>
+                        </m:e>
+                        <m:sub>
+                          <m:r>
+                            <a:rPr lang="en-US" altLang="zh-TW" sz="2400" b="0" i="1" smtClean="0">
+                              <a:latin typeface="Cambria Math" panose="02040503050406030204" pitchFamily="18" charset="0"/>
+                            </a:rPr>
+                            <m:t>1</m:t>
+                          </m:r>
+                        </m:sub>
+                      </m:sSub>
+                      <m:r>
+                        <a:rPr lang="en-US" altLang="zh-TW" sz="2400" b="0" i="1" smtClean="0">
+                          <a:latin typeface="Cambria Math" panose="02040503050406030204" pitchFamily="18" charset="0"/>
+                        </a:rPr>
+                        <m:t>,</m:t>
+                      </m:r>
+                      <m:sSub>
+                        <m:sSubPr>
+                          <m:ctrlPr>
+                            <a:rPr lang="en-US" altLang="zh-TW" sz="2400" b="0" i="1" smtClean="0">
+                              <a:latin typeface="Cambria Math" panose="02040503050406030204" pitchFamily="18" charset="0"/>
+                            </a:rPr>
+                          </m:ctrlPr>
+                        </m:sSubPr>
+                        <m:e>
+                          <m:r>
+                            <a:rPr lang="en-US" altLang="zh-TW" sz="2400" b="0" i="1" smtClean="0">
+                              <a:latin typeface="Cambria Math" panose="02040503050406030204" pitchFamily="18" charset="0"/>
+                            </a:rPr>
+                            <m:t>𝜔</m:t>
+                          </m:r>
+                        </m:e>
+                        <m:sub>
+                          <m:r>
+                            <a:rPr lang="en-US" altLang="zh-TW" sz="2400" b="0" i="1" smtClean="0">
+                              <a:latin typeface="Cambria Math" panose="02040503050406030204" pitchFamily="18" charset="0"/>
+                            </a:rPr>
+                            <m:t>2</m:t>
+                          </m:r>
+                        </m:sub>
+                      </m:sSub>
+                      <m:r>
+                        <a:rPr lang="en-US" altLang="zh-TW" sz="2400" b="0" i="1" smtClean="0">
+                          <a:latin typeface="Cambria Math" panose="02040503050406030204" pitchFamily="18" charset="0"/>
+                        </a:rPr>
+                        <m:t>,</m:t>
+                      </m:r>
+                      <m:sSub>
+                        <m:sSubPr>
+                          <m:ctrlPr>
+                            <a:rPr lang="en-US" altLang="zh-TW" sz="2400" i="1">
+                              <a:latin typeface="Cambria Math" panose="02040503050406030204" pitchFamily="18" charset="0"/>
+                            </a:rPr>
+                          </m:ctrlPr>
+                        </m:sSubPr>
+                        <m:e>
+                          <m:acc>
+                            <m:accPr>
+                              <m:chr m:val="̅"/>
+                              <m:ctrlPr>
+                                <a:rPr lang="en-US" altLang="zh-TW" sz="2400" i="1">
+                                  <a:latin typeface="Cambria Math" panose="02040503050406030204" pitchFamily="18" charset="0"/>
+                                </a:rPr>
+                              </m:ctrlPr>
+                            </m:accPr>
+                            <m:e>
+                              <m:r>
+                                <a:rPr lang="en-US" altLang="zh-TW" sz="2400" i="1">
+                                  <a:latin typeface="Cambria Math" panose="02040503050406030204" pitchFamily="18" charset="0"/>
+                                </a:rPr>
+                                <m:t>𝑥</m:t>
+                              </m:r>
+                            </m:e>
+                          </m:acc>
+                        </m:e>
+                        <m:sub>
+                          <m:r>
+                            <a:rPr lang="en-US" altLang="zh-TW" sz="2400" i="1">
+                              <a:latin typeface="Cambria Math" panose="02040503050406030204" pitchFamily="18" charset="0"/>
+                            </a:rPr>
+                            <m:t>2</m:t>
+                          </m:r>
+                        </m:sub>
+                      </m:sSub>
+                      <m:r>
+                        <a:rPr lang="en-US" altLang="zh-TW" sz="2400" b="0" i="1" smtClean="0">
+                          <a:latin typeface="Cambria Math" panose="02040503050406030204" pitchFamily="18" charset="0"/>
+                        </a:rPr>
+                        <m:t>,</m:t>
+                      </m:r>
+                      <m:acc>
+                        <m:accPr>
+                          <m:chr m:val="̅"/>
+                          <m:ctrlPr>
+                            <a:rPr lang="en-US" altLang="zh-TW" sz="2400" i="1">
+                              <a:latin typeface="Cambria Math" panose="02040503050406030204" pitchFamily="18" charset="0"/>
+                            </a:rPr>
+                          </m:ctrlPr>
+                        </m:accPr>
+                        <m:e>
+                          <m:r>
+                            <a:rPr lang="en-US" altLang="zh-TW" sz="2400" i="1">
+                              <a:latin typeface="Cambria Math" panose="02040503050406030204" pitchFamily="18" charset="0"/>
+                            </a:rPr>
+                            <m:t>𝑦</m:t>
+                          </m:r>
+                        </m:e>
+                      </m:acc>
+                      <m:r>
+                        <a:rPr lang="en-US" altLang="zh-TW" sz="2400" b="0" i="1" smtClean="0">
+                          <a:latin typeface="Cambria Math" panose="02040503050406030204" pitchFamily="18" charset="0"/>
+                        </a:rPr>
+                        <m:t>)=</m:t>
+                      </m:r>
+                      <m:sSub>
+                        <m:sSubPr>
+                          <m:ctrlPr>
+                            <a:rPr lang="en-US" altLang="zh-TW" sz="2400" i="1">
+                              <a:latin typeface="Cambria Math" panose="02040503050406030204" pitchFamily="18" charset="0"/>
+                            </a:rPr>
+                          </m:ctrlPr>
+                        </m:sSubPr>
+                        <m:e>
+                          <m:r>
+                            <a:rPr lang="en-US" altLang="zh-TW" sz="2400" i="1">
+                              <a:latin typeface="Cambria Math" panose="02040503050406030204" pitchFamily="18" charset="0"/>
+                            </a:rPr>
+                            <m:t>𝜔</m:t>
+                          </m:r>
+                        </m:e>
+                        <m:sub>
+                          <m:r>
+                            <a:rPr lang="en-US" altLang="zh-TW" sz="2400" i="1">
+                              <a:latin typeface="Cambria Math" panose="02040503050406030204" pitchFamily="18" charset="0"/>
+                            </a:rPr>
+                            <m:t>1</m:t>
+                          </m:r>
+                        </m:sub>
+                      </m:sSub>
+                      <m:f>
+                        <m:fPr>
+                          <m:ctrlPr>
+                            <a:rPr lang="en-US" altLang="zh-TW" sz="2400" i="1">
+                              <a:latin typeface="Cambria Math" panose="02040503050406030204" pitchFamily="18" charset="0"/>
+                              <a:ea typeface="Cambria Math" panose="02040503050406030204" pitchFamily="18" charset="0"/>
+                            </a:rPr>
+                          </m:ctrlPr>
+                        </m:fPr>
+                        <m:num>
+                          <m:sSup>
+                            <m:sSupPr>
+                              <m:ctrlPr>
+                                <a:rPr lang="en-US" altLang="zh-TW" sz="2400" i="1">
+                                  <a:latin typeface="Cambria Math" panose="02040503050406030204" pitchFamily="18" charset="0"/>
+                                </a:rPr>
+                              </m:ctrlPr>
+                            </m:sSupPr>
+                            <m:e>
+                              <m:acc>
+                                <m:accPr>
+                                  <m:chr m:val="̅"/>
+                                  <m:ctrlPr>
+                                    <a:rPr lang="en-US" altLang="zh-TW" sz="2400" i="1">
+                                      <a:latin typeface="Cambria Math" panose="02040503050406030204" pitchFamily="18" charset="0"/>
+                                    </a:rPr>
+                                  </m:ctrlPr>
+                                </m:accPr>
+                                <m:e>
+                                  <m:r>
+                                    <a:rPr lang="en-US" altLang="zh-TW" sz="2400" i="1">
+                                      <a:latin typeface="Cambria Math" panose="02040503050406030204" pitchFamily="18" charset="0"/>
+                                    </a:rPr>
+                                    <m:t>𝑦</m:t>
+                                  </m:r>
+                                </m:e>
+                              </m:acc>
+                            </m:e>
+                            <m:sup>
+                              <m:r>
+                                <a:rPr lang="en-US" altLang="zh-TW" sz="2400" i="1">
+                                  <a:latin typeface="Cambria Math" panose="02040503050406030204" pitchFamily="18" charset="0"/>
+                                </a:rPr>
+                                <m:t>3</m:t>
+                              </m:r>
+                            </m:sup>
+                          </m:sSup>
+                        </m:num>
+                        <m:den>
+                          <m:sSubSup>
+                            <m:sSubSupPr>
+                              <m:ctrlPr>
+                                <a:rPr lang="en-US" altLang="zh-TW" sz="2400" i="1">
+                                  <a:latin typeface="Cambria Math" panose="02040503050406030204" pitchFamily="18" charset="0"/>
+                                  <a:ea typeface="Cambria Math" panose="02040503050406030204" pitchFamily="18" charset="0"/>
+                                </a:rPr>
+                              </m:ctrlPr>
+                            </m:sSubSupPr>
+                            <m:e>
+                              <m:acc>
+                                <m:accPr>
+                                  <m:chr m:val="̅"/>
+                                  <m:ctrlPr>
+                                    <a:rPr lang="en-US" altLang="zh-TW" sz="2400" i="1">
+                                      <a:latin typeface="Cambria Math" panose="02040503050406030204" pitchFamily="18" charset="0"/>
+                                      <a:ea typeface="Cambria Math" panose="02040503050406030204" pitchFamily="18" charset="0"/>
+                                    </a:rPr>
+                                  </m:ctrlPr>
+                                </m:accPr>
+                                <m:e>
+                                  <m:r>
+                                    <a:rPr lang="en-US" altLang="zh-TW" sz="2400" i="1">
+                                      <a:latin typeface="Cambria Math" panose="02040503050406030204" pitchFamily="18" charset="0"/>
+                                      <a:ea typeface="Cambria Math" panose="02040503050406030204" pitchFamily="18" charset="0"/>
+                                    </a:rPr>
+                                    <m:t>𝑥</m:t>
+                                  </m:r>
+                                </m:e>
+                              </m:acc>
+                            </m:e>
+                            <m:sub>
+                              <m:r>
+                                <a:rPr lang="en-US" altLang="zh-TW" sz="2400" i="1">
+                                  <a:latin typeface="Cambria Math" panose="02040503050406030204" pitchFamily="18" charset="0"/>
+                                </a:rPr>
+                                <m:t>2</m:t>
+                              </m:r>
+                            </m:sub>
+                            <m:sup>
+                              <m:r>
+                                <a:rPr lang="en-US" altLang="zh-TW" sz="2400" i="1">
+                                  <a:latin typeface="Cambria Math" panose="02040503050406030204" pitchFamily="18" charset="0"/>
+                                </a:rPr>
+                                <m:t>2</m:t>
+                              </m:r>
+                            </m:sup>
+                          </m:sSubSup>
+                        </m:den>
+                      </m:f>
+                      <m:r>
+                        <a:rPr lang="en-US" altLang="zh-TW" sz="2400" i="1">
+                          <a:latin typeface="Cambria Math" panose="02040503050406030204" pitchFamily="18" charset="0"/>
+                        </a:rPr>
+                        <m:t>+</m:t>
+                      </m:r>
+                      <m:sSub>
+                        <m:sSubPr>
+                          <m:ctrlPr>
+                            <a:rPr lang="en-US" altLang="zh-TW" sz="2400" i="1">
+                              <a:latin typeface="Cambria Math" panose="02040503050406030204" pitchFamily="18" charset="0"/>
+                            </a:rPr>
+                          </m:ctrlPr>
+                        </m:sSubPr>
+                        <m:e>
+                          <m:r>
+                            <a:rPr lang="en-US" altLang="zh-TW" sz="2400" i="1">
+                              <a:latin typeface="Cambria Math" panose="02040503050406030204" pitchFamily="18" charset="0"/>
+                            </a:rPr>
+                            <m:t>𝜔</m:t>
+                          </m:r>
+                        </m:e>
+                        <m:sub>
+                          <m:r>
+                            <a:rPr lang="en-US" altLang="zh-TW" sz="2400" i="1">
+                              <a:latin typeface="Cambria Math" panose="02040503050406030204" pitchFamily="18" charset="0"/>
+                            </a:rPr>
+                            <m:t>2</m:t>
+                          </m:r>
+                        </m:sub>
+                      </m:sSub>
+                      <m:sSub>
+                        <m:sSubPr>
+                          <m:ctrlPr>
+                            <a:rPr lang="en-US" altLang="zh-TW" sz="2400" i="1">
+                              <a:latin typeface="Cambria Math" panose="02040503050406030204" pitchFamily="18" charset="0"/>
+                            </a:rPr>
+                          </m:ctrlPr>
+                        </m:sSubPr>
+                        <m:e>
+                          <m:acc>
+                            <m:accPr>
+                              <m:chr m:val="̅"/>
+                              <m:ctrlPr>
+                                <a:rPr lang="en-US" altLang="zh-TW" sz="2400" i="1">
+                                  <a:latin typeface="Cambria Math" panose="02040503050406030204" pitchFamily="18" charset="0"/>
+                                </a:rPr>
+                              </m:ctrlPr>
+                            </m:accPr>
+                            <m:e>
+                              <m:r>
+                                <a:rPr lang="en-US" altLang="zh-TW" sz="2400" i="1">
+                                  <a:latin typeface="Cambria Math" panose="02040503050406030204" pitchFamily="18" charset="0"/>
+                                </a:rPr>
+                                <m:t>𝑥</m:t>
+                              </m:r>
+                            </m:e>
+                          </m:acc>
+                        </m:e>
+                        <m:sub>
+                          <m:r>
+                            <a:rPr lang="en-US" altLang="zh-TW" sz="2400" i="1">
+                              <a:latin typeface="Cambria Math" panose="02040503050406030204" pitchFamily="18" charset="0"/>
+                            </a:rPr>
+                            <m:t>2</m:t>
+                          </m:r>
+                        </m:sub>
+                      </m:sSub>
+                    </m:oMath>
+                  </m:oMathPara>
+                </a14:m>
+                <a:endParaRPr lang="en-US" altLang="zh-TW" sz="2400" dirty="0"/>
+              </a:p>
+              <a:p>
+                <a:pPr marL="0" indent="0">
+                  <a:lnSpc>
+                    <a:spcPct val="105000"/>
+                  </a:lnSpc>
+                  <a:spcBef>
+                    <a:spcPts val="1000"/>
+                  </a:spcBef>
+                  <a:buNone/>
+                  <a:defRPr sz="2000">
+                    <a:solidFill>
+                      <a:srgbClr val="000000"/>
+                    </a:solidFill>
+                    <a:latin typeface="Garamond"/>
+                  </a:defRPr>
+                </a:pPr>
+                <a:endParaRPr lang="en-US" altLang="zh-TW" sz="2000" dirty="0"/>
+              </a:p>
+            </p:txBody>
+          </p:sp>
+        </mc:Choice>
+        <mc:Fallback>
+          <p:sp>
+            <p:nvSpPr>
+              <p:cNvPr id="3" name="Content Placeholder 2">
+                <a:extLst>
+                  <a:ext uri="{FF2B5EF4-FFF2-40B4-BE49-F238E27FC236}">
+                    <a16:creationId xmlns:a16="http://schemas.microsoft.com/office/drawing/2014/main" id="{064B63EA-ABC2-71CF-426D-ED35E4027CEE}"/>
+                  </a:ext>
+                </a:extLst>
+              </p:cNvPr>
+              <p:cNvSpPr>
+                <a:spLocks noGrp="1" noRot="1" noChangeAspect="1" noMove="1" noResize="1" noEditPoints="1" noAdjustHandles="1" noChangeArrowheads="1" noChangeShapeType="1" noTextEdit="1"/>
+              </p:cNvSpPr>
+              <p:nvPr>
+                <p:ph idx="1"/>
+              </p:nvPr>
+            </p:nvSpPr>
+            <p:spPr>
+              <a:xfrm>
+                <a:off x="457199" y="1300900"/>
+                <a:ext cx="11353801" cy="5063324"/>
+              </a:xfrm>
+              <a:blipFill>
+                <a:blip r:embed="rId2"/>
+                <a:stretch>
+                  <a:fillRect l="-698" t="-842"/>
+                </a:stretch>
+              </a:blipFill>
+            </p:spPr>
+            <p:txBody>
+              <a:bodyPr/>
+              <a:lstStyle/>
+              <a:p>
+                <a:r>
+                  <a:rPr lang="en-US">
+                    <a:noFill/>
+                  </a:rPr>
+                  <a:t> </a:t>
+                </a:r>
+              </a:p>
+            </p:txBody>
+          </p:sp>
+        </mc:Fallback>
+      </mc:AlternateContent>
+      <p:sp>
+        <p:nvSpPr>
+          <p:cNvPr id="4" name="Rectangle 3">
+            <a:extLst>
+              <a:ext uri="{FF2B5EF4-FFF2-40B4-BE49-F238E27FC236}">
+                <a16:creationId xmlns:a16="http://schemas.microsoft.com/office/drawing/2014/main" id="{996D708C-6F2E-4DE0-2065-A7A270206FD9}"/>
+              </a:ext>
+            </a:extLst>
+          </p:cNvPr>
+          <p:cNvSpPr/>
+          <p:nvPr/>
+        </p:nvSpPr>
+        <p:spPr>
+          <a:xfrm>
+            <a:off x="0" y="0"/>
+            <a:ext cx="12188825" cy="923636"/>
+          </a:xfrm>
+          <a:prstGeom prst="rect">
+            <a:avLst/>
+          </a:prstGeom>
+          <a:solidFill>
+            <a:srgbClr val="77122C"/>
+          </a:solidFill>
+        </p:spPr>
+        <p:style>
+          <a:lnRef idx="1">
+            <a:schemeClr val="accent1"/>
+          </a:lnRef>
+          <a:fillRef idx="3">
+            <a:schemeClr val="accent1"/>
+          </a:fillRef>
+          <a:effectRef idx="2">
+            <a:schemeClr val="accent1"/>
+          </a:effectRef>
+          <a:fontRef idx="minor">
+            <a:schemeClr val="lt1"/>
+          </a:fontRef>
+        </p:style>
+        <p:txBody>
+          <a:bodyPr rtlCol="0" anchor="ctr"/>
+          <a:lstStyle/>
+          <a:p>
+            <a:pPr algn="ctr"/>
+            <a:endParaRPr lang="en-US"/>
+          </a:p>
+        </p:txBody>
+      </p:sp>
+      <p:sp>
+        <p:nvSpPr>
+          <p:cNvPr id="2" name="Title 1">
+            <a:extLst>
+              <a:ext uri="{FF2B5EF4-FFF2-40B4-BE49-F238E27FC236}">
+                <a16:creationId xmlns:a16="http://schemas.microsoft.com/office/drawing/2014/main" id="{E2043084-D840-09F7-BA35-277C7B51C318}"/>
+              </a:ext>
+            </a:extLst>
+          </p:cNvPr>
+          <p:cNvSpPr>
+            <a:spLocks noGrp="1"/>
+          </p:cNvSpPr>
+          <p:nvPr>
+            <p:ph type="title"/>
+          </p:nvPr>
+        </p:nvSpPr>
+        <p:spPr>
+          <a:xfrm>
+            <a:off x="0" y="0"/>
+            <a:ext cx="12188825" cy="923636"/>
+          </a:xfrm>
+        </p:spPr>
+        <p:txBody>
+          <a:bodyPr>
+            <a:normAutofit/>
+          </a:bodyPr>
+          <a:lstStyle/>
+          <a:p>
+            <a:pPr algn="l">
+              <a:defRPr sz="4000" b="1">
+                <a:solidFill>
+                  <a:srgbClr val="FDB913"/>
+                </a:solidFill>
+                <a:latin typeface="Garamond"/>
+              </a:defRPr>
+            </a:pPr>
+            <a:r>
+              <a:rPr lang="en-US" sz="4000" dirty="0">
+                <a:solidFill>
+                  <a:schemeClr val="bg1"/>
+                </a:solidFill>
+              </a:rPr>
+              <a:t>  Numerical Example: Short Run Cost Minimization</a:t>
+            </a:r>
+          </a:p>
+        </p:txBody>
+      </p:sp>
+      <p:sp>
+        <p:nvSpPr>
+          <p:cNvPr id="5" name="Rectangle 4">
+            <a:extLst>
+              <a:ext uri="{FF2B5EF4-FFF2-40B4-BE49-F238E27FC236}">
+                <a16:creationId xmlns:a16="http://schemas.microsoft.com/office/drawing/2014/main" id="{D72721D6-D90E-8CCE-2354-30B91C61A20A}"/>
+              </a:ext>
+            </a:extLst>
+          </p:cNvPr>
+          <p:cNvSpPr/>
+          <p:nvPr/>
+        </p:nvSpPr>
+        <p:spPr>
+          <a:xfrm>
+            <a:off x="-1" y="6503428"/>
+            <a:ext cx="12188825" cy="354572"/>
+          </a:xfrm>
+          <a:prstGeom prst="rect">
+            <a:avLst/>
+          </a:prstGeom>
+          <a:solidFill>
+            <a:srgbClr val="77122C"/>
+          </a:solidFill>
+        </p:spPr>
+        <p:style>
+          <a:lnRef idx="1">
+            <a:schemeClr val="accent1"/>
+          </a:lnRef>
+          <a:fillRef idx="3">
+            <a:schemeClr val="accent1"/>
+          </a:fillRef>
+          <a:effectRef idx="2">
+            <a:schemeClr val="accent1"/>
+          </a:effectRef>
+          <a:fontRef idx="minor">
+            <a:schemeClr val="lt1"/>
+          </a:fontRef>
+        </p:style>
+        <p:txBody>
+          <a:bodyPr rtlCol="0" anchor="ctr"/>
+          <a:lstStyle/>
+          <a:p>
+            <a:pPr algn="ctr"/>
+            <a:endParaRPr lang="en-US"/>
+          </a:p>
+        </p:txBody>
+      </p:sp>
+      <p:sp>
+        <p:nvSpPr>
+          <p:cNvPr id="6" name="Footer Placeholder 5">
+            <a:extLst>
+              <a:ext uri="{FF2B5EF4-FFF2-40B4-BE49-F238E27FC236}">
+                <a16:creationId xmlns:a16="http://schemas.microsoft.com/office/drawing/2014/main" id="{99559883-D12E-C90D-E4F5-3B45BA230C79}"/>
+              </a:ext>
+            </a:extLst>
+          </p:cNvPr>
+          <p:cNvSpPr>
+            <a:spLocks noGrp="1"/>
+          </p:cNvSpPr>
+          <p:nvPr>
+            <p:ph type="ftr" sz="quarter" idx="11"/>
+          </p:nvPr>
+        </p:nvSpPr>
+        <p:spPr>
+          <a:xfrm>
+            <a:off x="-1" y="6503428"/>
+            <a:ext cx="2895600" cy="354572"/>
+          </a:xfrm>
+        </p:spPr>
+        <p:txBody>
+          <a:bodyPr/>
+          <a:lstStyle/>
+          <a:p>
+            <a:pPr algn="l"/>
+            <a:r>
+              <a:rPr lang="en-US">
+                <a:solidFill>
+                  <a:schemeClr val="bg1"/>
+                </a:solidFill>
+                <a:latin typeface="Garamond" panose="02020404030301010803" pitchFamily="18" charset="0"/>
+              </a:rPr>
+              <a:t> Intermediate Microeconomic Theory</a:t>
+            </a:r>
+            <a:endParaRPr lang="en-US" dirty="0">
+              <a:solidFill>
+                <a:schemeClr val="bg1"/>
+              </a:solidFill>
+              <a:latin typeface="Garamond" panose="02020404030301010803" pitchFamily="18" charset="0"/>
+            </a:endParaRPr>
+          </a:p>
+        </p:txBody>
+      </p:sp>
+      <p:sp>
+        <p:nvSpPr>
+          <p:cNvPr id="7" name="Slide Number Placeholder 6">
+            <a:extLst>
+              <a:ext uri="{FF2B5EF4-FFF2-40B4-BE49-F238E27FC236}">
+                <a16:creationId xmlns:a16="http://schemas.microsoft.com/office/drawing/2014/main" id="{39D56372-353E-571F-95CD-2F2B09C5B77B}"/>
+              </a:ext>
+            </a:extLst>
+          </p:cNvPr>
+          <p:cNvSpPr>
+            <a:spLocks noGrp="1"/>
+          </p:cNvSpPr>
+          <p:nvPr>
+            <p:ph type="sldNum" sz="quarter" idx="12"/>
+          </p:nvPr>
+        </p:nvSpPr>
+        <p:spPr>
+          <a:xfrm>
+            <a:off x="10055225" y="6503428"/>
+            <a:ext cx="2133600" cy="354572"/>
+          </a:xfrm>
+        </p:spPr>
+        <p:txBody>
+          <a:bodyPr/>
+          <a:lstStyle/>
+          <a:p>
+            <a:fld id="{C1FF6DA9-008F-8B48-92A6-B652298478BF}" type="slidenum">
+              <a:rPr lang="en-US" b="1" smtClean="0">
+                <a:solidFill>
+                  <a:schemeClr val="bg1"/>
+                </a:solidFill>
+                <a:latin typeface="Garamond" panose="02020404030301010803" pitchFamily="18" charset="0"/>
+              </a:rPr>
+              <a:t>23</a:t>
+            </a:fld>
+            <a:r>
+              <a:rPr lang="en-US" b="1" dirty="0">
+                <a:solidFill>
+                  <a:schemeClr val="bg1"/>
+                </a:solidFill>
+                <a:latin typeface="Garamond" panose="02020404030301010803" pitchFamily="18" charset="0"/>
+              </a:rPr>
+              <a:t> </a:t>
+            </a:r>
+          </a:p>
+        </p:txBody>
+      </p:sp>
+    </p:spTree>
+    <p:extLst>
+      <p:ext uri="{BB962C8B-B14F-4D97-AF65-F5344CB8AC3E}">
+        <p14:creationId xmlns:p14="http://schemas.microsoft.com/office/powerpoint/2010/main" val="3909911093"/>
+      </p:ext>
+    </p:extLst>
+  </p:cSld>
+  <p:clrMapOvr>
+    <a:masterClrMapping/>
+  </p:clrMapOvr>
+  <p:timing>
+    <p:tnLst>
+      <p:par>
+        <p:cTn id="1" dur="indefinite" restart="never" nodeType="tmRoot">
+          <p:childTnLst>
+            <p:seq concurrent="1" nextAc="seek">
+              <p:cTn id="2" dur="indefinite" nodeType="mainSeq">
+                <p:childTnLst>
+                  <p:par>
+                    <p:cTn id="3" fill="hold">
+                      <p:stCondLst>
+                        <p:cond delay="indefinite"/>
+                        <p:cond evt="onBegin" delay="0">
+                          <p:tn val="2"/>
+                        </p:cond>
+                      </p:stCondLst>
+                      <p:childTnLst>
+                        <p:par>
+                          <p:cTn id="4" fill="hold">
+                            <p:stCondLst>
+                              <p:cond delay="0"/>
+                            </p:stCondLst>
+                            <p:childTnLst>
+                              <p:par>
+                                <p:cTn id="5" presetID="10" presetClass="entr" presetSubtype="0" fill="hold" nodeType="withEffect">
+                                  <p:stCondLst>
+                                    <p:cond delay="0"/>
+                                  </p:stCondLst>
+                                  <p:childTnLst>
+                                    <p:set>
+                                      <p:cBhvr>
+                                        <p:cTn id="6" dur="1" fill="hold">
+                                          <p:stCondLst>
+                                            <p:cond delay="0"/>
+                                          </p:stCondLst>
+                                        </p:cTn>
+                                        <p:tgtEl>
+                                          <p:spTgt spid="3">
+                                            <p:txEl>
+                                              <p:pRg st="0" end="0"/>
+                                            </p:txEl>
+                                          </p:spTgt>
+                                        </p:tgtEl>
+                                        <p:attrNameLst>
+                                          <p:attrName>style.visibility</p:attrName>
+                                        </p:attrNameLst>
+                                      </p:cBhvr>
+                                      <p:to>
+                                        <p:strVal val="visible"/>
+                                      </p:to>
+                                    </p:set>
+                                    <p:animEffect transition="in" filter="fade">
+                                      <p:cBhvr>
+                                        <p:cTn id="7" dur="500"/>
+                                        <p:tgtEl>
+                                          <p:spTgt spid="3">
+                                            <p:txEl>
+                                              <p:pRg st="0" end="0"/>
+                                            </p:txEl>
+                                          </p:spTgt>
+                                        </p:tgtEl>
+                                      </p:cBhvr>
+                                    </p:animEffect>
+                                  </p:childTnLst>
+                                </p:cTn>
+                              </p:par>
+                              <p:par>
+                                <p:cTn id="8" presetID="10" presetClass="entr" presetSubtype="0" fill="hold" nodeType="withEffect">
+                                  <p:stCondLst>
+                                    <p:cond delay="0"/>
+                                  </p:stCondLst>
+                                  <p:childTnLst>
+                                    <p:set>
+                                      <p:cBhvr>
+                                        <p:cTn id="9" dur="1" fill="hold">
+                                          <p:stCondLst>
+                                            <p:cond delay="0"/>
+                                          </p:stCondLst>
+                                        </p:cTn>
+                                        <p:tgtEl>
+                                          <p:spTgt spid="3">
+                                            <p:txEl>
+                                              <p:pRg st="1" end="1"/>
+                                            </p:txEl>
+                                          </p:spTgt>
+                                        </p:tgtEl>
+                                        <p:attrNameLst>
+                                          <p:attrName>style.visibility</p:attrName>
+                                        </p:attrNameLst>
+                                      </p:cBhvr>
+                                      <p:to>
+                                        <p:strVal val="visible"/>
+                                      </p:to>
+                                    </p:set>
+                                    <p:animEffect transition="in" filter="fade">
+                                      <p:cBhvr>
+                                        <p:cTn id="10" dur="500"/>
+                                        <p:tgtEl>
+                                          <p:spTgt spid="3">
+                                            <p:txEl>
+                                              <p:pRg st="1" end="1"/>
+                                            </p:txEl>
+                                          </p:spTgt>
+                                        </p:tgtEl>
+                                      </p:cBhvr>
+                                    </p:animEffect>
+                                  </p:childTnLst>
+                                </p:cTn>
+                              </p:par>
+                            </p:childTnLst>
+                          </p:cTn>
+                        </p:par>
+                      </p:childTnLst>
+                    </p:cTn>
+                  </p:par>
+                  <p:par>
+                    <p:cTn id="11" fill="hold">
+                      <p:stCondLst>
+                        <p:cond delay="indefinite"/>
+                      </p:stCondLst>
+                      <p:childTnLst>
+                        <p:par>
+                          <p:cTn id="12" fill="hold">
+                            <p:stCondLst>
+                              <p:cond delay="0"/>
+                            </p:stCondLst>
+                            <p:childTnLst>
+                              <p:par>
+                                <p:cTn id="13" presetID="10" presetClass="entr" presetSubtype="0" fill="hold" nodeType="clickEffect">
+                                  <p:stCondLst>
+                                    <p:cond delay="0"/>
+                                  </p:stCondLst>
+                                  <p:childTnLst>
+                                    <p:set>
+                                      <p:cBhvr>
+                                        <p:cTn id="14" dur="1" fill="hold">
+                                          <p:stCondLst>
+                                            <p:cond delay="0"/>
+                                          </p:stCondLst>
+                                        </p:cTn>
+                                        <p:tgtEl>
+                                          <p:spTgt spid="3">
+                                            <p:txEl>
+                                              <p:pRg st="3" end="3"/>
+                                            </p:txEl>
+                                          </p:spTgt>
+                                        </p:tgtEl>
+                                        <p:attrNameLst>
+                                          <p:attrName>style.visibility</p:attrName>
+                                        </p:attrNameLst>
+                                      </p:cBhvr>
+                                      <p:to>
+                                        <p:strVal val="visible"/>
+                                      </p:to>
+                                    </p:set>
+                                    <p:animEffect transition="in" filter="fade">
+                                      <p:cBhvr>
+                                        <p:cTn id="15" dur="500"/>
+                                        <p:tgtEl>
+                                          <p:spTgt spid="3">
+                                            <p:txEl>
+                                              <p:pRg st="3" end="3"/>
+                                            </p:txEl>
+                                          </p:spTgt>
+                                        </p:tgtEl>
+                                      </p:cBhvr>
+                                    </p:animEffect>
+                                  </p:childTnLst>
+                                </p:cTn>
+                              </p:par>
+                              <p:par>
+                                <p:cTn id="16" presetID="10" presetClass="entr" presetSubtype="0" fill="hold" nodeType="withEffect">
+                                  <p:stCondLst>
+                                    <p:cond delay="0"/>
+                                  </p:stCondLst>
+                                  <p:childTnLst>
+                                    <p:set>
+                                      <p:cBhvr>
+                                        <p:cTn id="17" dur="1" fill="hold">
+                                          <p:stCondLst>
+                                            <p:cond delay="0"/>
+                                          </p:stCondLst>
+                                        </p:cTn>
+                                        <p:tgtEl>
+                                          <p:spTgt spid="3">
+                                            <p:txEl>
+                                              <p:pRg st="5" end="5"/>
+                                            </p:txEl>
+                                          </p:spTgt>
+                                        </p:tgtEl>
+                                        <p:attrNameLst>
+                                          <p:attrName>style.visibility</p:attrName>
+                                        </p:attrNameLst>
+                                      </p:cBhvr>
+                                      <p:to>
+                                        <p:strVal val="visible"/>
+                                      </p:to>
+                                    </p:set>
+                                    <p:animEffect transition="in" filter="fade">
+                                      <p:cBhvr>
+                                        <p:cTn id="18" dur="500"/>
+                                        <p:tgtEl>
+                                          <p:spTgt spid="3">
+                                            <p:txEl>
+                                              <p:pRg st="5" end="5"/>
+                                            </p:txEl>
+                                          </p:spTgt>
+                                        </p:tgtEl>
+                                      </p:cBhvr>
+                                    </p:animEffect>
+                                  </p:childTnLst>
+                                </p:cTn>
+                              </p:par>
+                            </p:childTnLst>
+                          </p:cTn>
+                        </p:par>
+                      </p:childTnLst>
+                    </p:cTn>
+                  </p:par>
+                  <p:par>
+                    <p:cTn id="19" fill="hold">
+                      <p:stCondLst>
+                        <p:cond delay="indefinite"/>
+                      </p:stCondLst>
+                      <p:childTnLst>
+                        <p:par>
+                          <p:cTn id="20" fill="hold">
+                            <p:stCondLst>
+                              <p:cond delay="0"/>
+                            </p:stCondLst>
+                            <p:childTnLst>
+                              <p:par>
+                                <p:cTn id="21" presetID="10" presetClass="entr" presetSubtype="0" fill="hold" nodeType="clickEffect">
+                                  <p:stCondLst>
+                                    <p:cond delay="0"/>
+                                  </p:stCondLst>
+                                  <p:childTnLst>
+                                    <p:set>
+                                      <p:cBhvr>
+                                        <p:cTn id="22" dur="1" fill="hold">
+                                          <p:stCondLst>
+                                            <p:cond delay="0"/>
+                                          </p:stCondLst>
+                                        </p:cTn>
+                                        <p:tgtEl>
+                                          <p:spTgt spid="3">
+                                            <p:txEl>
+                                              <p:pRg st="7" end="7"/>
+                                            </p:txEl>
+                                          </p:spTgt>
+                                        </p:tgtEl>
+                                        <p:attrNameLst>
+                                          <p:attrName>style.visibility</p:attrName>
+                                        </p:attrNameLst>
+                                      </p:cBhvr>
+                                      <p:to>
+                                        <p:strVal val="visible"/>
+                                      </p:to>
+                                    </p:set>
+                                    <p:animEffect transition="in" filter="fade">
+                                      <p:cBhvr>
+                                        <p:cTn id="23" dur="500"/>
+                                        <p:tgtEl>
+                                          <p:spTgt spid="3">
+                                            <p:txEl>
+                                              <p:pRg st="7" end="7"/>
+                                            </p:txEl>
+                                          </p:spTgt>
+                                        </p:tgtEl>
+                                      </p:cBhvr>
+                                    </p:animEffect>
+                                  </p:childTnLst>
+                                </p:cTn>
+                              </p:par>
+                              <p:par>
+                                <p:cTn id="24" presetID="10" presetClass="entr" presetSubtype="0" fill="hold" nodeType="withEffect">
+                                  <p:stCondLst>
+                                    <p:cond delay="0"/>
+                                  </p:stCondLst>
+                                  <p:childTnLst>
+                                    <p:set>
+                                      <p:cBhvr>
+                                        <p:cTn id="25" dur="1" fill="hold">
+                                          <p:stCondLst>
+                                            <p:cond delay="0"/>
+                                          </p:stCondLst>
+                                        </p:cTn>
+                                        <p:tgtEl>
+                                          <p:spTgt spid="3">
+                                            <p:txEl>
+                                              <p:pRg st="8" end="8"/>
+                                            </p:txEl>
+                                          </p:spTgt>
+                                        </p:tgtEl>
+                                        <p:attrNameLst>
+                                          <p:attrName>style.visibility</p:attrName>
+                                        </p:attrNameLst>
+                                      </p:cBhvr>
+                                      <p:to>
+                                        <p:strVal val="visible"/>
+                                      </p:to>
+                                    </p:set>
+                                    <p:animEffect transition="in" filter="fade">
+                                      <p:cBhvr>
+                                        <p:cTn id="26" dur="500"/>
+                                        <p:tgtEl>
+                                          <p:spTgt spid="3">
+                                            <p:txEl>
+                                              <p:pRg st="8" end="8"/>
+                                            </p:txEl>
+                                          </p:spTgt>
+                                        </p:tgtEl>
+                                      </p:cBhvr>
+                                    </p:animEffect>
+                                  </p:childTnLst>
+                                </p:cTn>
+                              </p:par>
+                            </p:childTnLst>
+                          </p:cTn>
+                        </p:par>
+                      </p:childTnLst>
+                    </p:cTn>
+                  </p:par>
+                </p:childTnLst>
+              </p:cTn>
+              <p:prevCondLst>
+                <p:cond evt="onPrev" delay="0">
+                  <p:tgtEl>
+                    <p:sldTgt/>
+                  </p:tgtEl>
+                </p:cond>
+              </p:prevCondLst>
+              <p:nextCondLst>
+                <p:cond evt="onNext" delay="0">
+                  <p:tgtEl>
+                    <p:sldTgt/>
+                  </p:tgtEl>
+                </p:cond>
+              </p:nextCondLst>
+            </p:seq>
+          </p:childTnLst>
+        </p:cTn>
+      </p:par>
+    </p:tnLst>
+  </p:timing>
+</p:sld>
+</file>
+
+<file path=ppt/slides/slide24.xml><?xml version="1.0" encoding="utf-8"?>
+<p:sld xmlns:a="http://schemas.openxmlformats.org/drawingml/2006/main" xmlns:r="http://schemas.openxmlformats.org/officeDocument/2006/relationships" xmlns:p="http://schemas.openxmlformats.org/presentationml/2006/main">
+  <p:cSld>
     <p:bg>
       <p:bgPr>
         <a:solidFill>
@@ -24815,7 +26896,7 @@
 </p:sld>
 </file>
 
-<file path=ppt/slides/slide24.xml><?xml version="1.0" encoding="utf-8"?>
+<file path=ppt/slides/slide25.xml><?xml version="1.0" encoding="utf-8"?>
 <p:sld xmlns:a="http://schemas.openxmlformats.org/drawingml/2006/main" xmlns:r="http://schemas.openxmlformats.org/officeDocument/2006/relationships" xmlns:p="http://schemas.openxmlformats.org/presentationml/2006/main">
   <p:cSld>
     <p:spTree>
@@ -24838,8 +26919,8 @@
           <a:chExt cx="0" cy="0"/>
         </a:xfrm>
       </p:grpSpPr>
-      <mc:AlternateContent xmlns:mc="http://schemas.openxmlformats.org/markup-compatibility/2006">
-        <mc:Choice xmlns:a14="http://schemas.microsoft.com/office/drawing/2010/main" Requires="a14">
+      <mc:AlternateContent xmlns:mc="http://schemas.openxmlformats.org/markup-compatibility/2006" xmlns:a14="http://schemas.microsoft.com/office/drawing/2010/main">
+        <mc:Choice Requires="a14">
           <p:sp>
             <p:nvSpPr>
               <p:cNvPr id="3" name="Content Placeholder 2">
@@ -25844,7 +27925,7 @@
             </p:txBody>
           </p:sp>
         </mc:Choice>
-        <mc:Fallback>
+        <mc:Fallback xmlns="">
           <p:sp>
             <p:nvSpPr>
               <p:cNvPr id="3" name="Content Placeholder 2">
@@ -26107,7 +28188,7 @@
                 </a:solidFill>
                 <a:latin typeface="Garamond" panose="02020404030301010803" pitchFamily="18" charset="0"/>
               </a:rPr>
-              <a:t>24</a:t>
+              <a:t>25</a:t>
             </a:fld>
             <a:r>
               <a:rPr lang="en-US" b="1" dirty="0">
@@ -26479,7 +28560,7 @@
 </p:sld>
 </file>
 
-<file path=ppt/slides/slide25.xml><?xml version="1.0" encoding="utf-8"?>
+<file path=ppt/slides/slide26.xml><?xml version="1.0" encoding="utf-8"?>
 <p:sld xmlns:a="http://schemas.openxmlformats.org/drawingml/2006/main" xmlns:r="http://schemas.openxmlformats.org/officeDocument/2006/relationships" xmlns:p="http://schemas.openxmlformats.org/presentationml/2006/main">
   <p:cSld>
     <p:spTree>
@@ -26502,8 +28583,8 @@
           <a:chExt cx="0" cy="0"/>
         </a:xfrm>
       </p:grpSpPr>
-      <mc:AlternateContent xmlns:mc="http://schemas.openxmlformats.org/markup-compatibility/2006">
-        <mc:Choice xmlns:a14="http://schemas.microsoft.com/office/drawing/2010/main" Requires="a14">
+      <mc:AlternateContent xmlns:mc="http://schemas.openxmlformats.org/markup-compatibility/2006" xmlns:a14="http://schemas.microsoft.com/office/drawing/2010/main">
+        <mc:Choice Requires="a14">
           <p:sp>
             <p:nvSpPr>
               <p:cNvPr id="3" name="Content Placeholder 2">
@@ -27826,7 +29907,7 @@
             </p:txBody>
           </p:sp>
         </mc:Choice>
-        <mc:Fallback>
+        <mc:Fallback xmlns="">
           <p:sp>
             <p:nvSpPr>
               <p:cNvPr id="3" name="Content Placeholder 2">
@@ -28089,7 +30170,7 @@
                 </a:solidFill>
                 <a:latin typeface="Garamond" panose="02020404030301010803" pitchFamily="18" charset="0"/>
               </a:rPr>
-              <a:t>25</a:t>
+              <a:t>26</a:t>
             </a:fld>
             <a:r>
               <a:rPr lang="en-US" b="1" dirty="0">
@@ -28547,7 +30628,7 @@
 </p:sld>
 </file>
 
-<file path=ppt/slides/slide26.xml><?xml version="1.0" encoding="utf-8"?>
+<file path=ppt/slides/slide27.xml><?xml version="1.0" encoding="utf-8"?>
 <p:sld xmlns:a="http://schemas.openxmlformats.org/drawingml/2006/main" xmlns:r="http://schemas.openxmlformats.org/officeDocument/2006/relationships" xmlns:p="http://schemas.openxmlformats.org/presentationml/2006/main">
   <p:cSld>
     <p:spTree>
@@ -28570,8 +30651,8 @@
           <a:chExt cx="0" cy="0"/>
         </a:xfrm>
       </p:grpSpPr>
-      <mc:AlternateContent xmlns:mc="http://schemas.openxmlformats.org/markup-compatibility/2006">
-        <mc:Choice xmlns:a14="http://schemas.microsoft.com/office/drawing/2010/main" Requires="a14">
+      <mc:AlternateContent xmlns:mc="http://schemas.openxmlformats.org/markup-compatibility/2006" xmlns:a14="http://schemas.microsoft.com/office/drawing/2010/main">
+        <mc:Choice Requires="a14">
           <p:sp>
             <p:nvSpPr>
               <p:cNvPr id="3" name="Content Placeholder 2">
@@ -28969,7 +31050,7 @@
             </p:txBody>
           </p:sp>
         </mc:Choice>
-        <mc:Fallback>
+        <mc:Fallback xmlns="">
           <p:sp>
             <p:nvSpPr>
               <p:cNvPr id="3" name="Content Placeholder 2">
@@ -29232,7 +31313,7 @@
                 </a:solidFill>
                 <a:latin typeface="Garamond" panose="02020404030301010803" pitchFamily="18" charset="0"/>
               </a:rPr>
-              <a:t>26</a:t>
+              <a:t>27</a:t>
             </a:fld>
             <a:r>
               <a:rPr lang="en-US" b="1" dirty="0">
@@ -31286,8 +33367,8 @@
           <a:chExt cx="0" cy="0"/>
         </a:xfrm>
       </p:grpSpPr>
-      <mc:AlternateContent xmlns:mc="http://schemas.openxmlformats.org/markup-compatibility/2006">
-        <mc:Choice xmlns:a14="http://schemas.microsoft.com/office/drawing/2010/main" Requires="a14">
+      <mc:AlternateContent xmlns:mc="http://schemas.openxmlformats.org/markup-compatibility/2006" xmlns:a14="http://schemas.microsoft.com/office/drawing/2010/main">
+        <mc:Choice Requires="a14">
           <p:sp>
             <p:nvSpPr>
               <p:cNvPr id="3" name="Content Placeholder 2">
@@ -32284,7 +34365,7 @@
             </p:txBody>
           </p:sp>
         </mc:Choice>
-        <mc:Fallback>
+        <mc:Fallback xmlns="">
           <p:sp>
             <p:nvSpPr>
               <p:cNvPr id="3" name="Content Placeholder 2">

--- a/files/teaching-resources/concordiacollege-busn-301/busn-301-lecture-note/busn301-ch21.pptx
+++ b/files/teaching-resources/concordiacollege-busn-301/busn-301-lecture-note/busn301-ch21.pptx
@@ -234,7 +234,7 @@
           <a:p>
             <a:fld id="{2D359EC7-19C7-4638-A61A-0E2B59861576}" type="datetimeFigureOut">
               <a:rPr lang="en-US" smtClean="0"/>
-              <a:t>3/18/2026</a:t>
+              <a:t>3/29/2026</a:t>
             </a:fld>
             <a:endParaRPr lang="en-US"/>
           </a:p>
@@ -680,7 +680,7 @@
           <a:p>
             <a:fld id="{7968114D-31B9-4B78-9ACC-70FB90027BFD}" type="datetime1">
               <a:rPr lang="en-US" smtClean="0"/>
-              <a:t>3/18/2026</a:t>
+              <a:t>3/29/2026</a:t>
             </a:fld>
             <a:endParaRPr lang="en-US"/>
           </a:p>
@@ -851,7 +851,7 @@
           <a:p>
             <a:fld id="{873F4A91-75B0-4800-B4E2-20956DB94300}" type="datetime1">
               <a:rPr lang="en-US" smtClean="0"/>
-              <a:t>3/18/2026</a:t>
+              <a:t>3/29/2026</a:t>
             </a:fld>
             <a:endParaRPr lang="en-US"/>
           </a:p>
@@ -1032,7 +1032,7 @@
           <a:p>
             <a:fld id="{0F651350-1A97-42BE-B68B-7AD85E4EDCBF}" type="datetime1">
               <a:rPr lang="en-US" smtClean="0"/>
-              <a:t>3/18/2026</a:t>
+              <a:t>3/29/2026</a:t>
             </a:fld>
             <a:endParaRPr lang="en-US"/>
           </a:p>
@@ -1203,7 +1203,7 @@
           <a:p>
             <a:fld id="{CE41F65B-C187-4F2E-97E4-866F44D3FEC5}" type="datetime1">
               <a:rPr lang="en-US" smtClean="0"/>
-              <a:t>3/18/2026</a:t>
+              <a:t>3/29/2026</a:t>
             </a:fld>
             <a:endParaRPr lang="en-US"/>
           </a:p>
@@ -1451,7 +1451,7 @@
           <a:p>
             <a:fld id="{5B30CE8C-B3D2-4FED-8171-A22B1E84AA49}" type="datetime1">
               <a:rPr lang="en-US" smtClean="0"/>
-              <a:t>3/18/2026</a:t>
+              <a:t>3/29/2026</a:t>
             </a:fld>
             <a:endParaRPr lang="en-US"/>
           </a:p>
@@ -1739,7 +1739,7 @@
           <a:p>
             <a:fld id="{18787D79-C197-49E5-840E-62EF773E40EB}" type="datetime1">
               <a:rPr lang="en-US" smtClean="0"/>
-              <a:t>3/18/2026</a:t>
+              <a:t>3/29/2026</a:t>
             </a:fld>
             <a:endParaRPr lang="en-US"/>
           </a:p>
@@ -2161,7 +2161,7 @@
           <a:p>
             <a:fld id="{6AB4C717-ACD6-42B4-B4D2-A00897526083}" type="datetime1">
               <a:rPr lang="en-US" smtClean="0"/>
-              <a:t>3/18/2026</a:t>
+              <a:t>3/29/2026</a:t>
             </a:fld>
             <a:endParaRPr lang="en-US"/>
           </a:p>
@@ -2281,7 +2281,7 @@
           <a:p>
             <a:fld id="{35F0F010-C38E-44B3-A11D-B9CE0300A741}" type="datetime1">
               <a:rPr lang="en-US" smtClean="0"/>
-              <a:t>3/18/2026</a:t>
+              <a:t>3/29/2026</a:t>
             </a:fld>
             <a:endParaRPr lang="en-US"/>
           </a:p>
@@ -2379,7 +2379,7 @@
           <a:p>
             <a:fld id="{0E2442EE-45D9-4220-A88F-EE689B9875C3}" type="datetime1">
               <a:rPr lang="en-US" smtClean="0"/>
-              <a:t>3/18/2026</a:t>
+              <a:t>3/29/2026</a:t>
             </a:fld>
             <a:endParaRPr lang="en-US"/>
           </a:p>
@@ -2657,7 +2657,7 @@
           <a:p>
             <a:fld id="{D5FA1C2B-1683-45DB-88D6-369C6CB6AB24}" type="datetime1">
               <a:rPr lang="en-US" smtClean="0"/>
-              <a:t>3/18/2026</a:t>
+              <a:t>3/29/2026</a:t>
             </a:fld>
             <a:endParaRPr lang="en-US"/>
           </a:p>
@@ -2912,7 +2912,7 @@
           <a:p>
             <a:fld id="{DFFB611B-DC9D-42DB-B865-14DB93E316AF}" type="datetime1">
               <a:rPr lang="en-US" smtClean="0"/>
-              <a:t>3/18/2026</a:t>
+              <a:t>3/29/2026</a:t>
             </a:fld>
             <a:endParaRPr lang="en-US"/>
           </a:p>
@@ -3126,7 +3126,7 @@
           <a:p>
             <a:fld id="{A3B8D4B9-4EE2-4C3D-B367-BE7622E78789}" type="datetime1">
               <a:rPr lang="en-US" smtClean="0"/>
-              <a:t>3/18/2026</a:t>
+              <a:t>3/29/2026</a:t>
             </a:fld>
             <a:endParaRPr lang="en-US"/>
           </a:p>
@@ -7151,8 +7151,8 @@
           <a:chExt cx="0" cy="0"/>
         </a:xfrm>
       </p:grpSpPr>
-      <mc:AlternateContent xmlns:mc="http://schemas.openxmlformats.org/markup-compatibility/2006" xmlns:a14="http://schemas.microsoft.com/office/drawing/2010/main">
-        <mc:Choice Requires="a14">
+      <mc:AlternateContent xmlns:mc="http://schemas.openxmlformats.org/markup-compatibility/2006">
+        <mc:Choice xmlns:a14="http://schemas.microsoft.com/office/drawing/2010/main" Requires="a14">
           <p:sp>
             <p:nvSpPr>
               <p:cNvPr id="3" name="Content Placeholder 2">
@@ -7606,10 +7606,10 @@
                                     </m:sSubPr>
                                     <m:e>
                                       <m:r>
-                                        <a:rPr lang="en-US" altLang="zh-TW" sz="2400" i="1">
+                                        <a:rPr lang="en-US" altLang="zh-TW" sz="2400" b="0" i="1" smtClean="0">
                                           <a:latin typeface="Cambria Math" panose="02040503050406030204" pitchFamily="18" charset="0"/>
                                         </a:rPr>
-                                        <m:t>𝜔</m:t>
+                                        <m:t>𝑤</m:t>
                                       </m:r>
                                     </m:e>
                                     <m:sub>
@@ -7633,10 +7633,10 @@
                                     </m:sSubPr>
                                     <m:e>
                                       <m:r>
-                                        <a:rPr lang="en-US" altLang="zh-TW" sz="2400" i="1">
+                                        <a:rPr lang="en-US" altLang="zh-TW" sz="2400" b="0" i="1" smtClean="0">
                                           <a:latin typeface="Cambria Math" panose="02040503050406030204" pitchFamily="18" charset="0"/>
                                         </a:rPr>
-                                        <m:t>𝜔</m:t>
+                                        <m:t>𝑤</m:t>
                                       </m:r>
                                     </m:e>
                                     <m:sub>
@@ -7848,7 +7848,7 @@
             </p:txBody>
           </p:sp>
         </mc:Choice>
-        <mc:Fallback xmlns="">
+        <mc:Fallback>
           <p:sp>
             <p:nvSpPr>
               <p:cNvPr id="3" name="Content Placeholder 2">
@@ -8699,10 +8699,10 @@
                                 <m:t> </m:t>
                               </m:r>
                               <m:r>
-                                <a:rPr lang="en-US" altLang="zh-TW" sz="2400" i="1">
+                                <a:rPr lang="en-US" altLang="zh-TW" sz="2400" b="0" i="1" smtClean="0">
                                   <a:latin typeface="Cambria Math" panose="02040503050406030204" pitchFamily="18" charset="0"/>
                                 </a:rPr>
-                                <m:t>𝜔</m:t>
+                                <m:t>𝑤</m:t>
                               </m:r>
                             </m:e>
                             <m:sub>
@@ -8755,10 +8755,10 @@
                             </m:sSubPr>
                             <m:e>
                               <m:r>
-                                <a:rPr lang="en-US" altLang="zh-TW" sz="2400" i="1">
+                                <a:rPr lang="en-US" altLang="zh-TW" sz="2400" b="0" i="1" smtClean="0">
                                   <a:latin typeface="Cambria Math" panose="02040503050406030204" pitchFamily="18" charset="0"/>
                                 </a:rPr>
-                                <m:t>𝜔</m:t>
+                                <m:t>𝑤</m:t>
                               </m:r>
                             </m:e>
                             <m:sub>
@@ -9126,10 +9126,10 @@
                         </m:sSubPr>
                         <m:e>
                           <m:r>
-                            <a:rPr lang="en-US" altLang="zh-TW" sz="2400" i="1">
+                            <a:rPr lang="en-US" altLang="zh-TW" sz="2400" b="0" i="1" smtClean="0">
                               <a:latin typeface="Cambria Math" panose="02040503050406030204" pitchFamily="18" charset="0"/>
                             </a:rPr>
-                            <m:t>𝜔</m:t>
+                            <m:t>𝑤</m:t>
                           </m:r>
                         </m:e>
                         <m:sub>
@@ -9182,10 +9182,10 @@
                         </m:sSubPr>
                         <m:e>
                           <m:r>
-                            <a:rPr lang="en-US" altLang="zh-TW" sz="2400" i="1">
+                            <a:rPr lang="en-US" altLang="zh-TW" sz="2400" b="0" i="1" smtClean="0">
                               <a:latin typeface="Cambria Math" panose="02040503050406030204" pitchFamily="18" charset="0"/>
                             </a:rPr>
-                            <m:t>𝜔</m:t>
+                            <m:t>𝑤</m:t>
                           </m:r>
                         </m:e>
                         <m:sub>
@@ -9715,7 +9715,7 @@
                             <a:latin typeface="Cambria Math" panose="02040503050406030204" pitchFamily="18" charset="0"/>
                             <a:ea typeface="Cambria Math" panose="02040503050406030204" pitchFamily="18" charset="0"/>
                           </a:rPr>
-                          <m:t>𝜔</m:t>
+                          <m:t>𝑤</m:t>
                         </m:r>
                       </m:e>
                       <m:sub>
@@ -10005,10 +10005,10 @@
                       </m:sSubPr>
                       <m:e>
                         <m:r>
-                          <a:rPr lang="en-US" altLang="zh-TW" sz="2400" i="1">
+                          <a:rPr lang="en-US" altLang="zh-TW" sz="2400" b="0" i="1" smtClean="0">
                             <a:latin typeface="Cambria Math" panose="02040503050406030204" pitchFamily="18" charset="0"/>
                           </a:rPr>
-                          <m:t>𝜔</m:t>
+                          <m:t>𝑤</m:t>
                         </m:r>
                       </m:e>
                       <m:sub>
@@ -10947,8 +10947,8 @@
           <a:chExt cx="0" cy="0"/>
         </a:xfrm>
       </p:grpSpPr>
-      <mc:AlternateContent xmlns:mc="http://schemas.openxmlformats.org/markup-compatibility/2006" xmlns:a14="http://schemas.microsoft.com/office/drawing/2010/main">
-        <mc:Choice Requires="a14">
+      <mc:AlternateContent xmlns:mc="http://schemas.openxmlformats.org/markup-compatibility/2006">
+        <mc:Choice xmlns:a14="http://schemas.microsoft.com/office/drawing/2010/main" Requires="a14">
           <p:sp>
             <p:nvSpPr>
               <p:cNvPr id="3" name="Content Placeholder 2">
@@ -11373,7 +11373,7 @@
                                 <a:latin typeface="Cambria Math" panose="02040503050406030204" pitchFamily="18" charset="0"/>
                                 <a:ea typeface="Cambria Math" panose="02040503050406030204" pitchFamily="18" charset="0"/>
                               </a:rPr>
-                              <m:t>𝜔</m:t>
+                              <m:t>𝑤</m:t>
                             </m:r>
                           </m:e>
                           <m:sub>
@@ -11399,11 +11399,11 @@
                           </m:sSubPr>
                           <m:e>
                             <m:r>
-                              <a:rPr lang="en-US" altLang="zh-TW" sz="2400" i="1">
+                              <a:rPr lang="en-US" altLang="zh-TW" sz="2400" b="0" i="1" smtClean="0">
                                 <a:latin typeface="Cambria Math" panose="02040503050406030204" pitchFamily="18" charset="0"/>
                                 <a:ea typeface="Cambria Math" panose="02040503050406030204" pitchFamily="18" charset="0"/>
                               </a:rPr>
-                              <m:t>𝜔</m:t>
+                              <m:t>𝑤</m:t>
                             </m:r>
                           </m:e>
                           <m:sub>
@@ -11537,11 +11537,11 @@
                           </m:sSubPr>
                           <m:e>
                             <m:r>
-                              <a:rPr lang="en-US" altLang="zh-TW" sz="2400" i="1">
+                              <a:rPr lang="en-US" altLang="zh-TW" sz="2400" b="0" i="1" smtClean="0">
                                 <a:latin typeface="Cambria Math" panose="02040503050406030204" pitchFamily="18" charset="0"/>
                                 <a:ea typeface="Cambria Math" panose="02040503050406030204" pitchFamily="18" charset="0"/>
                               </a:rPr>
-                              <m:t>𝜔</m:t>
+                              <m:t>𝑤</m:t>
                             </m:r>
                           </m:e>
                           <m:sub>
@@ -11567,11 +11567,11 @@
                           </m:sSubPr>
                           <m:e>
                             <m:r>
-                              <a:rPr lang="en-US" altLang="zh-TW" sz="2400" i="1">
+                              <a:rPr lang="en-US" altLang="zh-TW" sz="2400" b="0" i="1" smtClean="0">
                                 <a:latin typeface="Cambria Math" panose="02040503050406030204" pitchFamily="18" charset="0"/>
                                 <a:ea typeface="Cambria Math" panose="02040503050406030204" pitchFamily="18" charset="0"/>
                               </a:rPr>
-                              <m:t>𝜔</m:t>
+                              <m:t>𝑤</m:t>
                             </m:r>
                           </m:e>
                           <m:sub>
@@ -11635,11 +11635,11 @@
                           </m:sSubPr>
                           <m:e>
                             <m:r>
-                              <a:rPr lang="en-US" altLang="zh-TW" sz="2400" i="1">
+                              <a:rPr lang="en-US" altLang="zh-TW" sz="2400" b="0" i="1" smtClean="0">
                                 <a:latin typeface="Cambria Math" panose="02040503050406030204" pitchFamily="18" charset="0"/>
                                 <a:ea typeface="Cambria Math" panose="02040503050406030204" pitchFamily="18" charset="0"/>
                               </a:rPr>
-                              <m:t>𝜔</m:t>
+                              <m:t>𝑤</m:t>
                             </m:r>
                           </m:e>
                           <m:sub>
@@ -11665,11 +11665,11 @@
                           </m:sSubPr>
                           <m:e>
                             <m:r>
-                              <a:rPr lang="en-US" altLang="zh-TW" sz="2400" i="1">
+                              <a:rPr lang="en-US" altLang="zh-TW" sz="2400" b="0" i="1" smtClean="0">
                                 <a:latin typeface="Cambria Math" panose="02040503050406030204" pitchFamily="18" charset="0"/>
                                 <a:ea typeface="Cambria Math" panose="02040503050406030204" pitchFamily="18" charset="0"/>
                               </a:rPr>
-                              <m:t>𝜔</m:t>
+                              <m:t>𝑤</m:t>
                             </m:r>
                           </m:e>
                           <m:sub>
@@ -11813,7 +11813,7 @@
             </p:txBody>
           </p:sp>
         </mc:Choice>
-        <mc:Fallback xmlns="">
+        <mc:Fallback>
           <p:sp>
             <p:nvSpPr>
               <p:cNvPr id="3" name="Content Placeholder 2">
@@ -12471,8 +12471,8 @@
           <a:chExt cx="0" cy="0"/>
         </a:xfrm>
       </p:grpSpPr>
-      <mc:AlternateContent xmlns:mc="http://schemas.openxmlformats.org/markup-compatibility/2006" xmlns:a14="http://schemas.microsoft.com/office/drawing/2010/main">
-        <mc:Choice Requires="a14">
+      <mc:AlternateContent xmlns:mc="http://schemas.openxmlformats.org/markup-compatibility/2006">
+        <mc:Choice xmlns:a14="http://schemas.microsoft.com/office/drawing/2010/main" Requires="a14">
           <p:sp>
             <p:nvSpPr>
               <p:cNvPr id="3" name="Content Placeholder 2">
@@ -12614,7 +12614,7 @@
                                 <a:rPr lang="en-US" altLang="zh-TW" sz="2400" b="0" i="1" smtClean="0">
                                   <a:latin typeface="Cambria Math" panose="02040503050406030204" pitchFamily="18" charset="0"/>
                                 </a:rPr>
-                                <m:t>𝜔</m:t>
+                                <m:t>𝑤</m:t>
                               </m:r>
                             </m:e>
                             <m:sub>
@@ -12645,7 +12645,7 @@
                                 <a:rPr lang="en-US" altLang="zh-TW" sz="2400" b="0" i="1" smtClean="0">
                                   <a:latin typeface="Cambria Math" panose="02040503050406030204" pitchFamily="18" charset="0"/>
                                 </a:rPr>
-                                <m:t>𝜔</m:t>
+                                <m:t>𝑤</m:t>
                               </m:r>
                             </m:e>
                             <m:sub>
@@ -12733,10 +12733,10 @@
                             </m:sSubPr>
                             <m:e>
                               <m:r>
-                                <a:rPr lang="en-US" altLang="zh-TW" sz="2400" i="1">
+                                <a:rPr lang="en-US" altLang="zh-TW" sz="2400" b="0" i="1" smtClean="0">
                                   <a:latin typeface="Cambria Math" panose="02040503050406030204" pitchFamily="18" charset="0"/>
                                 </a:rPr>
-                                <m:t>𝜔</m:t>
+                                <m:t>𝑤</m:t>
                               </m:r>
                             </m:e>
                             <m:sub>
@@ -12764,10 +12764,10 @@
                             </m:sSubPr>
                             <m:e>
                               <m:r>
-                                <a:rPr lang="en-US" altLang="zh-TW" sz="2400" i="1">
+                                <a:rPr lang="en-US" altLang="zh-TW" sz="2400" b="0" i="1" smtClean="0">
                                   <a:latin typeface="Cambria Math" panose="02040503050406030204" pitchFamily="18" charset="0"/>
                                 </a:rPr>
-                                <m:t>𝜔</m:t>
+                                <m:t>𝑤</m:t>
                               </m:r>
                             </m:e>
                             <m:sub>
@@ -13011,7 +13011,7 @@
             </p:txBody>
           </p:sp>
         </mc:Choice>
-        <mc:Fallback xmlns="">
+        <mc:Fallback>
           <p:sp>
             <p:nvSpPr>
               <p:cNvPr id="3" name="Content Placeholder 2">
@@ -13737,8 +13737,8 @@
           <a:chExt cx="0" cy="0"/>
         </a:xfrm>
       </p:grpSpPr>
-      <mc:AlternateContent xmlns:mc="http://schemas.openxmlformats.org/markup-compatibility/2006" xmlns:a14="http://schemas.microsoft.com/office/drawing/2010/main">
-        <mc:Choice Requires="a14">
+      <mc:AlternateContent xmlns:mc="http://schemas.openxmlformats.org/markup-compatibility/2006">
+        <mc:Choice xmlns:a14="http://schemas.microsoft.com/office/drawing/2010/main" Requires="a14">
           <p:sp>
             <p:nvSpPr>
               <p:cNvPr id="3" name="Content Placeholder 2">
@@ -13850,10 +13850,10 @@
                             </m:sSubPr>
                             <m:e>
                               <m:r>
-                                <a:rPr lang="en-US" altLang="zh-TW" sz="2400" i="1">
+                                <a:rPr lang="en-US" altLang="zh-TW" sz="2400" b="0" i="1" smtClean="0">
                                   <a:latin typeface="Cambria Math" panose="02040503050406030204" pitchFamily="18" charset="0"/>
                                 </a:rPr>
-                                <m:t>𝜔</m:t>
+                                <m:t>𝑤</m:t>
                               </m:r>
                             </m:e>
                             <m:sub>
@@ -13881,10 +13881,10 @@
                             </m:sSubPr>
                             <m:e>
                               <m:r>
-                                <a:rPr lang="en-US" altLang="zh-TW" sz="2400" i="1">
+                                <a:rPr lang="en-US" altLang="zh-TW" sz="2400" b="0" i="1" smtClean="0">
                                   <a:latin typeface="Cambria Math" panose="02040503050406030204" pitchFamily="18" charset="0"/>
                                 </a:rPr>
-                                <m:t>𝜔</m:t>
+                                <m:t>𝑤</m:t>
                               </m:r>
                             </m:e>
                             <m:sub>
@@ -13941,7 +13941,7 @@
                             <a:rPr lang="en-US" altLang="zh-TW" sz="2400" b="0" i="1" smtClean="0">
                               <a:latin typeface="Cambria Math" panose="02040503050406030204" pitchFamily="18" charset="0"/>
                             </a:rPr>
-                            <m:t>𝜔</m:t>
+                            <m:t>𝑤</m:t>
                           </m:r>
                         </m:e>
                         <m:sub>
@@ -14003,10 +14003,10 @@
                             </m:sSubPr>
                             <m:e>
                               <m:r>
-                                <a:rPr lang="en-US" altLang="zh-TW" sz="2400" i="1">
+                                <a:rPr lang="en-US" altLang="zh-TW" sz="2400" b="0" i="1" smtClean="0">
                                   <a:latin typeface="Cambria Math" panose="02040503050406030204" pitchFamily="18" charset="0"/>
                                 </a:rPr>
-                                <m:t>𝜔</m:t>
+                                <m:t>𝑤</m:t>
                               </m:r>
                             </m:e>
                             <m:sub>
@@ -14034,10 +14034,10 @@
                             </m:sSubPr>
                             <m:e>
                               <m:r>
-                                <a:rPr lang="en-US" altLang="zh-TW" sz="2400" i="1">
+                                <a:rPr lang="en-US" altLang="zh-TW" sz="2400" b="0" i="1" smtClean="0">
                                   <a:latin typeface="Cambria Math" panose="02040503050406030204" pitchFamily="18" charset="0"/>
                                 </a:rPr>
-                                <m:t>𝜔</m:t>
+                                <m:t>𝑤</m:t>
                               </m:r>
                             </m:e>
                             <m:sub>
@@ -14091,10 +14091,10 @@
                         </m:sSubPr>
                         <m:e>
                           <m:r>
-                            <a:rPr lang="en-US" altLang="zh-TW" sz="2400" i="1">
+                            <a:rPr lang="en-US" altLang="zh-TW" sz="2400" b="0" i="1" smtClean="0">
                               <a:latin typeface="Cambria Math" panose="02040503050406030204" pitchFamily="18" charset="0"/>
                             </a:rPr>
-                            <m:t>𝜔</m:t>
+                            <m:t>𝑤</m:t>
                           </m:r>
                         </m:e>
                         <m:sub>
@@ -14156,10 +14156,10 @@
                             </m:sSubPr>
                             <m:e>
                               <m:r>
-                                <a:rPr lang="en-US" altLang="zh-TW" sz="2400" i="1">
+                                <a:rPr lang="en-US" altLang="zh-TW" sz="2400" b="0" i="1" smtClean="0">
                                   <a:latin typeface="Cambria Math" panose="02040503050406030204" pitchFamily="18" charset="0"/>
                                 </a:rPr>
-                                <m:t>𝜔</m:t>
+                                <m:t>𝑤</m:t>
                               </m:r>
                             </m:e>
                             <m:sub>
@@ -14187,10 +14187,10 @@
                             </m:sSubPr>
                             <m:e>
                               <m:r>
-                                <a:rPr lang="en-US" altLang="zh-TW" sz="2400" i="1">
+                                <a:rPr lang="en-US" altLang="zh-TW" sz="2400" b="0" i="1" smtClean="0">
                                   <a:latin typeface="Cambria Math" panose="02040503050406030204" pitchFamily="18" charset="0"/>
                                 </a:rPr>
-                                <m:t>𝜔</m:t>
+                                <m:t>𝑤</m:t>
                               </m:r>
                             </m:e>
                             <m:sub>
@@ -14354,10 +14354,10 @@
                           </m:sSubPr>
                           <m:e>
                             <m:r>
-                              <a:rPr lang="en-US" altLang="zh-TW" sz="2000" i="1">
+                              <a:rPr lang="en-US" altLang="zh-TW" sz="2000" b="0" i="1" smtClean="0">
                                 <a:latin typeface="Cambria Math" panose="02040503050406030204" pitchFamily="18" charset="0"/>
                               </a:rPr>
-                              <m:t>𝜔</m:t>
+                              <m:t>𝑤</m:t>
                             </m:r>
                           </m:e>
                           <m:sub>
@@ -14385,10 +14385,10 @@
                           </m:sSubPr>
                           <m:e>
                             <m:r>
-                              <a:rPr lang="en-US" altLang="zh-TW" sz="2000" i="1">
+                              <a:rPr lang="en-US" altLang="zh-TW" sz="2000" b="0" i="1" smtClean="0">
                                 <a:latin typeface="Cambria Math" panose="02040503050406030204" pitchFamily="18" charset="0"/>
                               </a:rPr>
-                              <m:t>𝜔</m:t>
+                              <m:t>𝑤</m:t>
                             </m:r>
                           </m:e>
                           <m:sub>
@@ -14515,7 +14515,7 @@
             </p:txBody>
           </p:sp>
         </mc:Choice>
-        <mc:Fallback xmlns="">
+        <mc:Fallback>
           <p:sp>
             <p:nvSpPr>
               <p:cNvPr id="3" name="Content Placeholder 2">
@@ -15155,8 +15155,8 @@
           <a:chExt cx="0" cy="0"/>
         </a:xfrm>
       </p:grpSpPr>
-      <mc:AlternateContent xmlns:mc="http://schemas.openxmlformats.org/markup-compatibility/2006" xmlns:a14="http://schemas.microsoft.com/office/drawing/2010/main">
-        <mc:Choice Requires="a14">
+      <mc:AlternateContent xmlns:mc="http://schemas.openxmlformats.org/markup-compatibility/2006">
+        <mc:Choice xmlns:a14="http://schemas.microsoft.com/office/drawing/2010/main" Requires="a14">
           <p:sp>
             <p:nvSpPr>
               <p:cNvPr id="3" name="Content Placeholder 2">
@@ -15333,10 +15333,10 @@
                               <m:t> </m:t>
                             </m:r>
                             <m:r>
-                              <a:rPr lang="en-US" altLang="zh-TW" sz="2000" i="1">
+                              <a:rPr lang="en-US" altLang="zh-TW" sz="2000" b="0" i="1" smtClean="0">
                                 <a:latin typeface="Cambria Math" panose="02040503050406030204" pitchFamily="18" charset="0"/>
                               </a:rPr>
-                              <m:t>𝜔</m:t>
+                              <m:t>𝑤</m:t>
                             </m:r>
                           </m:e>
                           <m:sub>
@@ -15389,10 +15389,10 @@
                           </m:sSubPr>
                           <m:e>
                             <m:r>
-                              <a:rPr lang="en-US" altLang="zh-TW" sz="2000" i="1">
+                              <a:rPr lang="en-US" altLang="zh-TW" sz="2000" b="0" i="1" smtClean="0">
                                 <a:latin typeface="Cambria Math" panose="02040503050406030204" pitchFamily="18" charset="0"/>
                               </a:rPr>
-                              <m:t>𝜔</m:t>
+                              <m:t>𝑤</m:t>
                             </m:r>
                           </m:e>
                           <m:sub>
@@ -15768,11 +15768,11 @@
                           </m:sSubPr>
                           <m:e>
                             <m:r>
-                              <a:rPr lang="en-US" altLang="zh-TW" sz="2400" i="1">
+                              <a:rPr lang="en-US" altLang="zh-TW" sz="2400" b="0" i="1" smtClean="0">
                                 <a:latin typeface="Cambria Math" panose="02040503050406030204" pitchFamily="18" charset="0"/>
                                 <a:ea typeface="Cambria Math" panose="02040503050406030204" pitchFamily="18" charset="0"/>
                               </a:rPr>
-                              <m:t>𝜔</m:t>
+                              <m:t>𝑤</m:t>
                             </m:r>
                           </m:e>
                           <m:sub>
@@ -15798,11 +15798,11 @@
                           </m:sSubPr>
                           <m:e>
                             <m:r>
-                              <a:rPr lang="en-US" altLang="zh-TW" sz="2400" i="1">
+                              <a:rPr lang="en-US" altLang="zh-TW" sz="2400" b="0" i="1" smtClean="0">
                                 <a:latin typeface="Cambria Math" panose="02040503050406030204" pitchFamily="18" charset="0"/>
                                 <a:ea typeface="Cambria Math" panose="02040503050406030204" pitchFamily="18" charset="0"/>
                               </a:rPr>
-                              <m:t>𝜔</m:t>
+                              <m:t>𝑤</m:t>
                             </m:r>
                           </m:e>
                           <m:sub>
@@ -16174,11 +16174,11 @@
                           </m:sSubPr>
                           <m:e>
                             <m:r>
-                              <a:rPr lang="en-US" altLang="zh-TW" sz="2400" i="1">
+                              <a:rPr lang="en-US" altLang="zh-TW" sz="2400" b="0" i="1" smtClean="0">
                                 <a:latin typeface="Cambria Math" panose="02040503050406030204" pitchFamily="18" charset="0"/>
                                 <a:ea typeface="Cambria Math" panose="02040503050406030204" pitchFamily="18" charset="0"/>
                               </a:rPr>
-                              <m:t>𝜔</m:t>
+                              <m:t>𝑤</m:t>
                             </m:r>
                           </m:e>
                           <m:sub>
@@ -16204,11 +16204,11 @@
                           </m:sSubPr>
                           <m:e>
                             <m:r>
-                              <a:rPr lang="en-US" altLang="zh-TW" sz="2400" i="1">
+                              <a:rPr lang="en-US" altLang="zh-TW" sz="2400" b="0" i="1" smtClean="0">
                                 <a:latin typeface="Cambria Math" panose="02040503050406030204" pitchFamily="18" charset="0"/>
                                 <a:ea typeface="Cambria Math" panose="02040503050406030204" pitchFamily="18" charset="0"/>
                               </a:rPr>
-                              <m:t>𝜔</m:t>
+                              <m:t>𝑤</m:t>
                             </m:r>
                           </m:e>
                           <m:sub>
@@ -16356,11 +16356,11 @@
                           </m:sSubPr>
                           <m:e>
                             <m:r>
-                              <a:rPr lang="en-US" altLang="zh-TW" sz="2400" i="1">
+                              <a:rPr lang="en-US" altLang="zh-TW" sz="2400" b="0" i="1" smtClean="0">
                                 <a:latin typeface="Cambria Math" panose="02040503050406030204" pitchFamily="18" charset="0"/>
                                 <a:ea typeface="Cambria Math" panose="02040503050406030204" pitchFamily="18" charset="0"/>
                               </a:rPr>
-                              <m:t>𝜔</m:t>
+                              <m:t>𝑤</m:t>
                             </m:r>
                           </m:e>
                           <m:sub>
@@ -16386,11 +16386,11 @@
                           </m:sSubPr>
                           <m:e>
                             <m:r>
-                              <a:rPr lang="en-US" altLang="zh-TW" sz="2400" i="1">
+                              <a:rPr lang="en-US" altLang="zh-TW" sz="2400" b="0" i="1" smtClean="0">
                                 <a:latin typeface="Cambria Math" panose="02040503050406030204" pitchFamily="18" charset="0"/>
                                 <a:ea typeface="Cambria Math" panose="02040503050406030204" pitchFamily="18" charset="0"/>
                               </a:rPr>
-                              <m:t>𝜔</m:t>
+                              <m:t>𝑤</m:t>
                             </m:r>
                           </m:e>
                           <m:sub>
@@ -16489,11 +16489,11 @@
                               <m:t>2</m:t>
                             </m:r>
                             <m:r>
-                              <a:rPr lang="en-US" altLang="zh-TW" sz="2400" i="1">
+                              <a:rPr lang="en-US" altLang="zh-TW" sz="2400" b="0" i="1" smtClean="0">
                                 <a:latin typeface="Cambria Math" panose="02040503050406030204" pitchFamily="18" charset="0"/>
                                 <a:ea typeface="Cambria Math" panose="02040503050406030204" pitchFamily="18" charset="0"/>
                               </a:rPr>
-                              <m:t>𝜔</m:t>
+                              <m:t>𝑤</m:t>
                             </m:r>
                           </m:e>
                           <m:sub>
@@ -16519,11 +16519,11 @@
                           </m:sSubPr>
                           <m:e>
                             <m:r>
-                              <a:rPr lang="en-US" altLang="zh-TW" sz="2400" i="1">
+                              <a:rPr lang="en-US" altLang="zh-TW" sz="2400" b="0" i="1" smtClean="0">
                                 <a:latin typeface="Cambria Math" panose="02040503050406030204" pitchFamily="18" charset="0"/>
                                 <a:ea typeface="Cambria Math" panose="02040503050406030204" pitchFamily="18" charset="0"/>
                               </a:rPr>
-                              <m:t>𝜔</m:t>
+                              <m:t>𝑤</m:t>
                             </m:r>
                           </m:e>
                           <m:sub>
@@ -16879,11 +16879,11 @@
                                       <m:t>2</m:t>
                                     </m:r>
                                     <m:r>
-                                      <a:rPr lang="en-US" altLang="zh-TW" sz="2400" i="1">
+                                      <a:rPr lang="en-US" altLang="zh-TW" sz="2400" b="0" i="1" smtClean="0">
                                         <a:latin typeface="Cambria Math" panose="02040503050406030204" pitchFamily="18" charset="0"/>
                                         <a:ea typeface="Cambria Math" panose="02040503050406030204" pitchFamily="18" charset="0"/>
                                       </a:rPr>
-                                      <m:t>𝜔</m:t>
+                                      <m:t>𝑤</m:t>
                                     </m:r>
                                   </m:e>
                                   <m:sub>
@@ -16909,11 +16909,11 @@
                                   </m:sSubPr>
                                   <m:e>
                                     <m:r>
-                                      <a:rPr lang="en-US" altLang="zh-TW" sz="2400" i="1">
+                                      <a:rPr lang="en-US" altLang="zh-TW" sz="2400" b="0" i="1" smtClean="0">
                                         <a:latin typeface="Cambria Math" panose="02040503050406030204" pitchFamily="18" charset="0"/>
                                         <a:ea typeface="Cambria Math" panose="02040503050406030204" pitchFamily="18" charset="0"/>
                                       </a:rPr>
-                                      <m:t>𝜔</m:t>
+                                      <m:t>𝑤</m:t>
                                     </m:r>
                                   </m:e>
                                   <m:sub>
@@ -17106,11 +17106,11 @@
                                   </m:sSubPr>
                                   <m:e>
                                     <m:r>
-                                      <a:rPr lang="en-US" altLang="zh-TW" sz="2400" i="1">
+                                      <a:rPr lang="en-US" altLang="zh-TW" sz="2400" b="0" i="1" smtClean="0">
                                         <a:latin typeface="Cambria Math" panose="02040503050406030204" pitchFamily="18" charset="0"/>
                                         <a:ea typeface="Cambria Math" panose="02040503050406030204" pitchFamily="18" charset="0"/>
                                       </a:rPr>
-                                      <m:t>𝜔</m:t>
+                                      <m:t>𝑤</m:t>
                                     </m:r>
                                   </m:e>
                                   <m:sub>
@@ -17143,11 +17143,11 @@
                                       <m:t>2</m:t>
                                     </m:r>
                                     <m:r>
-                                      <a:rPr lang="en-US" altLang="zh-TW" sz="2400" i="1">
+                                      <a:rPr lang="en-US" altLang="zh-TW" sz="2400" b="0" i="1" smtClean="0">
                                         <a:latin typeface="Cambria Math" panose="02040503050406030204" pitchFamily="18" charset="0"/>
                                         <a:ea typeface="Cambria Math" panose="02040503050406030204" pitchFamily="18" charset="0"/>
                                       </a:rPr>
-                                      <m:t>𝜔</m:t>
+                                      <m:t>𝑤</m:t>
                                     </m:r>
                                   </m:e>
                                   <m:sub>
@@ -17225,7 +17225,7 @@
             </p:txBody>
           </p:sp>
         </mc:Choice>
-        <mc:Fallback xmlns="">
+        <mc:Fallback>
           <p:sp>
             <p:nvSpPr>
               <p:cNvPr id="3" name="Content Placeholder 2">
@@ -17883,8 +17883,8 @@
           <a:chExt cx="0" cy="0"/>
         </a:xfrm>
       </p:grpSpPr>
-      <mc:AlternateContent xmlns:mc="http://schemas.openxmlformats.org/markup-compatibility/2006" xmlns:a14="http://schemas.microsoft.com/office/drawing/2010/main">
-        <mc:Choice Requires="a14">
+      <mc:AlternateContent xmlns:mc="http://schemas.openxmlformats.org/markup-compatibility/2006">
+        <mc:Choice xmlns:a14="http://schemas.microsoft.com/office/drawing/2010/main" Requires="a14">
           <p:sp>
             <p:nvSpPr>
               <p:cNvPr id="3" name="Content Placeholder 2">
@@ -18087,7 +18087,7 @@
                             <a:rPr lang="en-US" altLang="zh-TW" sz="2400" b="0" i="1" smtClean="0">
                               <a:latin typeface="Cambria Math" panose="02040503050406030204" pitchFamily="18" charset="0"/>
                             </a:rPr>
-                            <m:t>𝜔</m:t>
+                            <m:t>𝑤</m:t>
                           </m:r>
                         </m:e>
                         <m:sub>
@@ -18143,7 +18143,7 @@
                             <a:rPr lang="en-US" altLang="zh-TW" sz="2400" b="0" i="1" smtClean="0">
                               <a:latin typeface="Cambria Math" panose="02040503050406030204" pitchFamily="18" charset="0"/>
                             </a:rPr>
-                            <m:t>𝜔</m:t>
+                            <m:t>𝑤</m:t>
                           </m:r>
                         </m:e>
                         <m:sub>
@@ -18510,10 +18510,10 @@
                         </m:sSubPr>
                         <m:e>
                           <m:r>
-                            <a:rPr lang="en-US" altLang="zh-TW" sz="2400" i="1" dirty="0">
+                            <a:rPr lang="en-US" altLang="zh-TW" sz="2400" b="0" i="1" dirty="0" smtClean="0">
                               <a:latin typeface="Cambria Math" panose="02040503050406030204" pitchFamily="18" charset="0"/>
                             </a:rPr>
-                            <m:t>𝜔</m:t>
+                            <m:t>𝑤</m:t>
                           </m:r>
                         </m:e>
                         <m:sub>
@@ -18719,13 +18719,13 @@
             </p:txBody>
           </p:sp>
         </mc:Choice>
-        <mc:Fallback xmlns="">
+        <mc:Fallback>
           <p:sp>
             <p:nvSpPr>
               <p:cNvPr id="3" name="Content Placeholder 2">
                 <a:extLst>
                   <a:ext uri="{FF2B5EF4-FFF2-40B4-BE49-F238E27FC236}">
-                    <a16:creationId xmlns:a16="http://schemas.microsoft.com/office/drawing/2014/main" id="{C821791D-B424-48B3-0C05-094304B0FD99}"/>
+                    <a16:creationId xmlns:a16="http://schemas.microsoft.com/office/drawing/2014/main" id="{9D472D59-CD60-126E-FE48-27197F988816}"/>
                   </a:ext>
                 </a:extLst>
               </p:cNvPr>
@@ -19445,8 +19445,8 @@
           <a:chExt cx="0" cy="0"/>
         </a:xfrm>
       </p:grpSpPr>
-      <mc:AlternateContent xmlns:mc="http://schemas.openxmlformats.org/markup-compatibility/2006" xmlns:a14="http://schemas.microsoft.com/office/drawing/2010/main">
-        <mc:Choice Requires="a14">
+      <mc:AlternateContent xmlns:mc="http://schemas.openxmlformats.org/markup-compatibility/2006">
+        <mc:Choice xmlns:a14="http://schemas.microsoft.com/office/drawing/2010/main" Requires="a14">
           <p:sp>
             <p:nvSpPr>
               <p:cNvPr id="3" name="Content Placeholder 2">
@@ -19581,11 +19581,11 @@
                               <m:t>2</m:t>
                             </m:r>
                             <m:r>
-                              <a:rPr lang="en-US" altLang="zh-TW" sz="2400" i="1">
+                              <a:rPr lang="en-US" altLang="zh-TW" sz="2400" b="0" i="1" smtClean="0">
                                 <a:latin typeface="Cambria Math" panose="02040503050406030204" pitchFamily="18" charset="0"/>
                                 <a:ea typeface="Cambria Math" panose="02040503050406030204" pitchFamily="18" charset="0"/>
                               </a:rPr>
-                              <m:t>𝜔</m:t>
+                              <m:t>𝑤</m:t>
                             </m:r>
                           </m:e>
                           <m:sub>
@@ -19611,11 +19611,11 @@
                           </m:sSubPr>
                           <m:e>
                             <m:r>
-                              <a:rPr lang="en-US" altLang="zh-TW" sz="2400" i="1">
+                              <a:rPr lang="en-US" altLang="zh-TW" sz="2400" b="0" i="1" smtClean="0">
                                 <a:latin typeface="Cambria Math" panose="02040503050406030204" pitchFamily="18" charset="0"/>
                                 <a:ea typeface="Cambria Math" panose="02040503050406030204" pitchFamily="18" charset="0"/>
                               </a:rPr>
-                              <m:t>𝜔</m:t>
+                              <m:t>𝑤</m:t>
                             </m:r>
                           </m:e>
                           <m:sub>
@@ -19742,11 +19742,11 @@
                               <m:t>2</m:t>
                             </m:r>
                             <m:r>
-                              <a:rPr lang="en-US" altLang="zh-TW" sz="2400" i="1">
+                              <a:rPr lang="en-US" altLang="zh-TW" sz="2400" b="0" i="1" smtClean="0">
                                 <a:latin typeface="Cambria Math" panose="02040503050406030204" pitchFamily="18" charset="0"/>
                                 <a:ea typeface="Cambria Math" panose="02040503050406030204" pitchFamily="18" charset="0"/>
                               </a:rPr>
-                              <m:t>𝜔</m:t>
+                              <m:t>𝑤</m:t>
                             </m:r>
                           </m:e>
                           <m:sub>
@@ -19772,11 +19772,11 @@
                           </m:sSubPr>
                           <m:e>
                             <m:r>
-                              <a:rPr lang="en-US" altLang="zh-TW" sz="2400" i="1">
+                              <a:rPr lang="en-US" altLang="zh-TW" sz="2400" b="0" i="1" smtClean="0">
                                 <a:latin typeface="Cambria Math" panose="02040503050406030204" pitchFamily="18" charset="0"/>
                                 <a:ea typeface="Cambria Math" panose="02040503050406030204" pitchFamily="18" charset="0"/>
                               </a:rPr>
-                              <m:t>𝜔</m:t>
+                              <m:t>𝑤</m:t>
                             </m:r>
                           </m:e>
                           <m:sub>
@@ -19841,11 +19841,11 @@
                                       </m:sSubPr>
                                       <m:e>
                                         <m:r>
-                                          <a:rPr lang="en-US" altLang="zh-TW" sz="2400" i="1">
+                                          <a:rPr lang="en-US" altLang="zh-TW" sz="2400" b="0" i="1" smtClean="0">
                                             <a:latin typeface="Cambria Math" panose="02040503050406030204" pitchFamily="18" charset="0"/>
                                             <a:ea typeface="Cambria Math" panose="02040503050406030204" pitchFamily="18" charset="0"/>
                                           </a:rPr>
-                                          <m:t>𝜔</m:t>
+                                          <m:t>𝑤</m:t>
                                         </m:r>
                                       </m:e>
                                       <m:sub>
@@ -19878,11 +19878,11 @@
                                           <m:t>2</m:t>
                                         </m:r>
                                         <m:r>
-                                          <a:rPr lang="en-US" altLang="zh-TW" sz="2400" i="1">
+                                          <a:rPr lang="en-US" altLang="zh-TW" sz="2400" b="0" i="1" smtClean="0">
                                             <a:latin typeface="Cambria Math" panose="02040503050406030204" pitchFamily="18" charset="0"/>
                                             <a:ea typeface="Cambria Math" panose="02040503050406030204" pitchFamily="18" charset="0"/>
                                           </a:rPr>
-                                          <m:t>𝜔</m:t>
+                                          <m:t>𝑤</m:t>
                                         </m:r>
                                       </m:e>
                                       <m:sub>
@@ -20053,11 +20053,11 @@
                                       <m:t>2</m:t>
                                     </m:r>
                                     <m:r>
-                                      <a:rPr lang="en-US" altLang="zh-TW" sz="2400" i="1">
+                                      <a:rPr lang="en-US" altLang="zh-TW" sz="2400" b="0" i="1" smtClean="0">
                                         <a:latin typeface="Cambria Math" panose="02040503050406030204" pitchFamily="18" charset="0"/>
                                         <a:ea typeface="Cambria Math" panose="02040503050406030204" pitchFamily="18" charset="0"/>
                                       </a:rPr>
-                                      <m:t>𝜔</m:t>
+                                      <m:t>𝑤</m:t>
                                     </m:r>
                                   </m:e>
                                   <m:sub>
@@ -20083,11 +20083,11 @@
                                   </m:sSubPr>
                                   <m:e>
                                     <m:r>
-                                      <a:rPr lang="en-US" altLang="zh-TW" sz="2400" i="1">
+                                      <a:rPr lang="en-US" altLang="zh-TW" sz="2400" b="0" i="1" smtClean="0">
                                         <a:latin typeface="Cambria Math" panose="02040503050406030204" pitchFamily="18" charset="0"/>
                                         <a:ea typeface="Cambria Math" panose="02040503050406030204" pitchFamily="18" charset="0"/>
                                       </a:rPr>
-                                      <m:t>𝜔</m:t>
+                                      <m:t>𝑤</m:t>
                                     </m:r>
                                   </m:e>
                                   <m:sub>
@@ -20249,7 +20249,7 @@
                                 <a:latin typeface="Cambria Math" panose="02040503050406030204" pitchFamily="18" charset="0"/>
                                 <a:ea typeface="Cambria Math" panose="02040503050406030204" pitchFamily="18" charset="0"/>
                               </a:rPr>
-                              <m:t>𝜔</m:t>
+                              <m:t>𝑤</m:t>
                             </m:r>
                           </m:e>
                           <m:sub>
@@ -20284,7 +20284,7 @@
                                 <a:latin typeface="Cambria Math" panose="02040503050406030204" pitchFamily="18" charset="0"/>
                                 <a:ea typeface="Cambria Math" panose="02040503050406030204" pitchFamily="18" charset="0"/>
                               </a:rPr>
-                              <m:t>𝜔</m:t>
+                              <m:t>𝑤</m:t>
                             </m:r>
                           </m:e>
                           <m:sub>
@@ -20348,7 +20348,7 @@
                             <a:latin typeface="Cambria Math" panose="02040503050406030204" pitchFamily="18" charset="0"/>
                             <a:ea typeface="Cambria Math" panose="02040503050406030204" pitchFamily="18" charset="0"/>
                           </a:rPr>
-                          <m:t>𝜔</m:t>
+                          <m:t>𝑤</m:t>
                         </m:r>
                       </m:e>
                       <m:sub>
@@ -20400,11 +20400,11 @@
                                   </m:sSubPr>
                                   <m:e>
                                     <m:r>
-                                      <a:rPr lang="en-US" altLang="zh-TW" sz="2400" i="1">
+                                      <a:rPr lang="en-US" altLang="zh-TW" sz="2400" b="0" i="1" smtClean="0">
                                         <a:latin typeface="Cambria Math" panose="02040503050406030204" pitchFamily="18" charset="0"/>
                                         <a:ea typeface="Cambria Math" panose="02040503050406030204" pitchFamily="18" charset="0"/>
                                       </a:rPr>
-                                      <m:t>𝜔</m:t>
+                                      <m:t>𝑤</m:t>
                                     </m:r>
                                   </m:e>
                                   <m:sub>
@@ -20437,11 +20437,11 @@
                                       <m:t>2</m:t>
                                     </m:r>
                                     <m:r>
-                                      <a:rPr lang="en-US" altLang="zh-TW" sz="2400" i="1">
+                                      <a:rPr lang="en-US" altLang="zh-TW" sz="2400" b="0" i="1" smtClean="0">
                                         <a:latin typeface="Cambria Math" panose="02040503050406030204" pitchFamily="18" charset="0"/>
                                         <a:ea typeface="Cambria Math" panose="02040503050406030204" pitchFamily="18" charset="0"/>
                                       </a:rPr>
-                                      <m:t>𝜔</m:t>
+                                      <m:t>𝑤</m:t>
                                     </m:r>
                                   </m:e>
                                   <m:sub>
@@ -20525,7 +20525,7 @@
                           <a:rPr lang="en-US" altLang="zh-TW" sz="2400" b="0" i="1" smtClean="0">
                             <a:latin typeface="Cambria Math" panose="02040503050406030204" pitchFamily="18" charset="0"/>
                           </a:rPr>
-                          <m:t>𝜔</m:t>
+                          <m:t>𝑤</m:t>
                         </m:r>
                       </m:e>
                       <m:sub>
@@ -20585,11 +20585,11 @@
                                       <m:t>2</m:t>
                                     </m:r>
                                     <m:r>
-                                      <a:rPr lang="en-US" altLang="zh-TW" sz="2400" i="1">
+                                      <a:rPr lang="en-US" altLang="zh-TW" sz="2400" b="0" i="1" smtClean="0">
                                         <a:latin typeface="Cambria Math" panose="02040503050406030204" pitchFamily="18" charset="0"/>
                                         <a:ea typeface="Cambria Math" panose="02040503050406030204" pitchFamily="18" charset="0"/>
                                       </a:rPr>
-                                      <m:t>𝜔</m:t>
+                                      <m:t>𝑤</m:t>
                                     </m:r>
                                   </m:e>
                                   <m:sub>
@@ -20615,11 +20615,11 @@
                                   </m:sSubPr>
                                   <m:e>
                                     <m:r>
-                                      <a:rPr lang="en-US" altLang="zh-TW" sz="2400" i="1">
+                                      <a:rPr lang="en-US" altLang="zh-TW" sz="2400" b="0" i="1" smtClean="0">
                                         <a:latin typeface="Cambria Math" panose="02040503050406030204" pitchFamily="18" charset="0"/>
                                         <a:ea typeface="Cambria Math" panose="02040503050406030204" pitchFamily="18" charset="0"/>
                                       </a:rPr>
-                                      <m:t>𝜔</m:t>
+                                      <m:t>𝑤</m:t>
                                     </m:r>
                                   </m:e>
                                   <m:sub>
@@ -20762,11 +20762,11 @@
                           </m:sSubPr>
                           <m:e>
                             <m:r>
-                              <a:rPr lang="en-US" altLang="zh-TW" sz="2400" i="1">
+                              <a:rPr lang="en-US" altLang="zh-TW" sz="2400" b="0" i="1" smtClean="0">
                                 <a:latin typeface="Cambria Math" panose="02040503050406030204" pitchFamily="18" charset="0"/>
                                 <a:ea typeface="Cambria Math" panose="02040503050406030204" pitchFamily="18" charset="0"/>
                               </a:rPr>
-                              <m:t>𝜔</m:t>
+                              <m:t>𝑤</m:t>
                             </m:r>
                           </m:e>
                           <m:sub>
@@ -20797,11 +20797,11 @@
                           </m:sSubPr>
                           <m:e>
                             <m:r>
-                              <a:rPr lang="en-US" altLang="zh-TW" sz="2400" i="1">
+                              <a:rPr lang="en-US" altLang="zh-TW" sz="2400" b="0" i="1" smtClean="0">
                                 <a:latin typeface="Cambria Math" panose="02040503050406030204" pitchFamily="18" charset="0"/>
                                 <a:ea typeface="Cambria Math" panose="02040503050406030204" pitchFamily="18" charset="0"/>
                               </a:rPr>
-                              <m:t>𝜔</m:t>
+                              <m:t>𝑤</m:t>
                             </m:r>
                           </m:e>
                           <m:sub>
@@ -20924,11 +20924,11 @@
                       </m:sSubSupPr>
                       <m:e>
                         <m:r>
-                          <a:rPr lang="en-US" altLang="zh-TW" sz="2400" i="1">
+                          <a:rPr lang="en-US" altLang="zh-TW" sz="2400" b="0" i="1" smtClean="0">
                             <a:latin typeface="Cambria Math" panose="02040503050406030204" pitchFamily="18" charset="0"/>
                             <a:ea typeface="Cambria Math" panose="02040503050406030204" pitchFamily="18" charset="0"/>
                           </a:rPr>
-                          <m:t>𝜔</m:t>
+                          <m:t>𝑤</m:t>
                         </m:r>
                       </m:e>
                       <m:sub>
@@ -20980,11 +20980,11 @@
                       </m:sSubSupPr>
                       <m:e>
                         <m:r>
-                          <a:rPr lang="en-US" altLang="zh-TW" sz="2400" i="1">
+                          <a:rPr lang="en-US" altLang="zh-TW" sz="2400" b="0" i="1" smtClean="0">
                             <a:latin typeface="Cambria Math" panose="02040503050406030204" pitchFamily="18" charset="0"/>
                             <a:ea typeface="Cambria Math" panose="02040503050406030204" pitchFamily="18" charset="0"/>
                           </a:rPr>
-                          <m:t>𝜔</m:t>
+                          <m:t>𝑤</m:t>
                         </m:r>
                       </m:e>
                       <m:sub>
@@ -21068,7 +21068,7 @@
             </p:txBody>
           </p:sp>
         </mc:Choice>
-        <mc:Fallback xmlns="">
+        <mc:Fallback>
           <p:sp>
             <p:nvSpPr>
               <p:cNvPr id="3" name="Content Placeholder 2">
@@ -21665,8 +21665,8 @@
           <a:chExt cx="0" cy="0"/>
         </a:xfrm>
       </p:grpSpPr>
-      <mc:AlternateContent xmlns:mc="http://schemas.openxmlformats.org/markup-compatibility/2006" xmlns:a14="http://schemas.microsoft.com/office/drawing/2010/main">
-        <mc:Choice Requires="a14">
+      <mc:AlternateContent xmlns:mc="http://schemas.openxmlformats.org/markup-compatibility/2006">
+        <mc:Choice xmlns:a14="http://schemas.microsoft.com/office/drawing/2010/main" Requires="a14">
           <p:sp>
             <p:nvSpPr>
               <p:cNvPr id="3" name="Content Placeholder 2">
@@ -21893,10 +21893,10 @@
                               <m:t> </m:t>
                             </m:r>
                             <m:r>
-                              <a:rPr lang="en-US" altLang="zh-TW" sz="2400" i="1">
+                              <a:rPr lang="en-US" altLang="zh-TW" sz="2400" b="0" i="1" smtClean="0">
                                 <a:latin typeface="Cambria Math" panose="02040503050406030204" pitchFamily="18" charset="0"/>
                               </a:rPr>
-                              <m:t>𝜔</m:t>
+                              <m:t>𝑤</m:t>
                             </m:r>
                           </m:e>
                           <m:sub>
@@ -21949,10 +21949,10 @@
                           </m:sSubPr>
                           <m:e>
                             <m:r>
-                              <a:rPr lang="en-US" altLang="zh-TW" sz="2400" i="1">
+                              <a:rPr lang="en-US" altLang="zh-TW" sz="2400" b="0" i="1" smtClean="0">
                                 <a:latin typeface="Cambria Math" panose="02040503050406030204" pitchFamily="18" charset="0"/>
                               </a:rPr>
-                              <m:t>𝜔</m:t>
+                              <m:t>𝑤</m:t>
                             </m:r>
                           </m:e>
                           <m:sub>
@@ -22416,7 +22416,7 @@
                               <a:rPr lang="en-US" altLang="zh-TW" sz="2400" b="0" i="1" smtClean="0">
                                 <a:latin typeface="Cambria Math" panose="02040503050406030204" pitchFamily="18" charset="0"/>
                               </a:rPr>
-                              <m:t>𝜔</m:t>
+                              <m:t>𝑤</m:t>
                             </m:r>
                           </m:e>
                           <m:sub>
@@ -22447,7 +22447,7 @@
                               <a:rPr lang="en-US" altLang="zh-TW" sz="2400" b="0" i="1" smtClean="0">
                                 <a:latin typeface="Cambria Math" panose="02040503050406030204" pitchFamily="18" charset="0"/>
                               </a:rPr>
-                              <m:t>𝜔</m:t>
+                              <m:t>𝑤</m:t>
                             </m:r>
                           </m:e>
                           <m:sub>
@@ -22555,7 +22555,7 @@
             </p:txBody>
           </p:sp>
         </mc:Choice>
-        <mc:Fallback xmlns="">
+        <mc:Fallback>
           <p:sp>
             <p:nvSpPr>
               <p:cNvPr id="3" name="Content Placeholder 2">
@@ -23299,8 +23299,8 @@
           <a:chExt cx="0" cy="0"/>
         </a:xfrm>
       </p:grpSpPr>
-      <mc:AlternateContent xmlns:mc="http://schemas.openxmlformats.org/markup-compatibility/2006" xmlns:a14="http://schemas.microsoft.com/office/drawing/2010/main">
-        <mc:Choice Requires="a14">
+      <mc:AlternateContent xmlns:mc="http://schemas.openxmlformats.org/markup-compatibility/2006">
+        <mc:Choice xmlns:a14="http://schemas.microsoft.com/office/drawing/2010/main" Requires="a14">
           <p:sp>
             <p:nvSpPr>
               <p:cNvPr id="3" name="Content Placeholder 2">
@@ -23531,10 +23531,10 @@
                             </m:sSubPr>
                             <m:e>
                               <m:r>
-                                <a:rPr lang="en-US" altLang="zh-TW" sz="2400" i="1">
+                                <a:rPr lang="en-US" altLang="zh-TW" sz="2400" b="0" i="1" smtClean="0">
                                   <a:latin typeface="Cambria Math" panose="02040503050406030204" pitchFamily="18" charset="0"/>
                                 </a:rPr>
-                                <m:t>𝜔</m:t>
+                                <m:t>𝑤</m:t>
                               </m:r>
                             </m:e>
                             <m:sub>
@@ -23562,10 +23562,10 @@
                             </m:sSubPr>
                             <m:e>
                               <m:r>
-                                <a:rPr lang="en-US" altLang="zh-TW" sz="2400" i="1">
+                                <a:rPr lang="en-US" altLang="zh-TW" sz="2400" b="0" i="1" smtClean="0">
                                   <a:latin typeface="Cambria Math" panose="02040503050406030204" pitchFamily="18" charset="0"/>
                                 </a:rPr>
-                                <m:t>𝜔</m:t>
+                                <m:t>𝑤</m:t>
                               </m:r>
                             </m:e>
                             <m:sub>
@@ -23653,10 +23653,10 @@
                             </m:sSubPr>
                             <m:e>
                               <m:r>
-                                <a:rPr lang="en-US" altLang="zh-TW" sz="2400" i="1">
+                                <a:rPr lang="en-US" altLang="zh-TW" sz="2400" b="0" i="1" smtClean="0">
                                   <a:latin typeface="Cambria Math" panose="02040503050406030204" pitchFamily="18" charset="0"/>
                                 </a:rPr>
-                                <m:t>𝜔</m:t>
+                                <m:t>𝑤</m:t>
                               </m:r>
                             </m:e>
                             <m:sub>
@@ -23684,10 +23684,10 @@
                             </m:sSubPr>
                             <m:e>
                               <m:r>
-                                <a:rPr lang="en-US" altLang="zh-TW" sz="2400" i="1">
+                                <a:rPr lang="en-US" altLang="zh-TW" sz="2400" b="0" i="1" smtClean="0">
                                   <a:latin typeface="Cambria Math" panose="02040503050406030204" pitchFamily="18" charset="0"/>
                                 </a:rPr>
-                                <m:t>𝜔</m:t>
+                                <m:t>𝑤</m:t>
                               </m:r>
                             </m:e>
                             <m:sub>
@@ -23879,7 +23879,7 @@
             </p:txBody>
           </p:sp>
         </mc:Choice>
-        <mc:Fallback xmlns="">
+        <mc:Fallback>
           <p:sp>
             <p:nvSpPr>
               <p:cNvPr id="3" name="Content Placeholder 2">
@@ -24527,7 +24527,11 @@
                                           </p:stCondLst>
                                         </p:cTn>
                                         <p:tgtEl>
-                                          <p:spTgt spid="13"/>
+                                          <p:spTgt spid="3">
+                                            <p:txEl>
+                                              <p:pRg st="6" end="6"/>
+                                            </p:txEl>
+                                          </p:spTgt>
                                         </p:tgtEl>
                                         <p:attrNameLst>
                                           <p:attrName>style.visibility</p:attrName>
@@ -24541,7 +24545,11 @@
                                       <p:cBhvr>
                                         <p:cTn id="26" dur="500"/>
                                         <p:tgtEl>
-                                          <p:spTgt spid="13"/>
+                                          <p:spTgt spid="3">
+                                            <p:txEl>
+                                              <p:pRg st="6" end="6"/>
+                                            </p:txEl>
+                                          </p:spTgt>
                                         </p:tgtEl>
                                       </p:cBhvr>
                                     </p:animEffect>
@@ -24564,7 +24572,7 @@
                                         <p:tgtEl>
                                           <p:spTgt spid="3">
                                             <p:txEl>
-                                              <p:pRg st="6" end="6"/>
+                                              <p:pRg st="8" end="8"/>
                                             </p:txEl>
                                           </p:spTgt>
                                         </p:tgtEl>
@@ -24582,7 +24590,7 @@
                                         <p:tgtEl>
                                           <p:spTgt spid="3">
                                             <p:txEl>
-                                              <p:pRg st="6" end="6"/>
+                                              <p:pRg st="8" end="8"/>
                                             </p:txEl>
                                           </p:spTgt>
                                         </p:tgtEl>
@@ -24607,7 +24615,7 @@
                                         <p:tgtEl>
                                           <p:spTgt spid="3">
                                             <p:txEl>
-                                              <p:pRg st="8" end="8"/>
+                                              <p:pRg st="9" end="9"/>
                                             </p:txEl>
                                           </p:spTgt>
                                         </p:tgtEl>
@@ -24625,7 +24633,7 @@
                                         <p:tgtEl>
                                           <p:spTgt spid="3">
                                             <p:txEl>
-                                              <p:pRg st="8" end="8"/>
+                                              <p:pRg st="9" end="9"/>
                                             </p:txEl>
                                           </p:spTgt>
                                         </p:tgtEl>
@@ -24648,11 +24656,7 @@
                                           </p:stCondLst>
                                         </p:cTn>
                                         <p:tgtEl>
-                                          <p:spTgt spid="3">
-                                            <p:txEl>
-                                              <p:pRg st="9" end="9"/>
-                                            </p:txEl>
-                                          </p:spTgt>
+                                          <p:spTgt spid="13"/>
                                         </p:tgtEl>
                                         <p:attrNameLst>
                                           <p:attrName>style.visibility</p:attrName>
@@ -24666,11 +24670,7 @@
                                       <p:cBhvr>
                                         <p:cTn id="35" dur="500"/>
                                         <p:tgtEl>
-                                          <p:spTgt spid="3">
-                                            <p:txEl>
-                                              <p:pRg st="9" end="9"/>
-                                            </p:txEl>
-                                          </p:spTgt>
+                                          <p:spTgt spid="13"/>
                                         </p:tgtEl>
                                       </p:cBhvr>
                                     </p:animEffect>
@@ -24884,10 +24884,10 @@
                               <m:t> </m:t>
                             </m:r>
                             <m:r>
-                              <a:rPr lang="en-US" altLang="zh-TW" sz="2000" i="1">
+                              <a:rPr lang="en-US" altLang="zh-TW" sz="2000" b="0" i="1" smtClean="0">
                                 <a:latin typeface="Cambria Math" panose="02040503050406030204" pitchFamily="18" charset="0"/>
                               </a:rPr>
-                              <m:t>𝜔</m:t>
+                              <m:t>𝑤</m:t>
                             </m:r>
                           </m:e>
                           <m:sub>
@@ -24940,10 +24940,10 @@
                           </m:sSubPr>
                           <m:e>
                             <m:r>
-                              <a:rPr lang="en-US" altLang="zh-TW" sz="2000" i="1">
+                              <a:rPr lang="en-US" altLang="zh-TW" sz="2000" b="0" i="1" smtClean="0">
                                 <a:latin typeface="Cambria Math" panose="02040503050406030204" pitchFamily="18" charset="0"/>
                               </a:rPr>
-                              <m:t>𝜔</m:t>
+                              <m:t>𝑤</m:t>
                             </m:r>
                           </m:e>
                           <m:sub>
@@ -25819,7 +25819,7 @@
                             <a:rPr lang="en-US" altLang="zh-TW" sz="2400" b="0" i="1" smtClean="0">
                               <a:latin typeface="Cambria Math" panose="02040503050406030204" pitchFamily="18" charset="0"/>
                             </a:rPr>
-                            <m:t>𝜔</m:t>
+                            <m:t>𝑤</m:t>
                           </m:r>
                         </m:e>
                         <m:sub>
@@ -25850,7 +25850,7 @@
                             <a:rPr lang="en-US" altLang="zh-TW" sz="2400" b="0" i="1" smtClean="0">
                               <a:latin typeface="Cambria Math" panose="02040503050406030204" pitchFamily="18" charset="0"/>
                             </a:rPr>
-                            <m:t>𝜔</m:t>
+                            <m:t>𝑤</m:t>
                           </m:r>
                         </m:e>
                         <m:sub>
@@ -25945,10 +25945,10 @@
                         </m:sSubPr>
                         <m:e>
                           <m:r>
-                            <a:rPr lang="en-US" altLang="zh-TW" sz="2400" i="1">
+                            <a:rPr lang="en-US" altLang="zh-TW" sz="2400" b="0" i="1" smtClean="0">
                               <a:latin typeface="Cambria Math" panose="02040503050406030204" pitchFamily="18" charset="0"/>
                             </a:rPr>
-                            <m:t>𝜔</m:t>
+                            <m:t>𝑤</m:t>
                           </m:r>
                         </m:e>
                         <m:sub>
@@ -26075,10 +26075,10 @@
                         </m:sSubPr>
                         <m:e>
                           <m:r>
-                            <a:rPr lang="en-US" altLang="zh-TW" sz="2400" i="1">
+                            <a:rPr lang="en-US" altLang="zh-TW" sz="2400" b="0" i="1" smtClean="0">
                               <a:latin typeface="Cambria Math" panose="02040503050406030204" pitchFamily="18" charset="0"/>
                             </a:rPr>
-                            <m:t>𝜔</m:t>
+                            <m:t>𝑤</m:t>
                           </m:r>
                         </m:e>
                         <m:sub>
@@ -26919,8 +26919,8 @@
           <a:chExt cx="0" cy="0"/>
         </a:xfrm>
       </p:grpSpPr>
-      <mc:AlternateContent xmlns:mc="http://schemas.openxmlformats.org/markup-compatibility/2006" xmlns:a14="http://schemas.microsoft.com/office/drawing/2010/main">
-        <mc:Choice Requires="a14">
+      <mc:AlternateContent xmlns:mc="http://schemas.openxmlformats.org/markup-compatibility/2006">
+        <mc:Choice xmlns:a14="http://schemas.microsoft.com/office/drawing/2010/main" Requires="a14">
           <p:sp>
             <p:nvSpPr>
               <p:cNvPr id="3" name="Content Placeholder 2">
@@ -27112,10 +27112,10 @@
                                 <m:t> </m:t>
                               </m:r>
                               <m:r>
-                                <a:rPr lang="en-US" altLang="zh-TW" sz="2400" i="1">
+                                <a:rPr lang="en-US" altLang="zh-TW" sz="2400" b="0" i="1" smtClean="0">
                                   <a:latin typeface="Cambria Math" panose="02040503050406030204" pitchFamily="18" charset="0"/>
                                 </a:rPr>
-                                <m:t>𝜔</m:t>
+                                <m:t>𝑤</m:t>
                               </m:r>
                             </m:e>
                             <m:sub>
@@ -27168,10 +27168,10 @@
                             </m:sSubPr>
                             <m:e>
                               <m:r>
-                                <a:rPr lang="en-US" altLang="zh-TW" sz="2400" i="1">
+                                <a:rPr lang="en-US" altLang="zh-TW" sz="2400" b="0" i="1" smtClean="0">
                                   <a:latin typeface="Cambria Math" panose="02040503050406030204" pitchFamily="18" charset="0"/>
                                 </a:rPr>
-                                <m:t>𝜔</m:t>
+                                <m:t>𝑤</m:t>
                               </m:r>
                             </m:e>
                             <m:sub>
@@ -27485,7 +27485,7 @@
                                 <a:rPr lang="en-US" altLang="zh-TW" sz="2400" b="0" i="1" smtClean="0">
                                   <a:latin typeface="Cambria Math" panose="02040503050406030204" pitchFamily="18" charset="0"/>
                                 </a:rPr>
-                                <m:t>𝜔</m:t>
+                                <m:t>𝑤</m:t>
                               </m:r>
                             </m:e>
                             <m:sub>
@@ -27512,7 +27512,7 @@
                                 <a:rPr lang="en-US" altLang="zh-TW" sz="2400" b="0" i="1" smtClean="0">
                                   <a:latin typeface="Cambria Math" panose="02040503050406030204" pitchFamily="18" charset="0"/>
                                 </a:rPr>
-                                <m:t>𝜔</m:t>
+                                <m:t>𝑤</m:t>
                               </m:r>
                             </m:e>
                             <m:sub>
@@ -27647,10 +27647,10 @@
                             </m:sSubPr>
                             <m:e>
                               <m:r>
-                                <a:rPr lang="en-US" altLang="zh-TW" sz="2400" i="1">
+                                <a:rPr lang="en-US" altLang="zh-TW" sz="2400" b="0" i="1" smtClean="0">
                                   <a:latin typeface="Cambria Math" panose="02040503050406030204" pitchFamily="18" charset="0"/>
                                 </a:rPr>
-                                <m:t>𝜔</m:t>
+                                <m:t>𝑤</m:t>
                               </m:r>
                             </m:e>
                             <m:sub>
@@ -27674,10 +27674,10 @@
                             </m:sSubPr>
                             <m:e>
                               <m:r>
-                                <a:rPr lang="en-US" altLang="zh-TW" sz="2400" i="1">
+                                <a:rPr lang="en-US" altLang="zh-TW" sz="2400" b="0" i="1" smtClean="0">
                                   <a:latin typeface="Cambria Math" panose="02040503050406030204" pitchFamily="18" charset="0"/>
                                 </a:rPr>
-                                <m:t>𝜔</m:t>
+                                <m:t>𝑤</m:t>
                               </m:r>
                             </m:e>
                             <m:sub>
@@ -27768,10 +27768,10 @@
                             </m:sSubPr>
                             <m:e>
                               <m:r>
-                                <a:rPr lang="en-US" altLang="zh-TW" sz="2400" i="1">
+                                <a:rPr lang="en-US" altLang="zh-TW" sz="2400" b="0" i="1" smtClean="0">
                                   <a:latin typeface="Cambria Math" panose="02040503050406030204" pitchFamily="18" charset="0"/>
                                 </a:rPr>
-                                <m:t>𝜔</m:t>
+                                <m:t>𝑤</m:t>
                               </m:r>
                             </m:e>
                             <m:sub>
@@ -27849,10 +27849,10 @@
                             </m:sSubPr>
                             <m:e>
                               <m:r>
-                                <a:rPr lang="en-US" altLang="zh-TW" sz="2400" i="1">
+                                <a:rPr lang="en-US" altLang="zh-TW" sz="2400" b="0" i="1" smtClean="0">
                                   <a:latin typeface="Cambria Math" panose="02040503050406030204" pitchFamily="18" charset="0"/>
                                 </a:rPr>
-                                <m:t>𝜔</m:t>
+                                <m:t>𝑤</m:t>
                               </m:r>
                             </m:e>
                             <m:sub>
@@ -27925,7 +27925,7 @@
             </p:txBody>
           </p:sp>
         </mc:Choice>
-        <mc:Fallback xmlns="">
+        <mc:Fallback>
           <p:sp>
             <p:nvSpPr>
               <p:cNvPr id="3" name="Content Placeholder 2">
@@ -28583,8 +28583,8 @@
           <a:chExt cx="0" cy="0"/>
         </a:xfrm>
       </p:grpSpPr>
-      <mc:AlternateContent xmlns:mc="http://schemas.openxmlformats.org/markup-compatibility/2006" xmlns:a14="http://schemas.microsoft.com/office/drawing/2010/main">
-        <mc:Choice Requires="a14">
+      <mc:AlternateContent xmlns:mc="http://schemas.openxmlformats.org/markup-compatibility/2006">
+        <mc:Choice xmlns:a14="http://schemas.microsoft.com/office/drawing/2010/main" Requires="a14">
           <p:sp>
             <p:nvSpPr>
               <p:cNvPr id="3" name="Content Placeholder 2">
@@ -28715,10 +28715,10 @@
                             </m:sSubPr>
                             <m:e>
                               <m:r>
-                                <a:rPr lang="en-US" altLang="zh-TW" sz="2400" i="1">
+                                <a:rPr lang="en-US" altLang="zh-TW" sz="2400" b="0" i="1" smtClean="0">
                                   <a:latin typeface="Cambria Math" panose="02040503050406030204" pitchFamily="18" charset="0"/>
                                 </a:rPr>
-                                <m:t>𝜔</m:t>
+                                <m:t>𝑤</m:t>
                               </m:r>
                             </m:e>
                             <m:sub>
@@ -28746,10 +28746,10 @@
                             </m:sSubPr>
                             <m:e>
                               <m:r>
-                                <a:rPr lang="en-US" altLang="zh-TW" sz="2400" i="1">
+                                <a:rPr lang="en-US" altLang="zh-TW" sz="2400" b="0" i="1" smtClean="0">
                                   <a:latin typeface="Cambria Math" panose="02040503050406030204" pitchFamily="18" charset="0"/>
                                 </a:rPr>
-                                <m:t>𝜔</m:t>
+                                <m:t>𝑤</m:t>
                               </m:r>
                             </m:e>
                             <m:sub>
@@ -28837,10 +28837,10 @@
                             </m:sSubPr>
                             <m:e>
                               <m:r>
-                                <a:rPr lang="en-US" altLang="zh-TW" sz="2400" i="1">
+                                <a:rPr lang="en-US" altLang="zh-TW" sz="2400" b="0" i="1" smtClean="0">
                                   <a:latin typeface="Cambria Math" panose="02040503050406030204" pitchFamily="18" charset="0"/>
                                 </a:rPr>
-                                <m:t>𝜔</m:t>
+                                <m:t>𝑤</m:t>
                               </m:r>
                             </m:e>
                             <m:sub>
@@ -28868,10 +28868,10 @@
                             </m:sSubPr>
                             <m:e>
                               <m:r>
-                                <a:rPr lang="en-US" altLang="zh-TW" sz="2400" i="1">
+                                <a:rPr lang="en-US" altLang="zh-TW" sz="2400" b="0" i="1" smtClean="0">
                                   <a:latin typeface="Cambria Math" panose="02040503050406030204" pitchFamily="18" charset="0"/>
                                 </a:rPr>
-                                <m:t>𝜔</m:t>
+                                <m:t>𝑤</m:t>
                               </m:r>
                             </m:e>
                             <m:sub>
@@ -29061,10 +29061,10 @@
                             </m:sSubPr>
                             <m:e>
                               <m:r>
-                                <a:rPr lang="en-US" altLang="zh-TW" sz="2400" i="1">
+                                <a:rPr lang="en-US" altLang="zh-TW" sz="2400" b="0" i="1" smtClean="0">
                                   <a:latin typeface="Cambria Math" panose="02040503050406030204" pitchFamily="18" charset="0"/>
                                 </a:rPr>
-                                <m:t>𝜔</m:t>
+                                <m:t>𝑤</m:t>
                               </m:r>
                             </m:e>
                             <m:sub>
@@ -29092,10 +29092,10 @@
                             </m:sSubPr>
                             <m:e>
                               <m:r>
-                                <a:rPr lang="en-US" altLang="zh-TW" sz="2400" i="1">
+                                <a:rPr lang="en-US" altLang="zh-TW" sz="2400" b="0" i="1" smtClean="0">
                                   <a:latin typeface="Cambria Math" panose="02040503050406030204" pitchFamily="18" charset="0"/>
                                 </a:rPr>
-                                <m:t>𝜔</m:t>
+                                <m:t>𝑤</m:t>
                               </m:r>
                             </m:e>
                             <m:sub>
@@ -29149,10 +29149,10 @@
                         </m:sSubPr>
                         <m:e>
                           <m:r>
-                            <a:rPr lang="en-US" altLang="zh-TW" sz="2400" i="1">
+                            <a:rPr lang="en-US" altLang="zh-TW" sz="2400" b="0" i="1" smtClean="0">
                               <a:latin typeface="Cambria Math" panose="02040503050406030204" pitchFamily="18" charset="0"/>
                             </a:rPr>
-                            <m:t>𝜔</m:t>
+                            <m:t>𝑤</m:t>
                           </m:r>
                         </m:e>
                         <m:sub>
@@ -29214,10 +29214,10 @@
                             </m:sSubPr>
                             <m:e>
                               <m:r>
-                                <a:rPr lang="en-US" altLang="zh-TW" sz="2400" i="1">
+                                <a:rPr lang="en-US" altLang="zh-TW" sz="2400" b="0" i="1" smtClean="0">
                                   <a:latin typeface="Cambria Math" panose="02040503050406030204" pitchFamily="18" charset="0"/>
                                 </a:rPr>
-                                <m:t>𝜔</m:t>
+                                <m:t>𝑤</m:t>
                               </m:r>
                             </m:e>
                             <m:sub>
@@ -29245,10 +29245,10 @@
                             </m:sSubPr>
                             <m:e>
                               <m:r>
-                                <a:rPr lang="en-US" altLang="zh-TW" sz="2400" i="1">
+                                <a:rPr lang="en-US" altLang="zh-TW" sz="2400" b="0" i="1" smtClean="0">
                                   <a:latin typeface="Cambria Math" panose="02040503050406030204" pitchFamily="18" charset="0"/>
                                 </a:rPr>
-                                <m:t>𝜔</m:t>
+                                <m:t>𝑤</m:t>
                               </m:r>
                             </m:e>
                             <m:sub>
@@ -29302,10 +29302,10 @@
                         </m:sSubPr>
                         <m:e>
                           <m:r>
-                            <a:rPr lang="en-US" altLang="zh-TW" sz="2400" i="1">
+                            <a:rPr lang="en-US" altLang="zh-TW" sz="2400" b="0" i="1" smtClean="0">
                               <a:latin typeface="Cambria Math" panose="02040503050406030204" pitchFamily="18" charset="0"/>
                             </a:rPr>
-                            <m:t>𝜔</m:t>
+                            <m:t>𝑤</m:t>
                           </m:r>
                         </m:e>
                         <m:sub>
@@ -29367,10 +29367,10 @@
                             </m:sSubPr>
                             <m:e>
                               <m:r>
-                                <a:rPr lang="en-US" altLang="zh-TW" sz="2400" i="1">
+                                <a:rPr lang="en-US" altLang="zh-TW" sz="2400" b="0" i="1" smtClean="0">
                                   <a:latin typeface="Cambria Math" panose="02040503050406030204" pitchFamily="18" charset="0"/>
                                 </a:rPr>
-                                <m:t>𝜔</m:t>
+                                <m:t>𝑤</m:t>
                               </m:r>
                             </m:e>
                             <m:sub>
@@ -29398,10 +29398,10 @@
                             </m:sSubPr>
                             <m:e>
                               <m:r>
-                                <a:rPr lang="en-US" altLang="zh-TW" sz="2400" i="1">
+                                <a:rPr lang="en-US" altLang="zh-TW" sz="2400" b="0" i="1" smtClean="0">
                                   <a:latin typeface="Cambria Math" panose="02040503050406030204" pitchFamily="18" charset="0"/>
                                 </a:rPr>
-                                <m:t>𝜔</m:t>
+                                <m:t>𝑤</m:t>
                               </m:r>
                             </m:e>
                             <m:sub>
@@ -29545,10 +29545,10 @@
                             </m:sSubPr>
                             <m:e>
                               <m:r>
-                                <a:rPr lang="en-US" altLang="zh-TW" sz="2400" i="1">
+                                <a:rPr lang="en-US" altLang="zh-TW" sz="2400" b="0" i="1" smtClean="0">
                                   <a:latin typeface="Cambria Math" panose="02040503050406030204" pitchFamily="18" charset="0"/>
                                 </a:rPr>
-                                <m:t>𝜔</m:t>
+                                <m:t>𝑤</m:t>
                               </m:r>
                             </m:e>
                             <m:sub>
@@ -29576,10 +29576,10 @@
                             </m:sSubPr>
                             <m:e>
                               <m:r>
-                                <a:rPr lang="en-US" altLang="zh-TW" sz="2400" i="1">
+                                <a:rPr lang="en-US" altLang="zh-TW" sz="2400" b="0" i="1" smtClean="0">
                                   <a:latin typeface="Cambria Math" panose="02040503050406030204" pitchFamily="18" charset="0"/>
                                 </a:rPr>
-                                <m:t>𝜔</m:t>
+                                <m:t>𝑤</m:t>
                               </m:r>
                             </m:e>
                             <m:sub>
@@ -29667,10 +29667,10 @@
                             </m:sSubPr>
                             <m:e>
                               <m:r>
-                                <a:rPr lang="en-US" altLang="zh-TW" sz="2400" i="1">
+                                <a:rPr lang="en-US" altLang="zh-TW" sz="2400" b="0" i="1" smtClean="0">
                                   <a:latin typeface="Cambria Math" panose="02040503050406030204" pitchFamily="18" charset="0"/>
                                 </a:rPr>
-                                <m:t>𝜔</m:t>
+                                <m:t>𝑤</m:t>
                               </m:r>
                             </m:e>
                             <m:sub>
@@ -29698,10 +29698,10 @@
                             </m:sSubPr>
                             <m:e>
                               <m:r>
-                                <a:rPr lang="en-US" altLang="zh-TW" sz="2400" i="1">
+                                <a:rPr lang="en-US" altLang="zh-TW" sz="2400" b="0" i="1" smtClean="0">
                                   <a:latin typeface="Cambria Math" panose="02040503050406030204" pitchFamily="18" charset="0"/>
                                 </a:rPr>
-                                <m:t>𝜔</m:t>
+                                <m:t>𝑤</m:t>
                               </m:r>
                             </m:e>
                             <m:sub>
@@ -29907,7 +29907,7 @@
             </p:txBody>
           </p:sp>
         </mc:Choice>
-        <mc:Fallback xmlns="">
+        <mc:Fallback>
           <p:sp>
             <p:nvSpPr>
               <p:cNvPr id="3" name="Content Placeholder 2">
@@ -30651,8 +30651,8 @@
           <a:chExt cx="0" cy="0"/>
         </a:xfrm>
       </p:grpSpPr>
-      <mc:AlternateContent xmlns:mc="http://schemas.openxmlformats.org/markup-compatibility/2006" xmlns:a14="http://schemas.microsoft.com/office/drawing/2010/main">
-        <mc:Choice Requires="a14">
+      <mc:AlternateContent xmlns:mc="http://schemas.openxmlformats.org/markup-compatibility/2006">
+        <mc:Choice xmlns:a14="http://schemas.microsoft.com/office/drawing/2010/main" Requires="a14">
           <p:sp>
             <p:nvSpPr>
               <p:cNvPr id="3" name="Content Placeholder 2">
@@ -30723,7 +30723,7 @@
                               <a:rPr lang="en-US" altLang="zh-TW" sz="2400" b="0" i="1" smtClean="0">
                                 <a:latin typeface="Cambria Math" panose="02040503050406030204" pitchFamily="18" charset="0"/>
                               </a:rPr>
-                              <m:t>𝜔</m:t>
+                              <m:t>𝑤</m:t>
                             </m:r>
                           </m:e>
                           <m:sub>
@@ -30754,7 +30754,7 @@
                               <a:rPr lang="en-US" altLang="zh-TW" sz="2400" b="0" i="1" smtClean="0">
                                 <a:latin typeface="Cambria Math" panose="02040503050406030204" pitchFamily="18" charset="0"/>
                               </a:rPr>
-                              <m:t>𝜔</m:t>
+                              <m:t>𝑤</m:t>
                             </m:r>
                           </m:e>
                           <m:sub>
@@ -31050,7 +31050,7 @@
             </p:txBody>
           </p:sp>
         </mc:Choice>
-        <mc:Fallback xmlns="">
+        <mc:Fallback>
           <p:sp>
             <p:nvSpPr>
               <p:cNvPr id="3" name="Content Placeholder 2">
@@ -31812,8 +31812,8 @@
           <a:chExt cx="0" cy="0"/>
         </a:xfrm>
       </p:grpSpPr>
-      <mc:AlternateContent xmlns:mc="http://schemas.openxmlformats.org/markup-compatibility/2006" xmlns:a14="http://schemas.microsoft.com/office/drawing/2010/main">
-        <mc:Choice Requires="a14">
+      <mc:AlternateContent xmlns:mc="http://schemas.openxmlformats.org/markup-compatibility/2006">
+        <mc:Choice xmlns:a14="http://schemas.microsoft.com/office/drawing/2010/main" Requires="a14">
           <p:sp>
             <p:nvSpPr>
               <p:cNvPr id="3" name="Content Placeholder 2">
@@ -31954,10 +31954,10 @@
                         </m:sSubPr>
                         <m:e>
                           <m:r>
-                            <a:rPr lang="en-US" altLang="zh-TW" sz="2400" i="1" dirty="0">
+                            <a:rPr lang="en-US" altLang="zh-TW" sz="2400" b="0" i="1" dirty="0" smtClean="0">
                               <a:latin typeface="Cambria Math" panose="02040503050406030204" pitchFamily="18" charset="0"/>
                             </a:rPr>
-                            <m:t>𝜔</m:t>
+                            <m:t>𝑤</m:t>
                           </m:r>
                         </m:e>
                         <m:sub>
@@ -32010,10 +32010,10 @@
                         </m:sSubPr>
                         <m:e>
                           <m:r>
-                            <a:rPr lang="en-US" altLang="zh-TW" sz="2400" i="1" dirty="0">
+                            <a:rPr lang="en-US" altLang="zh-TW" sz="2400" b="0" i="1" dirty="0" smtClean="0">
                               <a:latin typeface="Cambria Math" panose="02040503050406030204" pitchFamily="18" charset="0"/>
                             </a:rPr>
-                            <m:t>𝜔</m:t>
+                            <m:t>𝑤</m:t>
                           </m:r>
                         </m:e>
                         <m:sub>
@@ -32219,7 +32219,7 @@
                           <a:rPr lang="en-US" altLang="zh-TW" sz="2000" b="0" i="1" smtClean="0">
                             <a:latin typeface="Cambria Math" panose="02040503050406030204" pitchFamily="18" charset="0"/>
                           </a:rPr>
-                          <m:t>𝜔</m:t>
+                          <m:t>𝑤</m:t>
                         </m:r>
                       </m:e>
                       <m:sub>
@@ -32481,7 +32481,7 @@
                               <a:rPr lang="en-US" altLang="zh-TW" sz="2000" b="0" i="1" smtClean="0">
                                 <a:latin typeface="Cambria Math" panose="02040503050406030204" pitchFamily="18" charset="0"/>
                               </a:rPr>
-                              <m:t>𝜔</m:t>
+                              <m:t>𝑤</m:t>
                             </m:r>
                           </m:e>
                           <m:sub>
@@ -32520,13 +32520,13 @@
             </p:txBody>
           </p:sp>
         </mc:Choice>
-        <mc:Fallback xmlns="">
+        <mc:Fallback>
           <p:sp>
             <p:nvSpPr>
               <p:cNvPr id="3" name="Content Placeholder 2">
                 <a:extLst>
                   <a:ext uri="{FF2B5EF4-FFF2-40B4-BE49-F238E27FC236}">
-                    <a16:creationId xmlns:a16="http://schemas.microsoft.com/office/drawing/2014/main" id="{C9545255-32A5-0F71-BA7B-FD83F0659403}"/>
+                    <a16:creationId xmlns:a16="http://schemas.microsoft.com/office/drawing/2014/main" id="{1B9BB718-BBB5-F762-857C-4667E87FBDC9}"/>
                   </a:ext>
                 </a:extLst>
               </p:cNvPr>
@@ -33367,8 +33367,8 @@
           <a:chExt cx="0" cy="0"/>
         </a:xfrm>
       </p:grpSpPr>
-      <mc:AlternateContent xmlns:mc="http://schemas.openxmlformats.org/markup-compatibility/2006" xmlns:a14="http://schemas.microsoft.com/office/drawing/2010/main">
-        <mc:Choice Requires="a14">
+      <mc:AlternateContent xmlns:mc="http://schemas.openxmlformats.org/markup-compatibility/2006">
+        <mc:Choice xmlns:a14="http://schemas.microsoft.com/office/drawing/2010/main" Requires="a14">
           <p:sp>
             <p:nvSpPr>
               <p:cNvPr id="3" name="Content Placeholder 2">
@@ -33516,7 +33516,7 @@
                           <a:rPr lang="en-US" altLang="zh-TW" sz="2400" b="0" i="1" smtClean="0">
                             <a:latin typeface="Cambria Math" panose="02040503050406030204" pitchFamily="18" charset="0"/>
                           </a:rPr>
-                          <m:t>𝜔</m:t>
+                          <m:t>𝑤</m:t>
                         </m:r>
                       </m:e>
                       <m:sub>
@@ -33546,10 +33546,10 @@
                       </m:sSubPr>
                       <m:e>
                         <m:r>
-                          <a:rPr lang="en-US" altLang="zh-TW" sz="2400" i="1">
+                          <a:rPr lang="en-US" altLang="zh-TW" sz="2400" b="0" i="1" smtClean="0">
                             <a:latin typeface="Cambria Math" panose="02040503050406030204" pitchFamily="18" charset="0"/>
                           </a:rPr>
-                          <m:t>𝜔</m:t>
+                          <m:t>𝑤</m:t>
                         </m:r>
                       </m:e>
                       <m:sub>
@@ -33763,10 +33763,10 @@
                                 <m:t> </m:t>
                               </m:r>
                               <m:r>
-                                <a:rPr lang="en-US" altLang="zh-TW" sz="2400" i="1">
+                                <a:rPr lang="en-US" altLang="zh-TW" sz="2400" b="0" i="1" smtClean="0">
                                   <a:latin typeface="Cambria Math" panose="02040503050406030204" pitchFamily="18" charset="0"/>
                                 </a:rPr>
-                                <m:t>𝜔</m:t>
+                                <m:t>𝑤</m:t>
                               </m:r>
                             </m:e>
                             <m:sub>
@@ -33819,10 +33819,10 @@
                             </m:sSubPr>
                             <m:e>
                               <m:r>
-                                <a:rPr lang="en-US" altLang="zh-TW" sz="2400" i="1">
+                                <a:rPr lang="en-US" altLang="zh-TW" sz="2400" b="0" i="1" smtClean="0">
                                   <a:latin typeface="Cambria Math" panose="02040503050406030204" pitchFamily="18" charset="0"/>
                                 </a:rPr>
-                                <m:t>𝜔</m:t>
+                                <m:t>𝑤</m:t>
                               </m:r>
                             </m:e>
                             <m:sub>
@@ -34147,7 +34147,7 @@
                                 <a:rPr lang="en-US" altLang="zh-TW" sz="2400" b="0" i="1" smtClean="0">
                                   <a:latin typeface="Cambria Math" panose="02040503050406030204" pitchFamily="18" charset="0"/>
                                 </a:rPr>
-                                <m:t>𝜔</m:t>
+                                <m:t>𝑤</m:t>
                               </m:r>
                             </m:e>
                             <m:sub>
@@ -34178,7 +34178,7 @@
                                 <a:rPr lang="en-US" altLang="zh-TW" sz="2400" b="0" i="1" smtClean="0">
                                   <a:latin typeface="Cambria Math" panose="02040503050406030204" pitchFamily="18" charset="0"/>
                                 </a:rPr>
-                                <m:t>𝜔</m:t>
+                                <m:t>𝑤</m:t>
                               </m:r>
                             </m:e>
                             <m:sub>
@@ -34365,7 +34365,7 @@
             </p:txBody>
           </p:sp>
         </mc:Choice>
-        <mc:Fallback xmlns="">
+        <mc:Fallback>
           <p:sp>
             <p:nvSpPr>
               <p:cNvPr id="3" name="Content Placeholder 2">
@@ -35066,8 +35066,8 @@
           <a:chExt cx="0" cy="0"/>
         </a:xfrm>
       </p:grpSpPr>
-      <mc:AlternateContent xmlns:mc="http://schemas.openxmlformats.org/markup-compatibility/2006" xmlns:a14="http://schemas.microsoft.com/office/drawing/2010/main">
-        <mc:Choice Requires="a14">
+      <mc:AlternateContent xmlns:mc="http://schemas.openxmlformats.org/markup-compatibility/2006">
+        <mc:Choice xmlns:a14="http://schemas.microsoft.com/office/drawing/2010/main" Requires="a14">
           <p:sp>
             <p:nvSpPr>
               <p:cNvPr id="3" name="Content Placeholder 2">
@@ -35243,10 +35243,10 @@
                         </m:sSubPr>
                         <m:e>
                           <m:r>
-                            <a:rPr lang="en-US" altLang="zh-TW" sz="2400" i="1" dirty="0">
+                            <a:rPr lang="en-US" altLang="zh-TW" sz="2400" b="0" i="1" dirty="0" smtClean="0">
                               <a:latin typeface="Cambria Math" panose="02040503050406030204" pitchFamily="18" charset="0"/>
                             </a:rPr>
-                            <m:t>𝜔</m:t>
+                            <m:t>𝑤</m:t>
                           </m:r>
                         </m:e>
                         <m:sub>
@@ -35302,7 +35302,7 @@
                             <a:rPr lang="en-US" altLang="zh-TW" sz="2400" b="0" i="1" dirty="0" smtClean="0">
                               <a:latin typeface="Cambria Math" panose="02040503050406030204" pitchFamily="18" charset="0"/>
                             </a:rPr>
-                            <m:t>𝜔</m:t>
+                            <m:t>𝑤</m:t>
                           </m:r>
                         </m:e>
                         <m:sub>
@@ -35433,7 +35433,7 @@
                                 <a:rPr lang="en-US" altLang="zh-TW" sz="2400" b="0" i="1" smtClean="0">
                                   <a:latin typeface="Cambria Math" panose="02040503050406030204" pitchFamily="18" charset="0"/>
                                 </a:rPr>
-                                <m:t>𝜔</m:t>
+                                <m:t>𝑤</m:t>
                               </m:r>
                             </m:e>
                             <m:sub>
@@ -35472,10 +35472,10 @@
                             </m:sSubPr>
                             <m:e>
                               <m:r>
-                                <a:rPr lang="en-US" altLang="zh-TW" sz="2400" i="1">
+                                <a:rPr lang="en-US" altLang="zh-TW" sz="2400" b="0" i="1" smtClean="0">
                                   <a:latin typeface="Cambria Math" panose="02040503050406030204" pitchFamily="18" charset="0"/>
                                 </a:rPr>
-                                <m:t>𝜔</m:t>
+                                <m:t>𝑤</m:t>
                               </m:r>
                             </m:e>
                             <m:sub>
@@ -35499,10 +35499,10 @@
                             </m:sSubPr>
                             <m:e>
                               <m:r>
-                                <a:rPr lang="en-US" altLang="zh-TW" sz="2400" i="1">
+                                <a:rPr lang="en-US" altLang="zh-TW" sz="2400" b="0" i="1" smtClean="0">
                                   <a:latin typeface="Cambria Math" panose="02040503050406030204" pitchFamily="18" charset="0"/>
                                 </a:rPr>
-                                <m:t>𝜔</m:t>
+                                <m:t>𝑤</m:t>
                               </m:r>
                             </m:e>
                             <m:sub>
@@ -35603,7 +35603,7 @@
                           <a:rPr lang="en-US" altLang="zh-TW" sz="2400" b="0" i="1" smtClean="0">
                             <a:latin typeface="Cambria Math" panose="02040503050406030204" pitchFamily="18" charset="0"/>
                           </a:rPr>
-                          <m:t>𝜔</m:t>
+                          <m:t>𝑤</m:t>
                         </m:r>
                       </m:e>
                       <m:sub>
@@ -35634,7 +35634,7 @@
                           <a:rPr lang="en-US" altLang="zh-TW" sz="2400" b="0" i="1" smtClean="0">
                             <a:latin typeface="Cambria Math" panose="02040503050406030204" pitchFamily="18" charset="0"/>
                           </a:rPr>
-                          <m:t>𝜔</m:t>
+                          <m:t>𝑤</m:t>
                         </m:r>
                       </m:e>
                       <m:sub>
@@ -35709,10 +35709,10 @@
                       </m:sSubPr>
                       <m:e>
                         <m:r>
-                          <a:rPr lang="en-US" altLang="zh-TW" sz="2400" i="1">
+                          <a:rPr lang="en-US" altLang="zh-TW" sz="2400" b="0" i="1" smtClean="0">
                             <a:latin typeface="Cambria Math" panose="02040503050406030204" pitchFamily="18" charset="0"/>
                           </a:rPr>
-                          <m:t>𝜔</m:t>
+                          <m:t>𝑤</m:t>
                         </m:r>
                       </m:e>
                       <m:sub>
@@ -35751,7 +35751,7 @@
             </p:txBody>
           </p:sp>
         </mc:Choice>
-        <mc:Fallback xmlns="">
+        <mc:Fallback>
           <p:sp>
             <p:nvSpPr>
               <p:cNvPr id="3" name="Content Placeholder 2">
@@ -38004,7 +38004,7 @@
           <p:nvPr/>
         </p:nvPicPr>
         <p:blipFill>
-          <a:blip r:embed="rId3"/>
+          <a:blip r:embed="rId2"/>
           <a:srcRect/>
           <a:stretch/>
         </p:blipFill>
@@ -38033,7 +38033,7 @@
           <p:nvPr/>
         </p:nvPicPr>
         <p:blipFill>
-          <a:blip r:embed="rId4"/>
+          <a:blip r:embed="rId3"/>
           <a:stretch>
             <a:fillRect/>
           </a:stretch>
